--- a/FinCore_Digital_Banking_Modified.pptx
+++ b/FinCore_Digital_Banking_Modified.pptx
@@ -5,24 +5,20 @@
     <p:sldMasterId id="2147483648" r:id="rId1"/>
   </p:sldMasterIdLst>
   <p:sldIdLst>
-    <p:sldId id="256" r:id="rId7"/>
-    <p:sldId id="257" r:id="rId8"/>
-    <p:sldId id="258" r:id="rId9"/>
-    <p:sldId id="259" r:id="rId10"/>
-    <p:sldId id="260" r:id="rId11"/>
-    <p:sldId id="261" r:id="rId12"/>
-    <p:sldId id="262" r:id="rId13"/>
-    <p:sldId id="263" r:id="rId14"/>
-    <p:sldId id="264" r:id="rId15"/>
-    <p:sldId id="265" r:id="rId16"/>
-    <p:sldId id="266" r:id="rId17"/>
-    <p:sldId id="267" r:id="rId18"/>
-    <p:sldId id="268" r:id="rId19"/>
-    <p:sldId id="269" r:id="rId20"/>
-    <p:sldId id="270" r:id="rId21"/>
-    <p:sldId id="271" r:id="rId22"/>
+    <p:sldId id="256" r:id="rId2"/>
+    <p:sldId id="257" r:id="rId3"/>
+    <p:sldId id="258" r:id="rId4"/>
+    <p:sldId id="259" r:id="rId5"/>
+    <p:sldId id="260" r:id="rId6"/>
+    <p:sldId id="261" r:id="rId7"/>
+    <p:sldId id="262" r:id="rId8"/>
+    <p:sldId id="263" r:id="rId9"/>
+    <p:sldId id="266" r:id="rId10"/>
+    <p:sldId id="267" r:id="rId11"/>
+    <p:sldId id="269" r:id="rId12"/>
+    <p:sldId id="271" r:id="rId13"/>
   </p:sldIdLst>
-  <p:sldSz cx="12191999" cy="6858000" type="screen4x3"/>
+  <p:sldSz cx="12192000" cy="6858000"/>
   <p:notesSz cx="6858000" cy="9144000"/>
   <p:defaultTextStyle>
     <a:defPPr>
@@ -119,6 +115,22 @@
       </a:defRPr>
     </a:lvl9pPr>
   </p:defaultTextStyle>
+  <p:extLst>
+    <p:ext uri="{EFAFB233-063F-42B5-8137-9DF3F51BA10A}">
+      <p15:sldGuideLst xmlns:p15="http://schemas.microsoft.com/office/powerpoint/2012/main">
+        <p15:guide id="1" orient="horz" pos="2160">
+          <p15:clr>
+            <a:srgbClr val="A4A3A4"/>
+          </p15:clr>
+        </p15:guide>
+        <p15:guide id="2" pos="2880">
+          <p15:clr>
+            <a:srgbClr val="A4A3A4"/>
+          </p15:clr>
+        </p15:guide>
+      </p15:sldGuideLst>
+    </p:ext>
+  </p:extLst>
 </p:presentation>
 </file>
 
@@ -160,10 +172,9 @@
           <a:lstStyle/>
           <a:p>
             <a:r>
-              <a:rPr lang="en-US" smtClean="0"/>
+              <a:rPr lang="en-US"/>
               <a:t>Click to edit Master title style</a:t>
             </a:r>
-            <a:endParaRPr lang="en-US"/>
           </a:p>
         </p:txBody>
       </p:sp>
@@ -279,10 +290,9 @@
           </a:lstStyle>
           <a:p>
             <a:r>
-              <a:rPr lang="en-US" smtClean="0"/>
+              <a:rPr lang="en-US"/>
               <a:t>Click to edit Master subtitle style</a:t>
             </a:r>
-            <a:endParaRPr lang="en-US"/>
           </a:p>
         </p:txBody>
       </p:sp>
@@ -303,7 +313,7 @@
           <a:p>
             <a:fld id="{5BCAD085-E8A6-8845-BD4E-CB4CCA059FC4}" type="datetimeFigureOut">
               <a:rPr lang="en-US" smtClean="0"/>
-              <a:t>1/27/13</a:t>
+              <a:t>03-Sep-26</a:t>
             </a:fld>
             <a:endParaRPr lang="en-US"/>
           </a:p>
@@ -397,10 +407,9 @@
           <a:lstStyle/>
           <a:p>
             <a:r>
-              <a:rPr lang="en-US" smtClean="0"/>
+              <a:rPr lang="en-US"/>
               <a:t>Click to edit Master title style</a:t>
             </a:r>
-            <a:endParaRPr lang="en-US"/>
           </a:p>
         </p:txBody>
       </p:sp>
@@ -421,38 +430,37 @@
           <a:p>
             <a:pPr lvl="0"/>
             <a:r>
-              <a:rPr lang="en-US" smtClean="0"/>
+              <a:rPr lang="en-US"/>
               <a:t>Click to edit Master text styles</a:t>
             </a:r>
           </a:p>
           <a:p>
             <a:pPr lvl="1"/>
             <a:r>
-              <a:rPr lang="en-US" smtClean="0"/>
+              <a:rPr lang="en-US"/>
               <a:t>Second level</a:t>
             </a:r>
           </a:p>
           <a:p>
             <a:pPr lvl="2"/>
             <a:r>
-              <a:rPr lang="en-US" smtClean="0"/>
+              <a:rPr lang="en-US"/>
               <a:t>Third level</a:t>
             </a:r>
           </a:p>
           <a:p>
             <a:pPr lvl="3"/>
             <a:r>
-              <a:rPr lang="en-US" smtClean="0"/>
+              <a:rPr lang="en-US"/>
               <a:t>Fourth level</a:t>
             </a:r>
           </a:p>
           <a:p>
             <a:pPr lvl="4"/>
             <a:r>
-              <a:rPr lang="en-US" smtClean="0"/>
+              <a:rPr lang="en-US"/>
               <a:t>Fifth level</a:t>
             </a:r>
-            <a:endParaRPr lang="en-US"/>
           </a:p>
         </p:txBody>
       </p:sp>
@@ -473,7 +481,7 @@
           <a:p>
             <a:fld id="{5BCAD085-E8A6-8845-BD4E-CB4CCA059FC4}" type="datetimeFigureOut">
               <a:rPr lang="en-US" smtClean="0"/>
-              <a:t>1/27/13</a:t>
+              <a:t>03-Sep-26</a:t>
             </a:fld>
             <a:endParaRPr lang="en-US"/>
           </a:p>
@@ -572,10 +580,9 @@
           <a:lstStyle/>
           <a:p>
             <a:r>
-              <a:rPr lang="en-US" smtClean="0"/>
+              <a:rPr lang="en-US"/>
               <a:t>Click to edit Master title style</a:t>
             </a:r>
-            <a:endParaRPr lang="en-US"/>
           </a:p>
         </p:txBody>
       </p:sp>
@@ -601,38 +608,37 @@
           <a:p>
             <a:pPr lvl="0"/>
             <a:r>
-              <a:rPr lang="en-US" smtClean="0"/>
+              <a:rPr lang="en-US"/>
               <a:t>Click to edit Master text styles</a:t>
             </a:r>
           </a:p>
           <a:p>
             <a:pPr lvl="1"/>
             <a:r>
-              <a:rPr lang="en-US" smtClean="0"/>
+              <a:rPr lang="en-US"/>
               <a:t>Second level</a:t>
             </a:r>
           </a:p>
           <a:p>
             <a:pPr lvl="2"/>
             <a:r>
-              <a:rPr lang="en-US" smtClean="0"/>
+              <a:rPr lang="en-US"/>
               <a:t>Third level</a:t>
             </a:r>
           </a:p>
           <a:p>
             <a:pPr lvl="3"/>
             <a:r>
-              <a:rPr lang="en-US" smtClean="0"/>
+              <a:rPr lang="en-US"/>
               <a:t>Fourth level</a:t>
             </a:r>
           </a:p>
           <a:p>
             <a:pPr lvl="4"/>
             <a:r>
-              <a:rPr lang="en-US" smtClean="0"/>
+              <a:rPr lang="en-US"/>
               <a:t>Fifth level</a:t>
             </a:r>
-            <a:endParaRPr lang="en-US"/>
           </a:p>
         </p:txBody>
       </p:sp>
@@ -653,7 +659,7 @@
           <a:p>
             <a:fld id="{5BCAD085-E8A6-8845-BD4E-CB4CCA059FC4}" type="datetimeFigureOut">
               <a:rPr lang="en-US" smtClean="0"/>
-              <a:t>1/27/13</a:t>
+              <a:t>03-Sep-26</a:t>
             </a:fld>
             <a:endParaRPr lang="en-US"/>
           </a:p>
@@ -747,10 +753,9 @@
           <a:lstStyle/>
           <a:p>
             <a:r>
-              <a:rPr lang="en-US" smtClean="0"/>
+              <a:rPr lang="en-US"/>
               <a:t>Click to edit Master title style</a:t>
             </a:r>
-            <a:endParaRPr lang="en-US"/>
           </a:p>
         </p:txBody>
       </p:sp>
@@ -771,38 +776,37 @@
           <a:p>
             <a:pPr lvl="0"/>
             <a:r>
-              <a:rPr lang="en-US" smtClean="0"/>
+              <a:rPr lang="en-US"/>
               <a:t>Click to edit Master text styles</a:t>
             </a:r>
           </a:p>
           <a:p>
             <a:pPr lvl="1"/>
             <a:r>
-              <a:rPr lang="en-US" smtClean="0"/>
+              <a:rPr lang="en-US"/>
               <a:t>Second level</a:t>
             </a:r>
           </a:p>
           <a:p>
             <a:pPr lvl="2"/>
             <a:r>
-              <a:rPr lang="en-US" smtClean="0"/>
+              <a:rPr lang="en-US"/>
               <a:t>Third level</a:t>
             </a:r>
           </a:p>
           <a:p>
             <a:pPr lvl="3"/>
             <a:r>
-              <a:rPr lang="en-US" smtClean="0"/>
+              <a:rPr lang="en-US"/>
               <a:t>Fourth level</a:t>
             </a:r>
           </a:p>
           <a:p>
             <a:pPr lvl="4"/>
             <a:r>
-              <a:rPr lang="en-US" smtClean="0"/>
+              <a:rPr lang="en-US"/>
               <a:t>Fifth level</a:t>
             </a:r>
-            <a:endParaRPr lang="en-US"/>
           </a:p>
         </p:txBody>
       </p:sp>
@@ -823,7 +827,7 @@
           <a:p>
             <a:fld id="{5BCAD085-E8A6-8845-BD4E-CB4CCA059FC4}" type="datetimeFigureOut">
               <a:rPr lang="en-US" smtClean="0"/>
-              <a:t>1/27/13</a:t>
+              <a:t>03-Sep-26</a:t>
             </a:fld>
             <a:endParaRPr lang="en-US"/>
           </a:p>
@@ -926,10 +930,9 @@
           </a:lstStyle>
           <a:p>
             <a:r>
-              <a:rPr lang="en-US" smtClean="0"/>
+              <a:rPr lang="en-US"/>
               <a:t>Click to edit Master title style</a:t>
             </a:r>
-            <a:endParaRPr lang="en-US"/>
           </a:p>
         </p:txBody>
       </p:sp>
@@ -1046,7 +1049,7 @@
           <a:p>
             <a:pPr lvl="0"/>
             <a:r>
-              <a:rPr lang="en-US" smtClean="0"/>
+              <a:rPr lang="en-US"/>
               <a:t>Click to edit Master text styles</a:t>
             </a:r>
           </a:p>
@@ -1069,7 +1072,7 @@
           <a:p>
             <a:fld id="{5BCAD085-E8A6-8845-BD4E-CB4CCA059FC4}" type="datetimeFigureOut">
               <a:rPr lang="en-US" smtClean="0"/>
-              <a:t>1/27/13</a:t>
+              <a:t>03-Sep-26</a:t>
             </a:fld>
             <a:endParaRPr lang="en-US"/>
           </a:p>
@@ -1163,10 +1166,9 @@
           <a:lstStyle/>
           <a:p>
             <a:r>
-              <a:rPr lang="en-US" smtClean="0"/>
+              <a:rPr lang="en-US"/>
               <a:t>Click to edit Master title style</a:t>
             </a:r>
-            <a:endParaRPr lang="en-US"/>
           </a:p>
         </p:txBody>
       </p:sp>
@@ -1220,38 +1222,37 @@
           <a:p>
             <a:pPr lvl="0"/>
             <a:r>
-              <a:rPr lang="en-US" smtClean="0"/>
+              <a:rPr lang="en-US"/>
               <a:t>Click to edit Master text styles</a:t>
             </a:r>
           </a:p>
           <a:p>
             <a:pPr lvl="1"/>
             <a:r>
-              <a:rPr lang="en-US" smtClean="0"/>
+              <a:rPr lang="en-US"/>
               <a:t>Second level</a:t>
             </a:r>
           </a:p>
           <a:p>
             <a:pPr lvl="2"/>
             <a:r>
-              <a:rPr lang="en-US" smtClean="0"/>
+              <a:rPr lang="en-US"/>
               <a:t>Third level</a:t>
             </a:r>
           </a:p>
           <a:p>
             <a:pPr lvl="3"/>
             <a:r>
-              <a:rPr lang="en-US" smtClean="0"/>
+              <a:rPr lang="en-US"/>
               <a:t>Fourth level</a:t>
             </a:r>
           </a:p>
           <a:p>
             <a:pPr lvl="4"/>
             <a:r>
-              <a:rPr lang="en-US" smtClean="0"/>
+              <a:rPr lang="en-US"/>
               <a:t>Fifth level</a:t>
             </a:r>
-            <a:endParaRPr lang="en-US"/>
           </a:p>
         </p:txBody>
       </p:sp>
@@ -1305,38 +1306,37 @@
           <a:p>
             <a:pPr lvl="0"/>
             <a:r>
-              <a:rPr lang="en-US" smtClean="0"/>
+              <a:rPr lang="en-US"/>
               <a:t>Click to edit Master text styles</a:t>
             </a:r>
           </a:p>
           <a:p>
             <a:pPr lvl="1"/>
             <a:r>
-              <a:rPr lang="en-US" smtClean="0"/>
+              <a:rPr lang="en-US"/>
               <a:t>Second level</a:t>
             </a:r>
           </a:p>
           <a:p>
             <a:pPr lvl="2"/>
             <a:r>
-              <a:rPr lang="en-US" smtClean="0"/>
+              <a:rPr lang="en-US"/>
               <a:t>Third level</a:t>
             </a:r>
           </a:p>
           <a:p>
             <a:pPr lvl="3"/>
             <a:r>
-              <a:rPr lang="en-US" smtClean="0"/>
+              <a:rPr lang="en-US"/>
               <a:t>Fourth level</a:t>
             </a:r>
           </a:p>
           <a:p>
             <a:pPr lvl="4"/>
             <a:r>
-              <a:rPr lang="en-US" smtClean="0"/>
+              <a:rPr lang="en-US"/>
               <a:t>Fifth level</a:t>
             </a:r>
-            <a:endParaRPr lang="en-US"/>
           </a:p>
         </p:txBody>
       </p:sp>
@@ -1357,7 +1357,7 @@
           <a:p>
             <a:fld id="{5BCAD085-E8A6-8845-BD4E-CB4CCA059FC4}" type="datetimeFigureOut">
               <a:rPr lang="en-US" smtClean="0"/>
-              <a:t>1/27/13</a:t>
+              <a:t>03-Sep-26</a:t>
             </a:fld>
             <a:endParaRPr lang="en-US"/>
           </a:p>
@@ -1455,10 +1455,9 @@
           </a:lstStyle>
           <a:p>
             <a:r>
-              <a:rPr lang="en-US" smtClean="0"/>
+              <a:rPr lang="en-US"/>
               <a:t>Click to edit Master title style</a:t>
             </a:r>
-            <a:endParaRPr lang="en-US"/>
           </a:p>
         </p:txBody>
       </p:sp>
@@ -1521,7 +1520,7 @@
           <a:p>
             <a:pPr lvl="0"/>
             <a:r>
-              <a:rPr lang="en-US" smtClean="0"/>
+              <a:rPr lang="en-US"/>
               <a:t>Click to edit Master text styles</a:t>
             </a:r>
           </a:p>
@@ -1577,38 +1576,37 @@
           <a:p>
             <a:pPr lvl="0"/>
             <a:r>
-              <a:rPr lang="en-US" smtClean="0"/>
+              <a:rPr lang="en-US"/>
               <a:t>Click to edit Master text styles</a:t>
             </a:r>
           </a:p>
           <a:p>
             <a:pPr lvl="1"/>
             <a:r>
-              <a:rPr lang="en-US" smtClean="0"/>
+              <a:rPr lang="en-US"/>
               <a:t>Second level</a:t>
             </a:r>
           </a:p>
           <a:p>
             <a:pPr lvl="2"/>
             <a:r>
-              <a:rPr lang="en-US" smtClean="0"/>
+              <a:rPr lang="en-US"/>
               <a:t>Third level</a:t>
             </a:r>
           </a:p>
           <a:p>
             <a:pPr lvl="3"/>
             <a:r>
-              <a:rPr lang="en-US" smtClean="0"/>
+              <a:rPr lang="en-US"/>
               <a:t>Fourth level</a:t>
             </a:r>
           </a:p>
           <a:p>
             <a:pPr lvl="4"/>
             <a:r>
-              <a:rPr lang="en-US" smtClean="0"/>
+              <a:rPr lang="en-US"/>
               <a:t>Fifth level</a:t>
             </a:r>
-            <a:endParaRPr lang="en-US"/>
           </a:p>
         </p:txBody>
       </p:sp>
@@ -1671,7 +1669,7 @@
           <a:p>
             <a:pPr lvl="0"/>
             <a:r>
-              <a:rPr lang="en-US" smtClean="0"/>
+              <a:rPr lang="en-US"/>
               <a:t>Click to edit Master text styles</a:t>
             </a:r>
           </a:p>
@@ -1727,38 +1725,37 @@
           <a:p>
             <a:pPr lvl="0"/>
             <a:r>
-              <a:rPr lang="en-US" smtClean="0"/>
+              <a:rPr lang="en-US"/>
               <a:t>Click to edit Master text styles</a:t>
             </a:r>
           </a:p>
           <a:p>
             <a:pPr lvl="1"/>
             <a:r>
-              <a:rPr lang="en-US" smtClean="0"/>
+              <a:rPr lang="en-US"/>
               <a:t>Second level</a:t>
             </a:r>
           </a:p>
           <a:p>
             <a:pPr lvl="2"/>
             <a:r>
-              <a:rPr lang="en-US" smtClean="0"/>
+              <a:rPr lang="en-US"/>
               <a:t>Third level</a:t>
             </a:r>
           </a:p>
           <a:p>
             <a:pPr lvl="3"/>
             <a:r>
-              <a:rPr lang="en-US" smtClean="0"/>
+              <a:rPr lang="en-US"/>
               <a:t>Fourth level</a:t>
             </a:r>
           </a:p>
           <a:p>
             <a:pPr lvl="4"/>
             <a:r>
-              <a:rPr lang="en-US" smtClean="0"/>
+              <a:rPr lang="en-US"/>
               <a:t>Fifth level</a:t>
             </a:r>
-            <a:endParaRPr lang="en-US"/>
           </a:p>
         </p:txBody>
       </p:sp>
@@ -1779,7 +1776,7 @@
           <a:p>
             <a:fld id="{5BCAD085-E8A6-8845-BD4E-CB4CCA059FC4}" type="datetimeFigureOut">
               <a:rPr lang="en-US" smtClean="0"/>
-              <a:t>1/27/13</a:t>
+              <a:t>03-Sep-26</a:t>
             </a:fld>
             <a:endParaRPr lang="en-US"/>
           </a:p>
@@ -1873,10 +1870,9 @@
           <a:lstStyle/>
           <a:p>
             <a:r>
-              <a:rPr lang="en-US" smtClean="0"/>
+              <a:rPr lang="en-US"/>
               <a:t>Click to edit Master title style</a:t>
             </a:r>
-            <a:endParaRPr lang="en-US"/>
           </a:p>
         </p:txBody>
       </p:sp>
@@ -1897,7 +1893,7 @@
           <a:p>
             <a:fld id="{5BCAD085-E8A6-8845-BD4E-CB4CCA059FC4}" type="datetimeFigureOut">
               <a:rPr lang="en-US" smtClean="0"/>
-              <a:t>1/27/13</a:t>
+              <a:t>03-Sep-26</a:t>
             </a:fld>
             <a:endParaRPr lang="en-US"/>
           </a:p>
@@ -1992,7 +1988,7 @@
           <a:p>
             <a:fld id="{5BCAD085-E8A6-8845-BD4E-CB4CCA059FC4}" type="datetimeFigureOut">
               <a:rPr lang="en-US" smtClean="0"/>
-              <a:t>1/27/13</a:t>
+              <a:t>03-Sep-26</a:t>
             </a:fld>
             <a:endParaRPr lang="en-US"/>
           </a:p>
@@ -2095,10 +2091,9 @@
           </a:lstStyle>
           <a:p>
             <a:r>
-              <a:rPr lang="en-US" smtClean="0"/>
+              <a:rPr lang="en-US"/>
               <a:t>Click to edit Master title style</a:t>
             </a:r>
-            <a:endParaRPr lang="en-US"/>
           </a:p>
         </p:txBody>
       </p:sp>
@@ -2152,38 +2147,37 @@
           <a:p>
             <a:pPr lvl="0"/>
             <a:r>
-              <a:rPr lang="en-US" smtClean="0"/>
+              <a:rPr lang="en-US"/>
               <a:t>Click to edit Master text styles</a:t>
             </a:r>
           </a:p>
           <a:p>
             <a:pPr lvl="1"/>
             <a:r>
-              <a:rPr lang="en-US" smtClean="0"/>
+              <a:rPr lang="en-US"/>
               <a:t>Second level</a:t>
             </a:r>
           </a:p>
           <a:p>
             <a:pPr lvl="2"/>
             <a:r>
-              <a:rPr lang="en-US" smtClean="0"/>
+              <a:rPr lang="en-US"/>
               <a:t>Third level</a:t>
             </a:r>
           </a:p>
           <a:p>
             <a:pPr lvl="3"/>
             <a:r>
-              <a:rPr lang="en-US" smtClean="0"/>
+              <a:rPr lang="en-US"/>
               <a:t>Fourth level</a:t>
             </a:r>
           </a:p>
           <a:p>
             <a:pPr lvl="4"/>
             <a:r>
-              <a:rPr lang="en-US" smtClean="0"/>
+              <a:rPr lang="en-US"/>
               <a:t>Fifth level</a:t>
             </a:r>
-            <a:endParaRPr lang="en-US"/>
           </a:p>
         </p:txBody>
       </p:sp>
@@ -2246,7 +2240,7 @@
           <a:p>
             <a:pPr lvl="0"/>
             <a:r>
-              <a:rPr lang="en-US" smtClean="0"/>
+              <a:rPr lang="en-US"/>
               <a:t>Click to edit Master text styles</a:t>
             </a:r>
           </a:p>
@@ -2269,7 +2263,7 @@
           <a:p>
             <a:fld id="{5BCAD085-E8A6-8845-BD4E-CB4CCA059FC4}" type="datetimeFigureOut">
               <a:rPr lang="en-US" smtClean="0"/>
-              <a:t>1/27/13</a:t>
+              <a:t>03-Sep-26</a:t>
             </a:fld>
             <a:endParaRPr lang="en-US"/>
           </a:p>
@@ -2372,10 +2366,9 @@
           </a:lstStyle>
           <a:p>
             <a:r>
-              <a:rPr lang="en-US" smtClean="0"/>
+              <a:rPr lang="en-US"/>
               <a:t>Click to edit Master title style</a:t>
             </a:r>
-            <a:endParaRPr lang="en-US"/>
           </a:p>
         </p:txBody>
       </p:sp>
@@ -2499,7 +2492,7 @@
           <a:p>
             <a:pPr lvl="0"/>
             <a:r>
-              <a:rPr lang="en-US" smtClean="0"/>
+              <a:rPr lang="en-US"/>
               <a:t>Click to edit Master text styles</a:t>
             </a:r>
           </a:p>
@@ -2522,7 +2515,7 @@
           <a:p>
             <a:fld id="{5BCAD085-E8A6-8845-BD4E-CB4CCA059FC4}" type="datetimeFigureOut">
               <a:rPr lang="en-US" smtClean="0"/>
-              <a:t>1/27/13</a:t>
+              <a:t>03-Sep-26</a:t>
             </a:fld>
             <a:endParaRPr lang="en-US"/>
           </a:p>
@@ -2631,10 +2624,9 @@
           <a:lstStyle/>
           <a:p>
             <a:r>
-              <a:rPr lang="en-US" smtClean="0"/>
+              <a:rPr lang="en-US"/>
               <a:t>Click to edit Master title style</a:t>
             </a:r>
-            <a:endParaRPr lang="en-US"/>
           </a:p>
         </p:txBody>
       </p:sp>
@@ -2665,38 +2657,37 @@
           <a:p>
             <a:pPr lvl="0"/>
             <a:r>
-              <a:rPr lang="en-US" smtClean="0"/>
+              <a:rPr lang="en-US"/>
               <a:t>Click to edit Master text styles</a:t>
             </a:r>
           </a:p>
           <a:p>
             <a:pPr lvl="1"/>
             <a:r>
-              <a:rPr lang="en-US" smtClean="0"/>
+              <a:rPr lang="en-US"/>
               <a:t>Second level</a:t>
             </a:r>
           </a:p>
           <a:p>
             <a:pPr lvl="2"/>
             <a:r>
-              <a:rPr lang="en-US" smtClean="0"/>
+              <a:rPr lang="en-US"/>
               <a:t>Third level</a:t>
             </a:r>
           </a:p>
           <a:p>
             <a:pPr lvl="3"/>
             <a:r>
-              <a:rPr lang="en-US" smtClean="0"/>
+              <a:rPr lang="en-US"/>
               <a:t>Fourth level</a:t>
             </a:r>
           </a:p>
           <a:p>
             <a:pPr lvl="4"/>
             <a:r>
-              <a:rPr lang="en-US" smtClean="0"/>
+              <a:rPr lang="en-US"/>
               <a:t>Fifth level</a:t>
             </a:r>
-            <a:endParaRPr lang="en-US"/>
           </a:p>
         </p:txBody>
       </p:sp>
@@ -2735,7 +2726,7 @@
           <a:p>
             <a:fld id="{5BCAD085-E8A6-8845-BD4E-CB4CCA059FC4}" type="datetimeFigureOut">
               <a:rPr lang="en-US" smtClean="0"/>
-              <a:t>1/27/13</a:t>
+              <a:t>03-Sep-26</a:t>
             </a:fld>
             <a:endParaRPr lang="en-US"/>
           </a:p>
@@ -3094,7 +3085,7 @@
 </file>
 
 <file path=ppt/slides/slide1.xml><?xml version="1.0" encoding="utf-8"?>
-<p:sld xmlns:a="http://schemas.openxmlformats.org/drawingml/2006/main" xmlns:p="http://schemas.openxmlformats.org/presentationml/2006/main" xmlns:r="http://schemas.openxmlformats.org/officeDocument/2006/relationships">
+<p:sld xmlns:a="http://schemas.openxmlformats.org/drawingml/2006/main" xmlns:r="http://schemas.openxmlformats.org/officeDocument/2006/relationships" xmlns:p="http://schemas.openxmlformats.org/presentationml/2006/main">
   <p:cSld>
     <p:spTree>
       <p:nvGrpSpPr>
@@ -3102,7 +3093,14 @@
         <p:cNvGrpSpPr/>
         <p:nvPr/>
       </p:nvGrpSpPr>
-      <p:grpSpPr/>
+      <p:grpSpPr>
+        <a:xfrm>
+          <a:off x="0" y="0"/>
+          <a:ext cx="0" cy="0"/>
+          <a:chOff x="0" y="0"/>
+          <a:chExt cx="0" cy="0"/>
+        </a:xfrm>
+      </p:grpSpPr>
       <p:pic>
         <p:nvPicPr>
           <p:cNvPr id="2" name="Picture 1" descr="Slide_01_Background.png"/>
@@ -3169,6 +3167,7 @@
           <a:lstStyle/>
           <a:p>
             <a:pPr algn="ctr"/>
+            <a:endParaRPr/>
           </a:p>
         </p:txBody>
       </p:sp>
@@ -3189,7 +3188,7 @@
           <a:noFill/>
         </p:spPr>
         <p:txBody>
-          <a:bodyPr wrap="square" lIns="36576" rIns="36576" tIns="18288" bIns="18288" anchor="t">
+          <a:bodyPr wrap="square" lIns="36576" tIns="18288" rIns="36576" bIns="18288" anchor="t">
             <a:spAutoFit/>
           </a:bodyPr>
           <a:lstStyle/>
@@ -3224,7 +3223,7 @@
           <a:noFill/>
         </p:spPr>
         <p:txBody>
-          <a:bodyPr wrap="square" lIns="36576" rIns="36576" tIns="18288" bIns="18288" anchor="t">
+          <a:bodyPr wrap="square" lIns="36576" tIns="18288" rIns="36576" bIns="18288" anchor="t">
             <a:spAutoFit/>
           </a:bodyPr>
           <a:lstStyle/>
@@ -3259,7 +3258,7 @@
           <a:noFill/>
         </p:spPr>
         <p:txBody>
-          <a:bodyPr wrap="square" lIns="36576" rIns="36576" tIns="18288" bIns="18288" anchor="t">
+          <a:bodyPr wrap="square" lIns="36576" tIns="18288" rIns="36576" bIns="18288" anchor="t">
             <a:spAutoFit/>
           </a:bodyPr>
           <a:lstStyle/>
@@ -3294,7 +3293,7 @@
           <a:noFill/>
         </p:spPr>
         <p:txBody>
-          <a:bodyPr wrap="square" lIns="36576" rIns="36576" tIns="18288" bIns="18288" anchor="t">
+          <a:bodyPr wrap="square" lIns="36576" tIns="18288" rIns="36576" bIns="18288" anchor="t">
             <a:spAutoFit/>
           </a:bodyPr>
           <a:lstStyle/>
@@ -3330,7 +3329,7 @@
           <a:noFill/>
         </p:spPr>
         <p:txBody>
-          <a:bodyPr wrap="square" lIns="36576" rIns="36576" tIns="18288" bIns="18288" anchor="t">
+          <a:bodyPr wrap="square" lIns="36576" tIns="18288" rIns="36576" bIns="18288" anchor="t">
             <a:spAutoFit/>
           </a:bodyPr>
           <a:lstStyle/>
@@ -3392,6 +3391,7 @@
           <a:lstStyle/>
           <a:p>
             <a:pPr algn="ctr"/>
+            <a:endParaRPr/>
           </a:p>
         </p:txBody>
       </p:sp>
@@ -3412,7 +3412,7 @@
           <a:noFill/>
         </p:spPr>
         <p:txBody>
-          <a:bodyPr wrap="square" lIns="36576" rIns="36576" tIns="18288" bIns="18288" anchor="t">
+          <a:bodyPr wrap="square" lIns="36576" tIns="18288" rIns="36576" bIns="18288" anchor="t">
             <a:spAutoFit/>
           </a:bodyPr>
           <a:lstStyle/>
@@ -3447,7 +3447,7 @@
           <a:noFill/>
         </p:spPr>
         <p:txBody>
-          <a:bodyPr wrap="square" lIns="36576" rIns="36576" tIns="18288" bIns="18288" anchor="t">
+          <a:bodyPr wrap="square" lIns="36576" tIns="18288" rIns="36576" bIns="18288" anchor="t">
             <a:spAutoFit/>
           </a:bodyPr>
           <a:lstStyle/>
@@ -3494,7 +3494,7 @@
           <a:noFill/>
         </p:spPr>
         <p:txBody>
-          <a:bodyPr wrap="square" lIns="36576" rIns="36576" tIns="18288" bIns="18288" anchor="t">
+          <a:bodyPr wrap="square" lIns="36576" tIns="18288" rIns="36576" bIns="18288" anchor="t">
             <a:spAutoFit/>
           </a:bodyPr>
           <a:lstStyle/>
@@ -3556,6 +3556,7 @@
           <a:lstStyle/>
           <a:p>
             <a:pPr algn="ctr"/>
+            <a:endParaRPr/>
           </a:p>
         </p:txBody>
       </p:sp>
@@ -3576,7 +3577,7 @@
           <a:noFill/>
         </p:spPr>
         <p:txBody>
-          <a:bodyPr wrap="square" lIns="36576" rIns="36576" tIns="18288" bIns="18288" anchor="t">
+          <a:bodyPr wrap="square" lIns="36576" tIns="18288" rIns="36576" bIns="18288" anchor="t">
             <a:spAutoFit/>
           </a:bodyPr>
           <a:lstStyle/>
@@ -3611,7 +3612,7 @@
           <a:noFill/>
         </p:spPr>
         <p:txBody>
-          <a:bodyPr wrap="square" lIns="36576" rIns="36576" tIns="18288" bIns="18288" anchor="t">
+          <a:bodyPr wrap="square" lIns="36576" tIns="18288" rIns="36576" bIns="18288" anchor="t">
             <a:spAutoFit/>
           </a:bodyPr>
           <a:lstStyle/>
@@ -3710,7 +3711,7 @@
           <a:noFill/>
         </p:spPr>
         <p:txBody>
-          <a:bodyPr wrap="square" lIns="36576" rIns="36576" tIns="18288" bIns="18288" anchor="t">
+          <a:bodyPr wrap="square" lIns="36576" tIns="18288" rIns="36576" bIns="18288" anchor="t">
             <a:spAutoFit/>
           </a:bodyPr>
           <a:lstStyle/>
@@ -3745,7 +3746,7 @@
           <a:noFill/>
         </p:spPr>
         <p:txBody>
-          <a:bodyPr wrap="square" lIns="36576" rIns="36576" tIns="18288" bIns="18288" anchor="t">
+          <a:bodyPr wrap="square" lIns="36576" tIns="18288" rIns="36576" bIns="18288" anchor="t">
             <a:spAutoFit/>
           </a:bodyPr>
           <a:lstStyle/>
@@ -3772,7 +3773,7 @@
 </file>
 
 <file path=ppt/slides/slide10.xml><?xml version="1.0" encoding="utf-8"?>
-<p:sld xmlns:a="http://schemas.openxmlformats.org/drawingml/2006/main" xmlns:p="http://schemas.openxmlformats.org/presentationml/2006/main" xmlns:r="http://schemas.openxmlformats.org/officeDocument/2006/relationships">
+<p:sld xmlns:a="http://schemas.openxmlformats.org/drawingml/2006/main" xmlns:r="http://schemas.openxmlformats.org/officeDocument/2006/relationships" xmlns:p="http://schemas.openxmlformats.org/presentationml/2006/main">
   <p:cSld>
     <p:spTree>
       <p:nvGrpSpPr>
@@ -3780,10 +3781,17 @@
         <p:cNvGrpSpPr/>
         <p:nvPr/>
       </p:nvGrpSpPr>
-      <p:grpSpPr/>
+      <p:grpSpPr>
+        <a:xfrm>
+          <a:off x="0" y="0"/>
+          <a:ext cx="0" cy="0"/>
+          <a:chOff x="0" y="0"/>
+          <a:chExt cx="0" cy="0"/>
+        </a:xfrm>
+      </p:grpSpPr>
       <p:pic>
         <p:nvPicPr>
-          <p:cNvPr id="2" name="Picture 1" descr="Slide_10_Background.png"/>
+          <p:cNvPr id="2" name="Picture 1" descr="Slide_12_Background.png"/>
           <p:cNvPicPr>
             <a:picLocks noChangeAspect="1"/>
           </p:cNvPicPr>
@@ -3847,6 +3855,7 @@
           <a:lstStyle/>
           <a:p>
             <a:pPr algn="ctr"/>
+            <a:endParaRPr/>
           </a:p>
         </p:txBody>
       </p:sp>
@@ -3867,7 +3876,7 @@
           <a:noFill/>
         </p:spPr>
         <p:txBody>
-          <a:bodyPr wrap="square" lIns="36576" rIns="36576" tIns="18288" bIns="18288" anchor="t">
+          <a:bodyPr wrap="square" lIns="36576" tIns="18288" rIns="36576" bIns="18288" anchor="t">
             <a:spAutoFit/>
           </a:bodyPr>
           <a:lstStyle/>
@@ -3880,7 +3889,7 @@
                 </a:solidFill>
                 <a:latin typeface="Aptos"/>
               </a:rPr>
-              <a:t>HOW THE PLATFORM IS BUILT</a:t>
+              <a:t>IMPLEMENTATION HIGHLIGHTS</a:t>
             </a:r>
           </a:p>
         </p:txBody>
@@ -3902,20 +3911,20 @@
           <a:noFill/>
         </p:spPr>
         <p:txBody>
-          <a:bodyPr wrap="square" lIns="36576" rIns="36576" tIns="18288" bIns="18288" anchor="t">
+          <a:bodyPr wrap="square" lIns="36576" tIns="18288" rIns="36576" bIns="18288" anchor="t">
             <a:spAutoFit/>
           </a:bodyPr>
           <a:lstStyle/>
           <a:p>
             <a:pPr algn="l"/>
             <a:r>
-              <a:rPr sz="1150" b="0">
+              <a:rPr sz="1300" b="0">
                 <a:solidFill>
                   <a:srgbClr val="082F5D"/>
                 </a:solidFill>
                 <a:latin typeface="Aptos"/>
               </a:rPr>
-              <a:t>Technology Stack</a:t>
+              <a:t>Key Achievements</a:t>
             </a:r>
           </a:p>
         </p:txBody>
@@ -3928,8 +3937,8 @@
         </p:nvSpPr>
         <p:spPr>
           <a:xfrm>
-            <a:off x="502920" y="1508760"/>
-            <a:ext cx="3520440" cy="3749039"/>
+            <a:off x="640080" y="1353312"/>
+            <a:ext cx="5806440" cy="900000"/>
           </a:xfrm>
           <a:prstGeom prst="roundRect">
             <a:avLst/>
@@ -3962,6 +3971,7 @@
           <a:lstStyle/>
           <a:p>
             <a:pPr algn="ctr"/>
+            <a:endParaRPr/>
           </a:p>
         </p:txBody>
       </p:sp>
@@ -3973,8 +3983,8 @@
         </p:nvSpPr>
         <p:spPr>
           <a:xfrm>
-            <a:off x="502920" y="1508760"/>
-            <a:ext cx="64008" cy="3749039"/>
+            <a:off x="640080" y="1353312"/>
+            <a:ext cx="64008" cy="900000"/>
           </a:xfrm>
           <a:prstGeom prst="rect">
             <a:avLst/>
@@ -4005,6 +4015,7 @@
           <a:lstStyle/>
           <a:p>
             <a:pPr algn="ctr"/>
+            <a:endParaRPr/>
           </a:p>
         </p:txBody>
       </p:sp>
@@ -4016,29 +4027,29 @@
         </p:nvSpPr>
         <p:spPr>
           <a:xfrm>
-            <a:off x="685800" y="1618488"/>
-            <a:ext cx="3227832" cy="347472"/>
-          </a:xfrm>
-          <a:prstGeom prst="rect">
-            <a:avLst/>
-          </a:prstGeom>
-          <a:noFill/>
-        </p:spPr>
-        <p:txBody>
-          <a:bodyPr wrap="square" lIns="36576" rIns="36576" tIns="18288" bIns="18288" anchor="t">
+            <a:off x="822959" y="1463040"/>
+            <a:ext cx="5513831" cy="347472"/>
+          </a:xfrm>
+          <a:prstGeom prst="rect">
+            <a:avLst/>
+          </a:prstGeom>
+          <a:noFill/>
+        </p:spPr>
+        <p:txBody>
+          <a:bodyPr wrap="square" lIns="36576" tIns="18288" rIns="36576" bIns="18288" anchor="t">
             <a:spAutoFit/>
           </a:bodyPr>
           <a:lstStyle/>
           <a:p>
             <a:pPr algn="l"/>
             <a:r>
-              <a:rPr sz="1700" b="1">
+              <a:rPr sz="1450" b="1">
                 <a:solidFill>
                   <a:srgbClr val="1569B4"/>
                 </a:solidFill>
                 <a:latin typeface="Aptos"/>
               </a:rPr>
-              <a:t>FRONTEND</a:t>
+              <a:t>Role-Based Security</a:t>
             </a:r>
           </a:p>
         </p:txBody>
@@ -4051,32 +4062,29 @@
         </p:nvSpPr>
         <p:spPr>
           <a:xfrm>
-            <a:off x="685800" y="2039112"/>
-            <a:ext cx="3227832" cy="3127247"/>
-          </a:xfrm>
-          <a:prstGeom prst="rect">
-            <a:avLst/>
-          </a:prstGeom>
-          <a:noFill/>
-        </p:spPr>
-        <p:txBody>
-          <a:bodyPr wrap="square" lIns="36576" rIns="36576" tIns="18288" bIns="18288" anchor="t">
+            <a:off x="822959" y="1883664"/>
+            <a:ext cx="5513831" cy="380000"/>
+          </a:xfrm>
+          <a:prstGeom prst="rect">
+            <a:avLst/>
+          </a:prstGeom>
+          <a:noFill/>
+        </p:spPr>
+        <p:txBody>
+          <a:bodyPr wrap="square" lIns="36576" tIns="18288" rIns="36576" bIns="18288" anchor="t">
             <a:spAutoFit/>
           </a:bodyPr>
           <a:lstStyle/>
           <a:p>
             <a:pPr algn="l"/>
             <a:r>
-              <a:rPr sz="1700" b="0">
+              <a:rPr sz="1250" b="0">
                 <a:solidFill>
                   <a:srgbClr val="1C2B39"/>
                 </a:solidFill>
                 <a:latin typeface="Aptos"/>
               </a:rPr>
-              <a:t>React.js
-Axios
-React Router
-Bootstrap / CSS</a:t>
+              <a:t>Spring Security separates Admin &amp; Customer permissions.</a:t>
             </a:r>
           </a:p>
         </p:txBody>
@@ -4089,8 +4097,8 @@
         </p:nvSpPr>
         <p:spPr>
           <a:xfrm>
-            <a:off x="4343400" y="1508760"/>
-            <a:ext cx="3520440" cy="3749039"/>
+            <a:off x="640080" y="2368312"/>
+            <a:ext cx="5806440" cy="900000"/>
           </a:xfrm>
           <a:prstGeom prst="roundRect">
             <a:avLst/>
@@ -4123,6 +4131,7 @@
           <a:lstStyle/>
           <a:p>
             <a:pPr algn="ctr"/>
+            <a:endParaRPr/>
           </a:p>
         </p:txBody>
       </p:sp>
@@ -4134,8 +4143,8 @@
         </p:nvSpPr>
         <p:spPr>
           <a:xfrm>
-            <a:off x="4343400" y="1508760"/>
-            <a:ext cx="64008" cy="3749039"/>
+            <a:off x="640080" y="2368312"/>
+            <a:ext cx="64008" cy="900000"/>
           </a:xfrm>
           <a:prstGeom prst="rect">
             <a:avLst/>
@@ -4166,6 +4175,7 @@
           <a:lstStyle/>
           <a:p>
             <a:pPr algn="ctr"/>
+            <a:endParaRPr/>
           </a:p>
         </p:txBody>
       </p:sp>
@@ -4177,29 +4187,29 @@
         </p:nvSpPr>
         <p:spPr>
           <a:xfrm>
-            <a:off x="4526280" y="1618488"/>
-            <a:ext cx="3227832" cy="347472"/>
-          </a:xfrm>
-          <a:prstGeom prst="rect">
-            <a:avLst/>
-          </a:prstGeom>
-          <a:noFill/>
-        </p:spPr>
-        <p:txBody>
-          <a:bodyPr wrap="square" lIns="36576" rIns="36576" tIns="18288" bIns="18288" anchor="t">
+            <a:off x="822959" y="2478040"/>
+            <a:ext cx="5513831" cy="347472"/>
+          </a:xfrm>
+          <a:prstGeom prst="rect">
+            <a:avLst/>
+          </a:prstGeom>
+          <a:noFill/>
+        </p:spPr>
+        <p:txBody>
+          <a:bodyPr wrap="square" lIns="36576" tIns="18288" rIns="36576" bIns="18288" anchor="t">
             <a:spAutoFit/>
           </a:bodyPr>
           <a:lstStyle/>
           <a:p>
             <a:pPr algn="l"/>
             <a:r>
-              <a:rPr sz="1700" b="1">
+              <a:rPr sz="1450" b="1">
                 <a:solidFill>
                   <a:srgbClr val="139197"/>
                 </a:solidFill>
                 <a:latin typeface="Aptos"/>
               </a:rPr>
-              <a:t>BACKEND</a:t>
+              <a:t>Customer Management</a:t>
             </a:r>
           </a:p>
         </p:txBody>
@@ -4212,32 +4222,29 @@
         </p:nvSpPr>
         <p:spPr>
           <a:xfrm>
-            <a:off x="4526280" y="2039112"/>
-            <a:ext cx="3227832" cy="3127247"/>
-          </a:xfrm>
-          <a:prstGeom prst="rect">
-            <a:avLst/>
-          </a:prstGeom>
-          <a:noFill/>
-        </p:spPr>
-        <p:txBody>
-          <a:bodyPr wrap="square" lIns="36576" rIns="36576" tIns="18288" bIns="18288" anchor="t">
+            <a:off x="822959" y="2898664"/>
+            <a:ext cx="5513831" cy="380000"/>
+          </a:xfrm>
+          <a:prstGeom prst="rect">
+            <a:avLst/>
+          </a:prstGeom>
+          <a:noFill/>
+        </p:spPr>
+        <p:txBody>
+          <a:bodyPr wrap="square" lIns="36576" tIns="18288" rIns="36576" bIns="18288" anchor="t">
             <a:spAutoFit/>
           </a:bodyPr>
           <a:lstStyle/>
           <a:p>
             <a:pPr algn="l"/>
             <a:r>
-              <a:rPr sz="1700" b="0">
+              <a:rPr sz="1250" b="0">
                 <a:solidFill>
                   <a:srgbClr val="1C2B39"/>
                 </a:solidFill>
                 <a:latin typeface="Aptos"/>
               </a:rPr>
-              <a:t>Java
-Spring Boot
-Spring MVC
-Spring Security</a:t>
+              <a:t>Request, approval &amp; account access workflow.</a:t>
             </a:r>
           </a:p>
         </p:txBody>
@@ -4250,8 +4257,8 @@
         </p:nvSpPr>
         <p:spPr>
           <a:xfrm>
-            <a:off x="8183879" y="1508760"/>
-            <a:ext cx="3520440" cy="3749039"/>
+            <a:off x="640080" y="3383312"/>
+            <a:ext cx="5806440" cy="900000"/>
           </a:xfrm>
           <a:prstGeom prst="roundRect">
             <a:avLst/>
@@ -4284,6 +4291,7 @@
           <a:lstStyle/>
           <a:p>
             <a:pPr algn="ctr"/>
+            <a:endParaRPr/>
           </a:p>
         </p:txBody>
       </p:sp>
@@ -4295,8 +4303,8 @@
         </p:nvSpPr>
         <p:spPr>
           <a:xfrm>
-            <a:off x="8183879" y="1508760"/>
-            <a:ext cx="64008" cy="3749039"/>
+            <a:off x="640080" y="3383312"/>
+            <a:ext cx="64008" cy="900000"/>
           </a:xfrm>
           <a:prstGeom prst="rect">
             <a:avLst/>
@@ -4327,6 +4335,7 @@
           <a:lstStyle/>
           <a:p>
             <a:pPr algn="ctr"/>
+            <a:endParaRPr/>
           </a:p>
         </p:txBody>
       </p:sp>
@@ -4338,29 +4347,29 @@
         </p:nvSpPr>
         <p:spPr>
           <a:xfrm>
-            <a:off x="8366759" y="1618488"/>
-            <a:ext cx="3227832" cy="347472"/>
-          </a:xfrm>
-          <a:prstGeom prst="rect">
-            <a:avLst/>
-          </a:prstGeom>
-          <a:noFill/>
-        </p:spPr>
-        <p:txBody>
-          <a:bodyPr wrap="square" lIns="36576" rIns="36576" tIns="18288" bIns="18288" anchor="t">
+            <a:off x="822959" y="3493040"/>
+            <a:ext cx="5513831" cy="347472"/>
+          </a:xfrm>
+          <a:prstGeom prst="rect">
+            <a:avLst/>
+          </a:prstGeom>
+          <a:noFill/>
+        </p:spPr>
+        <p:txBody>
+          <a:bodyPr wrap="square" lIns="36576" tIns="18288" rIns="36576" bIns="18288" anchor="t">
             <a:spAutoFit/>
           </a:bodyPr>
           <a:lstStyle/>
           <a:p>
             <a:pPr algn="l"/>
             <a:r>
-              <a:rPr sz="1700" b="1">
+              <a:rPr sz="1450" b="1">
                 <a:solidFill>
                   <a:srgbClr val="489757"/>
                 </a:solidFill>
                 <a:latin typeface="Aptos"/>
               </a:rPr>
-              <a:t>DATABASE</a:t>
+              <a:t>Transaction Management</a:t>
             </a:r>
           </a:p>
         </p:txBody>
@@ -4373,72 +4382,356 @@
         </p:nvSpPr>
         <p:spPr>
           <a:xfrm>
-            <a:off x="8366759" y="2039112"/>
-            <a:ext cx="3227832" cy="3127247"/>
-          </a:xfrm>
-          <a:prstGeom prst="rect">
-            <a:avLst/>
-          </a:prstGeom>
-          <a:noFill/>
-        </p:spPr>
-        <p:txBody>
-          <a:bodyPr wrap="square" lIns="36576" rIns="36576" tIns="18288" bIns="18288" anchor="t">
+            <a:off x="822959" y="3913664"/>
+            <a:ext cx="5513831" cy="380000"/>
+          </a:xfrm>
+          <a:prstGeom prst="rect">
+            <a:avLst/>
+          </a:prstGeom>
+          <a:noFill/>
+        </p:spPr>
+        <p:txBody>
+          <a:bodyPr wrap="square" lIns="36576" tIns="18288" rIns="36576" bIns="18288" anchor="t">
             <a:spAutoFit/>
           </a:bodyPr>
           <a:lstStyle/>
           <a:p>
             <a:pPr algn="l"/>
             <a:r>
-              <a:rPr sz="1700" b="0">
+              <a:rPr sz="1250" b="0">
                 <a:solidFill>
                   <a:srgbClr val="1C2B39"/>
                 </a:solidFill>
                 <a:latin typeface="Aptos"/>
               </a:rPr>
-              <a:t>MySQL
-Spring Data JPA</a:t>
-            </a:r>
-          </a:p>
-        </p:txBody>
-      </p:sp>
-      <p:sp>
-        <p:nvSpPr>
-          <p:cNvPr id="18" name="TextBox 17"/>
-          <p:cNvSpPr txBox="1"/>
-          <p:nvPr/>
-        </p:nvSpPr>
-        <p:spPr>
-          <a:xfrm>
-            <a:off x="3063240" y="5669280"/>
-            <a:ext cx="6126480" cy="320040"/>
-          </a:xfrm>
-          <a:prstGeom prst="rect">
-            <a:avLst/>
-          </a:prstGeom>
-          <a:noFill/>
-        </p:spPr>
-        <p:txBody>
-          <a:bodyPr wrap="square" lIns="36576" rIns="36576" tIns="18288" bIns="18288" anchor="t">
-            <a:spAutoFit/>
-          </a:bodyPr>
+              <a:t>Deposit, withdrawal, transfer &amp; history with validation.</a:t>
+            </a:r>
+          </a:p>
+        </p:txBody>
+      </p:sp>
+      <p:sp>
+        <p:nvSpPr>
+          <p:cNvPr id="18" name="Rounded Rectangle 17"/>
+          <p:cNvSpPr/>
+          <p:nvPr/>
+        </p:nvSpPr>
+        <p:spPr>
+          <a:xfrm>
+            <a:off x="640080" y="4398312"/>
+            <a:ext cx="5806440" cy="900000"/>
+          </a:xfrm>
+          <a:prstGeom prst="roundRect">
+            <a:avLst/>
+          </a:prstGeom>
+          <a:solidFill>
+            <a:srgbClr val="FFFFFF"/>
+          </a:solidFill>
+          <a:ln w="11430">
+            <a:solidFill>
+              <a:srgbClr val="BED3E4"/>
+            </a:solidFill>
+          </a:ln>
+        </p:spPr>
+        <p:style>
+          <a:lnRef idx="1">
+            <a:schemeClr val="accent1"/>
+          </a:lnRef>
+          <a:fillRef idx="3">
+            <a:schemeClr val="accent1"/>
+          </a:fillRef>
+          <a:effectRef idx="2">
+            <a:schemeClr val="accent1"/>
+          </a:effectRef>
+          <a:fontRef idx="minor">
+            <a:schemeClr val="lt1"/>
+          </a:fontRef>
+        </p:style>
+        <p:txBody>
+          <a:bodyPr rtlCol="0" anchor="ctr"/>
           <a:lstStyle/>
           <a:p>
             <a:pPr algn="ctr"/>
-            <a:r>
-              <a:rPr sz="1300" b="1">
-                <a:solidFill>
-                  <a:srgbClr val="082F5D"/>
-                </a:solidFill>
-                <a:latin typeface="Aptos"/>
-              </a:rPr>
-              <a:t>Secure  •  Scalable  •  Reliable  •  Role-Based</a:t>
-            </a:r>
-          </a:p>
-        </p:txBody>
-      </p:sp>
-      <p:sp>
-        <p:nvSpPr>
-          <p:cNvPr id="19" name="TextBox 18"/>
+            <a:endParaRPr/>
+          </a:p>
+        </p:txBody>
+      </p:sp>
+      <p:sp>
+        <p:nvSpPr>
+          <p:cNvPr id="19" name="Rectangle 18"/>
+          <p:cNvSpPr/>
+          <p:nvPr/>
+        </p:nvSpPr>
+        <p:spPr>
+          <a:xfrm>
+            <a:off x="640080" y="4398312"/>
+            <a:ext cx="64008" cy="900000"/>
+          </a:xfrm>
+          <a:prstGeom prst="rect">
+            <a:avLst/>
+          </a:prstGeom>
+          <a:solidFill>
+            <a:srgbClr val="E88B19"/>
+          </a:solidFill>
+          <a:ln>
+            <a:noFill/>
+          </a:ln>
+        </p:spPr>
+        <p:style>
+          <a:lnRef idx="1">
+            <a:schemeClr val="accent1"/>
+          </a:lnRef>
+          <a:fillRef idx="3">
+            <a:schemeClr val="accent1"/>
+          </a:fillRef>
+          <a:effectRef idx="2">
+            <a:schemeClr val="accent1"/>
+          </a:effectRef>
+          <a:fontRef idx="minor">
+            <a:schemeClr val="lt1"/>
+          </a:fontRef>
+        </p:style>
+        <p:txBody>
+          <a:bodyPr rtlCol="0" anchor="ctr"/>
+          <a:lstStyle/>
+          <a:p>
+            <a:pPr algn="ctr"/>
+            <a:endParaRPr/>
+          </a:p>
+        </p:txBody>
+      </p:sp>
+      <p:sp>
+        <p:nvSpPr>
+          <p:cNvPr id="20" name="TextBox 19"/>
+          <p:cNvSpPr txBox="1"/>
+          <p:nvPr/>
+        </p:nvSpPr>
+        <p:spPr>
+          <a:xfrm>
+            <a:off x="822959" y="4508040"/>
+            <a:ext cx="5513831" cy="347472"/>
+          </a:xfrm>
+          <a:prstGeom prst="rect">
+            <a:avLst/>
+          </a:prstGeom>
+          <a:noFill/>
+        </p:spPr>
+        <p:txBody>
+          <a:bodyPr wrap="square" lIns="36576" tIns="18288" rIns="36576" bIns="18288" anchor="t">
+            <a:spAutoFit/>
+          </a:bodyPr>
+          <a:lstStyle/>
+          <a:p>
+            <a:pPr algn="l"/>
+            <a:r>
+              <a:rPr sz="1450" b="1">
+                <a:solidFill>
+                  <a:srgbClr val="E88B19"/>
+                </a:solidFill>
+                <a:latin typeface="Aptos"/>
+              </a:rPr>
+              <a:t>Loan Management</a:t>
+            </a:r>
+          </a:p>
+        </p:txBody>
+      </p:sp>
+      <p:sp>
+        <p:nvSpPr>
+          <p:cNvPr id="21" name="TextBox 20"/>
+          <p:cNvSpPr txBox="1"/>
+          <p:nvPr/>
+        </p:nvSpPr>
+        <p:spPr>
+          <a:xfrm>
+            <a:off x="822959" y="4928664"/>
+            <a:ext cx="5513831" cy="380000"/>
+          </a:xfrm>
+          <a:prstGeom prst="rect">
+            <a:avLst/>
+          </a:prstGeom>
+          <a:noFill/>
+        </p:spPr>
+        <p:txBody>
+          <a:bodyPr wrap="square" lIns="36576" tIns="18288" rIns="36576" bIns="18288" anchor="t">
+            <a:spAutoFit/>
+          </a:bodyPr>
+          <a:lstStyle/>
+          <a:p>
+            <a:pPr algn="l"/>
+            <a:r>
+              <a:rPr sz="1250" b="0">
+                <a:solidFill>
+                  <a:srgbClr val="1C2B39"/>
+                </a:solidFill>
+                <a:latin typeface="Aptos"/>
+              </a:rPr>
+              <a:t>Application, admin approval/rejection &amp; repayment.</a:t>
+            </a:r>
+          </a:p>
+        </p:txBody>
+      </p:sp>
+      <p:sp>
+        <p:nvSpPr>
+          <p:cNvPr id="22" name="Rounded Rectangle 21"/>
+          <p:cNvSpPr/>
+          <p:nvPr/>
+        </p:nvSpPr>
+        <p:spPr>
+          <a:xfrm>
+            <a:off x="640080" y="5413312"/>
+            <a:ext cx="5806440" cy="900000"/>
+          </a:xfrm>
+          <a:prstGeom prst="roundRect">
+            <a:avLst/>
+          </a:prstGeom>
+          <a:solidFill>
+            <a:srgbClr val="FFFFFF"/>
+          </a:solidFill>
+          <a:ln w="11430">
+            <a:solidFill>
+              <a:srgbClr val="BED3E4"/>
+            </a:solidFill>
+          </a:ln>
+        </p:spPr>
+        <p:style>
+          <a:lnRef idx="1">
+            <a:schemeClr val="accent1"/>
+          </a:lnRef>
+          <a:fillRef idx="3">
+            <a:schemeClr val="accent1"/>
+          </a:fillRef>
+          <a:effectRef idx="2">
+            <a:schemeClr val="accent1"/>
+          </a:effectRef>
+          <a:fontRef idx="minor">
+            <a:schemeClr val="lt1"/>
+          </a:fontRef>
+        </p:style>
+        <p:txBody>
+          <a:bodyPr rtlCol="0" anchor="ctr"/>
+          <a:lstStyle/>
+          <a:p>
+            <a:pPr algn="ctr"/>
+            <a:endParaRPr/>
+          </a:p>
+        </p:txBody>
+      </p:sp>
+      <p:sp>
+        <p:nvSpPr>
+          <p:cNvPr id="23" name="Rectangle 22"/>
+          <p:cNvSpPr/>
+          <p:nvPr/>
+        </p:nvSpPr>
+        <p:spPr>
+          <a:xfrm>
+            <a:off x="640080" y="5413312"/>
+            <a:ext cx="64008" cy="900000"/>
+          </a:xfrm>
+          <a:prstGeom prst="rect">
+            <a:avLst/>
+          </a:prstGeom>
+          <a:solidFill>
+            <a:srgbClr val="584896"/>
+          </a:solidFill>
+          <a:ln>
+            <a:noFill/>
+          </a:ln>
+        </p:spPr>
+        <p:style>
+          <a:lnRef idx="1">
+            <a:schemeClr val="accent1"/>
+          </a:lnRef>
+          <a:fillRef idx="3">
+            <a:schemeClr val="accent1"/>
+          </a:fillRef>
+          <a:effectRef idx="2">
+            <a:schemeClr val="accent1"/>
+          </a:effectRef>
+          <a:fontRef idx="minor">
+            <a:schemeClr val="lt1"/>
+          </a:fontRef>
+        </p:style>
+        <p:txBody>
+          <a:bodyPr rtlCol="0" anchor="ctr"/>
+          <a:lstStyle/>
+          <a:p>
+            <a:pPr algn="ctr"/>
+            <a:endParaRPr/>
+          </a:p>
+        </p:txBody>
+      </p:sp>
+      <p:sp>
+        <p:nvSpPr>
+          <p:cNvPr id="24" name="TextBox 23"/>
+          <p:cNvSpPr txBox="1"/>
+          <p:nvPr/>
+        </p:nvSpPr>
+        <p:spPr>
+          <a:xfrm>
+            <a:off x="822959" y="5523040"/>
+            <a:ext cx="5513831" cy="347472"/>
+          </a:xfrm>
+          <a:prstGeom prst="rect">
+            <a:avLst/>
+          </a:prstGeom>
+          <a:noFill/>
+        </p:spPr>
+        <p:txBody>
+          <a:bodyPr wrap="square" lIns="36576" tIns="18288" rIns="36576" bIns="18288" anchor="t">
+            <a:spAutoFit/>
+          </a:bodyPr>
+          <a:lstStyle/>
+          <a:p>
+            <a:pPr algn="l"/>
+            <a:r>
+              <a:rPr sz="1450" b="1">
+                <a:solidFill>
+                  <a:srgbClr val="584896"/>
+                </a:solidFill>
+                <a:latin typeface="Aptos"/>
+              </a:rPr>
+              <a:t>Validation Layer</a:t>
+            </a:r>
+          </a:p>
+        </p:txBody>
+      </p:sp>
+      <p:sp>
+        <p:nvSpPr>
+          <p:cNvPr id="25" name="TextBox 24"/>
+          <p:cNvSpPr txBox="1"/>
+          <p:nvPr/>
+        </p:nvSpPr>
+        <p:spPr>
+          <a:xfrm>
+            <a:off x="822959" y="5943664"/>
+            <a:ext cx="5513831" cy="380000"/>
+          </a:xfrm>
+          <a:prstGeom prst="rect">
+            <a:avLst/>
+          </a:prstGeom>
+          <a:noFill/>
+        </p:spPr>
+        <p:txBody>
+          <a:bodyPr wrap="square" lIns="36576" tIns="18288" rIns="36576" bIns="18288" anchor="t">
+            <a:spAutoFit/>
+          </a:bodyPr>
+          <a:lstStyle/>
+          <a:p>
+            <a:pPr algn="l"/>
+            <a:r>
+              <a:rPr sz="1250" b="0">
+                <a:solidFill>
+                  <a:srgbClr val="1C2B39"/>
+                </a:solidFill>
+                <a:latin typeface="Aptos"/>
+              </a:rPr>
+              <a:t>Account, balance &amp; business rules checked before processing.</a:t>
+            </a:r>
+          </a:p>
+        </p:txBody>
+      </p:sp>
+      <p:sp>
+        <p:nvSpPr>
+          <p:cNvPr id="26" name="TextBox 25"/>
           <p:cNvSpPr txBox="1"/>
           <p:nvPr/>
         </p:nvSpPr>
@@ -4453,7 +4746,7 @@
           <a:noFill/>
         </p:spPr>
         <p:txBody>
-          <a:bodyPr wrap="square" lIns="36576" rIns="36576" tIns="18288" bIns="18288" anchor="t">
+          <a:bodyPr wrap="square" lIns="36576" tIns="18288" rIns="36576" bIns="18288" anchor="t">
             <a:spAutoFit/>
           </a:bodyPr>
           <a:lstStyle/>
@@ -4473,7 +4766,7 @@
       </p:sp>
       <p:sp>
         <p:nvSpPr>
-          <p:cNvPr id="20" name="TextBox 19"/>
+          <p:cNvPr id="27" name="TextBox 26"/>
           <p:cNvSpPr txBox="1"/>
           <p:nvPr/>
         </p:nvSpPr>
@@ -4488,7 +4781,7 @@
           <a:noFill/>
         </p:spPr>
         <p:txBody>
-          <a:bodyPr wrap="square" lIns="36576" rIns="36576" tIns="18288" bIns="18288" anchor="t">
+          <a:bodyPr wrap="square" lIns="36576" tIns="18288" rIns="36576" bIns="18288" anchor="t">
             <a:spAutoFit/>
           </a:bodyPr>
           <a:lstStyle/>
@@ -4501,7 +4794,7 @@
                 </a:solidFill>
                 <a:latin typeface="Aptos"/>
               </a:rPr>
-              <a:t>10</a:t>
+              <a:t>12</a:t>
             </a:r>
           </a:p>
         </p:txBody>
@@ -4515,7 +4808,7 @@
 </file>
 
 <file path=ppt/slides/slide11.xml><?xml version="1.0" encoding="utf-8"?>
-<p:sld xmlns:a="http://schemas.openxmlformats.org/drawingml/2006/main" xmlns:p="http://schemas.openxmlformats.org/presentationml/2006/main" xmlns:r="http://schemas.openxmlformats.org/officeDocument/2006/relationships">
+<p:sld xmlns:a="http://schemas.openxmlformats.org/drawingml/2006/main" xmlns:r="http://schemas.openxmlformats.org/officeDocument/2006/relationships" xmlns:p="http://schemas.openxmlformats.org/presentationml/2006/main">
   <p:cSld>
     <p:spTree>
       <p:nvGrpSpPr>
@@ -4523,10 +4816,17 @@
         <p:cNvGrpSpPr/>
         <p:nvPr/>
       </p:nvGrpSpPr>
-      <p:grpSpPr/>
+      <p:grpSpPr>
+        <a:xfrm>
+          <a:off x="0" y="0"/>
+          <a:ext cx="0" cy="0"/>
+          <a:chOff x="0" y="0"/>
+          <a:chExt cx="0" cy="0"/>
+        </a:xfrm>
+      </p:grpSpPr>
       <p:pic>
         <p:nvPicPr>
-          <p:cNvPr id="2" name="Picture 1" descr="Slide_11_Background.png"/>
+          <p:cNvPr id="2" name="Picture 1" descr="Slide_14_Background.png"/>
           <p:cNvPicPr>
             <a:picLocks noChangeAspect="1"/>
           </p:cNvPicPr>
@@ -4590,6 +4890,7 @@
           <a:lstStyle/>
           <a:p>
             <a:pPr algn="ctr"/>
+            <a:endParaRPr/>
           </a:p>
         </p:txBody>
       </p:sp>
@@ -4610,7 +4911,7 @@
           <a:noFill/>
         </p:spPr>
         <p:txBody>
-          <a:bodyPr wrap="square" lIns="36576" rIns="36576" tIns="18288" bIns="18288" anchor="t">
+          <a:bodyPr wrap="square" lIns="36576" tIns="18288" rIns="36576" bIns="18288" anchor="t">
             <a:spAutoFit/>
           </a:bodyPr>
           <a:lstStyle/>
@@ -4623,7 +4924,7 @@
                 </a:solidFill>
                 <a:latin typeface="Aptos"/>
               </a:rPr>
-              <a:t>SYSTEM ARCHITECTURE</a:t>
+              <a:t>ROADMAP</a:t>
             </a:r>
           </a:p>
         </p:txBody>
@@ -4645,7 +4946,7 @@
           <a:noFill/>
         </p:spPr>
         <p:txBody>
-          <a:bodyPr wrap="square" lIns="36576" rIns="36576" tIns="18288" bIns="18288" anchor="t">
+          <a:bodyPr wrap="square" lIns="36576" tIns="18288" rIns="36576" bIns="18288" anchor="t">
             <a:spAutoFit/>
           </a:bodyPr>
           <a:lstStyle/>
@@ -4658,7 +4959,7 @@
                 </a:solidFill>
                 <a:latin typeface="Aptos"/>
               </a:rPr>
-              <a:t>High Level Architecture</a:t>
+              <a:t>Future Enhancements</a:t>
             </a:r>
           </a:p>
         </p:txBody>
@@ -4671,8 +4972,8 @@
         </p:nvSpPr>
         <p:spPr>
           <a:xfrm>
-            <a:off x="502920" y="1463040"/>
-            <a:ext cx="3246120" cy="2286000"/>
+            <a:off x="658368" y="1389888"/>
+            <a:ext cx="5852160" cy="1050000"/>
           </a:xfrm>
           <a:prstGeom prst="roundRect">
             <a:avLst/>
@@ -4705,6 +5006,7 @@
           <a:lstStyle/>
           <a:p>
             <a:pPr algn="ctr"/>
+            <a:endParaRPr/>
           </a:p>
         </p:txBody>
       </p:sp>
@@ -4716,8 +5018,8 @@
         </p:nvSpPr>
         <p:spPr>
           <a:xfrm>
-            <a:off x="502920" y="1463040"/>
-            <a:ext cx="64008" cy="2286000"/>
+            <a:off x="658368" y="1389888"/>
+            <a:ext cx="64008" cy="1050000"/>
           </a:xfrm>
           <a:prstGeom prst="rect">
             <a:avLst/>
@@ -4748,6 +5050,7 @@
           <a:lstStyle/>
           <a:p>
             <a:pPr algn="ctr"/>
+            <a:endParaRPr/>
           </a:p>
         </p:txBody>
       </p:sp>
@@ -4759,29 +5062,29 @@
         </p:nvSpPr>
         <p:spPr>
           <a:xfrm>
-            <a:off x="685800" y="1572768"/>
-            <a:ext cx="2953512" cy="347472"/>
-          </a:xfrm>
-          <a:prstGeom prst="rect">
-            <a:avLst/>
-          </a:prstGeom>
-          <a:noFill/>
-        </p:spPr>
-        <p:txBody>
-          <a:bodyPr wrap="square" lIns="36576" rIns="36576" tIns="18288" bIns="18288" anchor="t">
+            <a:off x="841247" y="1499616"/>
+            <a:ext cx="5559552" cy="347472"/>
+          </a:xfrm>
+          <a:prstGeom prst="rect">
+            <a:avLst/>
+          </a:prstGeom>
+          <a:noFill/>
+        </p:spPr>
+        <p:txBody>
+          <a:bodyPr wrap="square" lIns="36576" tIns="18288" rIns="36576" bIns="18288" anchor="t">
             <a:spAutoFit/>
           </a:bodyPr>
           <a:lstStyle/>
           <a:p>
             <a:pPr algn="l"/>
             <a:r>
-              <a:rPr sz="1500" b="1">
+              <a:rPr sz="1550" b="1">
                 <a:solidFill>
                   <a:srgbClr val="1569B4"/>
                 </a:solidFill>
                 <a:latin typeface="Aptos"/>
               </a:rPr>
-              <a:t>FRONTEND</a:t>
+              <a:t>Mobile Application</a:t>
             </a:r>
           </a:p>
         </p:txBody>
@@ -4794,30 +5097,29 @@
         </p:nvSpPr>
         <p:spPr>
           <a:xfrm>
-            <a:off x="685800" y="1993392"/>
-            <a:ext cx="2953512" cy="1664207"/>
-          </a:xfrm>
-          <a:prstGeom prst="rect">
-            <a:avLst/>
-          </a:prstGeom>
-          <a:noFill/>
-        </p:spPr>
-        <p:txBody>
-          <a:bodyPr wrap="square" lIns="36576" rIns="36576" tIns="18288" bIns="18288" anchor="t">
+            <a:off x="841247" y="1920240"/>
+            <a:ext cx="5559552" cy="380000"/>
+          </a:xfrm>
+          <a:prstGeom prst="rect">
+            <a:avLst/>
+          </a:prstGeom>
+          <a:noFill/>
+        </p:spPr>
+        <p:txBody>
+          <a:bodyPr wrap="square" lIns="36576" tIns="18288" rIns="36576" bIns="18288" anchor="t">
             <a:spAutoFit/>
           </a:bodyPr>
           <a:lstStyle/>
           <a:p>
             <a:pPr algn="l"/>
             <a:r>
-              <a:rPr sz="1400" b="0">
+              <a:rPr sz="1350" b="0">
                 <a:solidFill>
                   <a:srgbClr val="1C2B39"/>
                 </a:solidFill>
                 <a:latin typeface="Aptos"/>
               </a:rPr>
-              <a:t>React.js SPA
-What customers and admins see and click</a:t>
+              <a:t>Native mobile app for Android and iOS.</a:t>
             </a:r>
           </a:p>
         </p:txBody>
@@ -4830,8 +5132,8 @@
         </p:nvSpPr>
         <p:spPr>
           <a:xfrm>
-            <a:off x="4480560" y="1463040"/>
-            <a:ext cx="3246120" cy="2286000"/>
+            <a:off x="658368" y="2681723"/>
+            <a:ext cx="5852160" cy="1050000"/>
           </a:xfrm>
           <a:prstGeom prst="roundRect">
             <a:avLst/>
@@ -4864,6 +5166,7 @@
           <a:lstStyle/>
           <a:p>
             <a:pPr algn="ctr"/>
+            <a:endParaRPr/>
           </a:p>
         </p:txBody>
       </p:sp>
@@ -4875,8 +5178,8 @@
         </p:nvSpPr>
         <p:spPr>
           <a:xfrm>
-            <a:off x="4480560" y="1463040"/>
-            <a:ext cx="64008" cy="2286000"/>
+            <a:off x="658368" y="2681723"/>
+            <a:ext cx="64008" cy="1050000"/>
           </a:xfrm>
           <a:prstGeom prst="rect">
             <a:avLst/>
@@ -4907,6 +5210,7 @@
           <a:lstStyle/>
           <a:p>
             <a:pPr algn="ctr"/>
+            <a:endParaRPr/>
           </a:p>
         </p:txBody>
       </p:sp>
@@ -4918,29 +5222,29 @@
         </p:nvSpPr>
         <p:spPr>
           <a:xfrm>
-            <a:off x="4663440" y="1572768"/>
-            <a:ext cx="2953512" cy="347472"/>
-          </a:xfrm>
-          <a:prstGeom prst="rect">
-            <a:avLst/>
-          </a:prstGeom>
-          <a:noFill/>
-        </p:spPr>
-        <p:txBody>
-          <a:bodyPr wrap="square" lIns="36576" rIns="36576" tIns="18288" bIns="18288" anchor="t">
+            <a:off x="841247" y="2791451"/>
+            <a:ext cx="5559552" cy="347472"/>
+          </a:xfrm>
+          <a:prstGeom prst="rect">
+            <a:avLst/>
+          </a:prstGeom>
+          <a:noFill/>
+        </p:spPr>
+        <p:txBody>
+          <a:bodyPr wrap="square" lIns="36576" tIns="18288" rIns="36576" bIns="18288" anchor="t">
             <a:spAutoFit/>
           </a:bodyPr>
           <a:lstStyle/>
           <a:p>
             <a:pPr algn="l"/>
             <a:r>
-              <a:rPr sz="1500" b="1">
+              <a:rPr sz="1550" b="1">
                 <a:solidFill>
                   <a:srgbClr val="139197"/>
                 </a:solidFill>
                 <a:latin typeface="Aptos"/>
               </a:rPr>
-              <a:t>APPLICATION</a:t>
+              <a:t>UPI &amp; Payment Gateway</a:t>
             </a:r>
           </a:p>
         </p:txBody>
@@ -4953,30 +5257,29 @@
         </p:nvSpPr>
         <p:spPr>
           <a:xfrm>
-            <a:off x="4663440" y="1993392"/>
-            <a:ext cx="2953512" cy="1664207"/>
-          </a:xfrm>
-          <a:prstGeom prst="rect">
-            <a:avLst/>
-          </a:prstGeom>
-          <a:noFill/>
-        </p:spPr>
-        <p:txBody>
-          <a:bodyPr wrap="square" lIns="36576" rIns="36576" tIns="18288" bIns="18288" anchor="t">
+            <a:off x="841247" y="3212075"/>
+            <a:ext cx="5559552" cy="380000"/>
+          </a:xfrm>
+          <a:prstGeom prst="rect">
+            <a:avLst/>
+          </a:prstGeom>
+          <a:noFill/>
+        </p:spPr>
+        <p:txBody>
+          <a:bodyPr wrap="square" lIns="36576" tIns="18288" rIns="36576" bIns="18288" anchor="t">
             <a:spAutoFit/>
           </a:bodyPr>
           <a:lstStyle/>
           <a:p>
             <a:pPr algn="l"/>
             <a:r>
-              <a:rPr sz="1400" b="0">
+              <a:rPr sz="1350" b="0">
                 <a:solidFill>
                   <a:srgbClr val="1C2B39"/>
                 </a:solidFill>
                 <a:latin typeface="Aptos"/>
               </a:rPr>
-              <a:t>Spring Boot REST API + Spring Security
-Auth &amp; Roles</a:t>
+              <a:t>Integrate UPI and payment gateway services.</a:t>
             </a:r>
           </a:p>
         </p:txBody>
@@ -4989,8 +5292,8 @@
         </p:nvSpPr>
         <p:spPr>
           <a:xfrm>
-            <a:off x="8458200" y="1463040"/>
-            <a:ext cx="3246120" cy="2286000"/>
+            <a:off x="658368" y="3973558"/>
+            <a:ext cx="5852160" cy="1050000"/>
           </a:xfrm>
           <a:prstGeom prst="roundRect">
             <a:avLst/>
@@ -5023,6 +5326,7 @@
           <a:lstStyle/>
           <a:p>
             <a:pPr algn="ctr"/>
+            <a:endParaRPr/>
           </a:p>
         </p:txBody>
       </p:sp>
@@ -5034,8 +5338,8 @@
         </p:nvSpPr>
         <p:spPr>
           <a:xfrm>
-            <a:off x="8458200" y="1463040"/>
-            <a:ext cx="64008" cy="2286000"/>
+            <a:off x="658368" y="3973558"/>
+            <a:ext cx="64008" cy="1050000"/>
           </a:xfrm>
           <a:prstGeom prst="rect">
             <a:avLst/>
@@ -5066,6 +5370,7 @@
           <a:lstStyle/>
           <a:p>
             <a:pPr algn="ctr"/>
+            <a:endParaRPr/>
           </a:p>
         </p:txBody>
       </p:sp>
@@ -5077,29 +5382,29 @@
         </p:nvSpPr>
         <p:spPr>
           <a:xfrm>
-            <a:off x="8641080" y="1572768"/>
-            <a:ext cx="2953512" cy="347472"/>
-          </a:xfrm>
-          <a:prstGeom prst="rect">
-            <a:avLst/>
-          </a:prstGeom>
-          <a:noFill/>
-        </p:spPr>
-        <p:txBody>
-          <a:bodyPr wrap="square" lIns="36576" rIns="36576" tIns="18288" bIns="18288" anchor="t">
+            <a:off x="841247" y="4083286"/>
+            <a:ext cx="5559552" cy="347472"/>
+          </a:xfrm>
+          <a:prstGeom prst="rect">
+            <a:avLst/>
+          </a:prstGeom>
+          <a:noFill/>
+        </p:spPr>
+        <p:txBody>
+          <a:bodyPr wrap="square" lIns="36576" tIns="18288" rIns="36576" bIns="18288" anchor="t">
             <a:spAutoFit/>
           </a:bodyPr>
           <a:lstStyle/>
           <a:p>
             <a:pPr algn="l"/>
             <a:r>
-              <a:rPr sz="1500" b="1">
+              <a:rPr sz="1550" b="1">
                 <a:solidFill>
                   <a:srgbClr val="489757"/>
                 </a:solidFill>
                 <a:latin typeface="Aptos"/>
               </a:rPr>
-              <a:t>DATA LAYER</a:t>
+              <a:t>Advanced Analytics</a:t>
             </a:r>
           </a:p>
         </p:txBody>
@@ -5112,49 +5417,46 @@
         </p:nvSpPr>
         <p:spPr>
           <a:xfrm>
-            <a:off x="8641080" y="1993392"/>
-            <a:ext cx="2953512" cy="1664207"/>
-          </a:xfrm>
-          <a:prstGeom prst="rect">
-            <a:avLst/>
-          </a:prstGeom>
-          <a:noFill/>
-        </p:spPr>
-        <p:txBody>
-          <a:bodyPr wrap="square" lIns="36576" rIns="36576" tIns="18288" bIns="18288" anchor="t">
+            <a:off x="841247" y="4503910"/>
+            <a:ext cx="5559552" cy="380000"/>
+          </a:xfrm>
+          <a:prstGeom prst="rect">
+            <a:avLst/>
+          </a:prstGeom>
+          <a:noFill/>
+        </p:spPr>
+        <p:txBody>
+          <a:bodyPr wrap="square" lIns="36576" tIns="18288" rIns="36576" bIns="18288" anchor="t">
             <a:spAutoFit/>
           </a:bodyPr>
           <a:lstStyle/>
           <a:p>
             <a:pPr algn="l"/>
             <a:r>
-              <a:rPr sz="1400" b="0">
+              <a:rPr sz="1350" b="0">
                 <a:solidFill>
                   <a:srgbClr val="1C2B39"/>
                 </a:solidFill>
                 <a:latin typeface="Aptos"/>
               </a:rPr>
-              <a:t>MySQL + Spring Data JPA
-Accounts, loans and transactions</a:t>
-            </a:r>
-          </a:p>
-        </p:txBody>
-      </p:sp>
-      <p:sp>
-        <p:nvSpPr>
-          <p:cNvPr id="21" name="Rounded Rectangle Backdrop"/>
+              <a:t>Reports and dashboards for better insights.</a:t>
+            </a:r>
+          </a:p>
+        </p:txBody>
+      </p:sp>
+      <p:sp>
+        <p:nvSpPr>
+          <p:cNvPr id="18" name="Rounded Rectangle 17"/>
           <p:cNvSpPr/>
           <p:nvPr/>
         </p:nvSpPr>
         <p:spPr>
           <a:xfrm>
-            <a:off x="2600000" y="4010000"/>
-            <a:ext cx="6980000" cy="480000"/>
+            <a:off x="658368" y="5265393"/>
+            <a:ext cx="5852160" cy="1050000"/>
           </a:xfrm>
           <a:prstGeom prst="roundRect">
-            <a:avLst>
-              <a:gd name="adj" fmla="val 30000"/>
-            </a:avLst>
+            <a:avLst/>
           </a:prstGeom>
           <a:solidFill>
             <a:srgbClr val="FFFFFF"/>
@@ -5184,573 +5486,20 @@
           <a:lstStyle/>
           <a:p>
             <a:pPr algn="ctr"/>
-          </a:p>
-        </p:txBody>
-      </p:sp>
-      <p:sp>
-        <p:nvSpPr>
-          <p:cNvPr id="18" name="TextBox 17"/>
-          <p:cNvSpPr txBox="1"/>
-          <p:nvPr/>
-        </p:nvSpPr>
-        <p:spPr>
-          <a:xfrm>
-            <a:off x="960120" y="4126512"/>
-            <a:ext cx="10149840" cy="320040"/>
-          </a:xfrm>
-          <a:prstGeom prst="rect">
-            <a:avLst/>
-          </a:prstGeom>
-          <a:noFill/>
-        </p:spPr>
-        <p:txBody>
-          <a:bodyPr wrap="square" lIns="36576" rIns="36576" tIns="18288" bIns="18288" anchor="t">
-            <a:spAutoFit/>
-          </a:bodyPr>
-          <a:lstStyle/>
-          <a:p>
-            <a:pPr algn="ctr"/>
-            <a:r>
-              <a:rPr sz="1250" b="1">
-                <a:solidFill>
-                  <a:srgbClr val="082F5D"/>
-                </a:solidFill>
-                <a:latin typeface="Aptos"/>
-              </a:rPr>
-              <a:t>CLIENT  →  API  →  SECURITY / BUSINESS LOGIC  →  DATABASE  →  RESPONSE</a:t>
-            </a:r>
-          </a:p>
-        </p:txBody>
-      </p:sp>
-      <p:sp>
-        <p:nvSpPr>
-          <p:cNvPr id="19" name="Rounded Rectangle 18"/>
+            <a:endParaRPr/>
+          </a:p>
+        </p:txBody>
+      </p:sp>
+      <p:sp>
+        <p:nvSpPr>
+          <p:cNvPr id="19" name="Rectangle 18"/>
           <p:cNvSpPr/>
           <p:nvPr/>
         </p:nvSpPr>
         <p:spPr>
           <a:xfrm>
-            <a:off x="685800" y="4617720"/>
-            <a:ext cx="2514600" cy="960120"/>
-          </a:xfrm>
-          <a:prstGeom prst="roundRect">
-            <a:avLst/>
-          </a:prstGeom>
-          <a:solidFill>
-            <a:srgbClr val="FFFFFF"/>
-          </a:solidFill>
-          <a:ln w="11430">
-            <a:solidFill>
-              <a:srgbClr val="BED3E4"/>
-            </a:solidFill>
-          </a:ln>
-        </p:spPr>
-        <p:style>
-          <a:lnRef idx="1">
-            <a:schemeClr val="accent1"/>
-          </a:lnRef>
-          <a:fillRef idx="3">
-            <a:schemeClr val="accent1"/>
-          </a:fillRef>
-          <a:effectRef idx="2">
-            <a:schemeClr val="accent1"/>
-          </a:effectRef>
-          <a:fontRef idx="minor">
-            <a:schemeClr val="lt1"/>
-          </a:fontRef>
-        </p:style>
-        <p:txBody>
-          <a:bodyPr rtlCol="0" anchor="ctr"/>
-          <a:lstStyle/>
-          <a:p>
-            <a:pPr algn="ctr"/>
-          </a:p>
-        </p:txBody>
-      </p:sp>
-      <p:sp>
-        <p:nvSpPr>
-          <p:cNvPr id="20" name="Rectangle 19"/>
-          <p:cNvSpPr/>
-          <p:nvPr/>
-        </p:nvSpPr>
-        <p:spPr>
-          <a:xfrm>
-            <a:off x="685800" y="4617720"/>
-            <a:ext cx="64008" cy="960120"/>
-          </a:xfrm>
-          <a:prstGeom prst="rect">
-            <a:avLst/>
-          </a:prstGeom>
-          <a:solidFill>
-            <a:srgbClr val="1569B4"/>
-          </a:solidFill>
-          <a:ln>
-            <a:noFill/>
-          </a:ln>
-        </p:spPr>
-        <p:style>
-          <a:lnRef idx="1">
-            <a:schemeClr val="accent1"/>
-          </a:lnRef>
-          <a:fillRef idx="3">
-            <a:schemeClr val="accent1"/>
-          </a:fillRef>
-          <a:effectRef idx="2">
-            <a:schemeClr val="accent1"/>
-          </a:effectRef>
-          <a:fontRef idx="minor">
-            <a:schemeClr val="lt1"/>
-          </a:fontRef>
-        </p:style>
-        <p:txBody>
-          <a:bodyPr rtlCol="0" anchor="ctr"/>
-          <a:lstStyle/>
-          <a:p>
-            <a:pPr algn="ctr"/>
-          </a:p>
-        </p:txBody>
-      </p:sp>
-      <p:sp>
-        <p:nvSpPr>
-          <p:cNvPr id="21" name="TextBox 20"/>
-          <p:cNvSpPr txBox="1"/>
-          <p:nvPr/>
-        </p:nvSpPr>
-        <p:spPr>
-          <a:xfrm>
-            <a:off x="868680" y="4727448"/>
-            <a:ext cx="2221992" cy="347472"/>
-          </a:xfrm>
-          <a:prstGeom prst="rect">
-            <a:avLst/>
-          </a:prstGeom>
-          <a:noFill/>
-        </p:spPr>
-        <p:txBody>
-          <a:bodyPr wrap="square" lIns="36576" rIns="36576" tIns="18288" bIns="18288" anchor="t">
-            <a:spAutoFit/>
-          </a:bodyPr>
-          <a:lstStyle/>
-          <a:p>
-            <a:pPr algn="l"/>
-            <a:r>
-              <a:rPr sz="1300" b="1">
-                <a:solidFill>
-                  <a:srgbClr val="1569B4"/>
-                </a:solidFill>
-                <a:latin typeface="Aptos"/>
-              </a:rPr>
-              <a:t>Authentication</a:t>
-            </a:r>
-          </a:p>
-        </p:txBody>
-      </p:sp>
-      <p:sp>
-        <p:nvSpPr>
-          <p:cNvPr id="22" name="TextBox 21"/>
-          <p:cNvSpPr txBox="1"/>
-          <p:nvPr/>
-        </p:nvSpPr>
-        <p:spPr>
-          <a:xfrm>
-            <a:off x="868680" y="5148072"/>
-            <a:ext cx="2221992" cy="338328"/>
-          </a:xfrm>
-          <a:prstGeom prst="rect">
-            <a:avLst/>
-          </a:prstGeom>
-          <a:noFill/>
-        </p:spPr>
-        <p:txBody>
-          <a:bodyPr wrap="square" lIns="36576" rIns="36576" tIns="18288" bIns="18288" anchor="t">
-            <a:spAutoFit/>
-          </a:bodyPr>
-          <a:lstStyle/>
-          <a:p>
-            <a:pPr algn="l"/>
-            <a:r>
-              <a:rPr sz="1150" b="0">
-                <a:solidFill>
-                  <a:srgbClr val="1C2B39"/>
-                </a:solidFill>
-                <a:latin typeface="Aptos"/>
-              </a:rPr>
-              <a:t>Authorization</a:t>
-            </a:r>
-          </a:p>
-        </p:txBody>
-      </p:sp>
-      <p:sp>
-        <p:nvSpPr>
-          <p:cNvPr id="23" name="Rounded Rectangle 22"/>
-          <p:cNvSpPr/>
-          <p:nvPr/>
-        </p:nvSpPr>
-        <p:spPr>
-          <a:xfrm>
-            <a:off x="3337560" y="4617720"/>
-            <a:ext cx="2514600" cy="960120"/>
-          </a:xfrm>
-          <a:prstGeom prst="roundRect">
-            <a:avLst/>
-          </a:prstGeom>
-          <a:solidFill>
-            <a:srgbClr val="FFFFFF"/>
-          </a:solidFill>
-          <a:ln w="11430">
-            <a:solidFill>
-              <a:srgbClr val="BED3E4"/>
-            </a:solidFill>
-          </a:ln>
-        </p:spPr>
-        <p:style>
-          <a:lnRef idx="1">
-            <a:schemeClr val="accent1"/>
-          </a:lnRef>
-          <a:fillRef idx="3">
-            <a:schemeClr val="accent1"/>
-          </a:fillRef>
-          <a:effectRef idx="2">
-            <a:schemeClr val="accent1"/>
-          </a:effectRef>
-          <a:fontRef idx="minor">
-            <a:schemeClr val="lt1"/>
-          </a:fontRef>
-        </p:style>
-        <p:txBody>
-          <a:bodyPr rtlCol="0" anchor="ctr"/>
-          <a:lstStyle/>
-          <a:p>
-            <a:pPr algn="ctr"/>
-          </a:p>
-        </p:txBody>
-      </p:sp>
-      <p:sp>
-        <p:nvSpPr>
-          <p:cNvPr id="24" name="Rectangle 23"/>
-          <p:cNvSpPr/>
-          <p:nvPr/>
-        </p:nvSpPr>
-        <p:spPr>
-          <a:xfrm>
-            <a:off x="3337560" y="4617720"/>
-            <a:ext cx="64008" cy="960120"/>
-          </a:xfrm>
-          <a:prstGeom prst="rect">
-            <a:avLst/>
-          </a:prstGeom>
-          <a:solidFill>
-            <a:srgbClr val="139197"/>
-          </a:solidFill>
-          <a:ln>
-            <a:noFill/>
-          </a:ln>
-        </p:spPr>
-        <p:style>
-          <a:lnRef idx="1">
-            <a:schemeClr val="accent1"/>
-          </a:lnRef>
-          <a:fillRef idx="3">
-            <a:schemeClr val="accent1"/>
-          </a:fillRef>
-          <a:effectRef idx="2">
-            <a:schemeClr val="accent1"/>
-          </a:effectRef>
-          <a:fontRef idx="minor">
-            <a:schemeClr val="lt1"/>
-          </a:fontRef>
-        </p:style>
-        <p:txBody>
-          <a:bodyPr rtlCol="0" anchor="ctr"/>
-          <a:lstStyle/>
-          <a:p>
-            <a:pPr algn="ctr"/>
-          </a:p>
-        </p:txBody>
-      </p:sp>
-      <p:sp>
-        <p:nvSpPr>
-          <p:cNvPr id="25" name="TextBox 24"/>
-          <p:cNvSpPr txBox="1"/>
-          <p:nvPr/>
-        </p:nvSpPr>
-        <p:spPr>
-          <a:xfrm>
-            <a:off x="3520440" y="4727448"/>
-            <a:ext cx="2221992" cy="347472"/>
-          </a:xfrm>
-          <a:prstGeom prst="rect">
-            <a:avLst/>
-          </a:prstGeom>
-          <a:noFill/>
-        </p:spPr>
-        <p:txBody>
-          <a:bodyPr wrap="square" lIns="36576" rIns="36576" tIns="18288" bIns="18288" anchor="t">
-            <a:spAutoFit/>
-          </a:bodyPr>
-          <a:lstStyle/>
-          <a:p>
-            <a:pPr algn="l"/>
-            <a:r>
-              <a:rPr sz="1300" b="1">
-                <a:solidFill>
-                  <a:srgbClr val="139197"/>
-                </a:solidFill>
-                <a:latin typeface="Aptos"/>
-              </a:rPr>
-              <a:t>Role-Based</a:t>
-            </a:r>
-          </a:p>
-        </p:txBody>
-      </p:sp>
-      <p:sp>
-        <p:nvSpPr>
-          <p:cNvPr id="26" name="TextBox 25"/>
-          <p:cNvSpPr txBox="1"/>
-          <p:nvPr/>
-        </p:nvSpPr>
-        <p:spPr>
-          <a:xfrm>
-            <a:off x="3520440" y="5148072"/>
-            <a:ext cx="2221992" cy="338328"/>
-          </a:xfrm>
-          <a:prstGeom prst="rect">
-            <a:avLst/>
-          </a:prstGeom>
-          <a:noFill/>
-        </p:spPr>
-        <p:txBody>
-          <a:bodyPr wrap="square" lIns="36576" rIns="36576" tIns="18288" bIns="18288" anchor="t">
-            <a:spAutoFit/>
-          </a:bodyPr>
-          <a:lstStyle/>
-          <a:p>
-            <a:pPr algn="l"/>
-            <a:r>
-              <a:rPr sz="1150" b="0">
-                <a:solidFill>
-                  <a:srgbClr val="1C2B39"/>
-                </a:solidFill>
-                <a:latin typeface="Aptos"/>
-              </a:rPr>
-              <a:t>Access Control</a:t>
-            </a:r>
-          </a:p>
-        </p:txBody>
-      </p:sp>
-      <p:sp>
-        <p:nvSpPr>
-          <p:cNvPr id="27" name="Rounded Rectangle 26"/>
-          <p:cNvSpPr/>
-          <p:nvPr/>
-        </p:nvSpPr>
-        <p:spPr>
-          <a:xfrm>
-            <a:off x="5989320" y="4617720"/>
-            <a:ext cx="2514600" cy="960120"/>
-          </a:xfrm>
-          <a:prstGeom prst="roundRect">
-            <a:avLst/>
-          </a:prstGeom>
-          <a:solidFill>
-            <a:srgbClr val="FFFFFF"/>
-          </a:solidFill>
-          <a:ln w="11430">
-            <a:solidFill>
-              <a:srgbClr val="BED3E4"/>
-            </a:solidFill>
-          </a:ln>
-        </p:spPr>
-        <p:style>
-          <a:lnRef idx="1">
-            <a:schemeClr val="accent1"/>
-          </a:lnRef>
-          <a:fillRef idx="3">
-            <a:schemeClr val="accent1"/>
-          </a:fillRef>
-          <a:effectRef idx="2">
-            <a:schemeClr val="accent1"/>
-          </a:effectRef>
-          <a:fontRef idx="minor">
-            <a:schemeClr val="lt1"/>
-          </a:fontRef>
-        </p:style>
-        <p:txBody>
-          <a:bodyPr rtlCol="0" anchor="ctr"/>
-          <a:lstStyle/>
-          <a:p>
-            <a:pPr algn="ctr"/>
-          </a:p>
-        </p:txBody>
-      </p:sp>
-      <p:sp>
-        <p:nvSpPr>
-          <p:cNvPr id="28" name="Rectangle 27"/>
-          <p:cNvSpPr/>
-          <p:nvPr/>
-        </p:nvSpPr>
-        <p:spPr>
-          <a:xfrm>
-            <a:off x="5989320" y="4617720"/>
-            <a:ext cx="64008" cy="960120"/>
-          </a:xfrm>
-          <a:prstGeom prst="rect">
-            <a:avLst/>
-          </a:prstGeom>
-          <a:solidFill>
-            <a:srgbClr val="489757"/>
-          </a:solidFill>
-          <a:ln>
-            <a:noFill/>
-          </a:ln>
-        </p:spPr>
-        <p:style>
-          <a:lnRef idx="1">
-            <a:schemeClr val="accent1"/>
-          </a:lnRef>
-          <a:fillRef idx="3">
-            <a:schemeClr val="accent1"/>
-          </a:fillRef>
-          <a:effectRef idx="2">
-            <a:schemeClr val="accent1"/>
-          </a:effectRef>
-          <a:fontRef idx="minor">
-            <a:schemeClr val="lt1"/>
-          </a:fontRef>
-        </p:style>
-        <p:txBody>
-          <a:bodyPr rtlCol="0" anchor="ctr"/>
-          <a:lstStyle/>
-          <a:p>
-            <a:pPr algn="ctr"/>
-          </a:p>
-        </p:txBody>
-      </p:sp>
-      <p:sp>
-        <p:nvSpPr>
-          <p:cNvPr id="29" name="TextBox 28"/>
-          <p:cNvSpPr txBox="1"/>
-          <p:nvPr/>
-        </p:nvSpPr>
-        <p:spPr>
-          <a:xfrm>
-            <a:off x="6172200" y="4727448"/>
-            <a:ext cx="2221992" cy="347472"/>
-          </a:xfrm>
-          <a:prstGeom prst="rect">
-            <a:avLst/>
-          </a:prstGeom>
-          <a:noFill/>
-        </p:spPr>
-        <p:txBody>
-          <a:bodyPr wrap="square" lIns="36576" rIns="36576" tIns="18288" bIns="18288" anchor="t">
-            <a:spAutoFit/>
-          </a:bodyPr>
-          <a:lstStyle/>
-          <a:p>
-            <a:pPr algn="l"/>
-            <a:r>
-              <a:rPr sz="1300" b="1">
-                <a:solidFill>
-                  <a:srgbClr val="489757"/>
-                </a:solidFill>
-                <a:latin typeface="Aptos"/>
-              </a:rPr>
-              <a:t>Business Logic</a:t>
-            </a:r>
-          </a:p>
-        </p:txBody>
-      </p:sp>
-      <p:sp>
-        <p:nvSpPr>
-          <p:cNvPr id="30" name="TextBox 29"/>
-          <p:cNvSpPr txBox="1"/>
-          <p:nvPr/>
-        </p:nvSpPr>
-        <p:spPr>
-          <a:xfrm>
-            <a:off x="6172200" y="5148072"/>
-            <a:ext cx="2221992" cy="338328"/>
-          </a:xfrm>
-          <a:prstGeom prst="rect">
-            <a:avLst/>
-          </a:prstGeom>
-          <a:noFill/>
-        </p:spPr>
-        <p:txBody>
-          <a:bodyPr wrap="square" lIns="36576" rIns="36576" tIns="18288" bIns="18288" anchor="t">
-            <a:spAutoFit/>
-          </a:bodyPr>
-          <a:lstStyle/>
-          <a:p>
-            <a:pPr algn="l"/>
-            <a:r>
-              <a:rPr sz="1150" b="0">
-                <a:solidFill>
-                  <a:srgbClr val="1C2B39"/>
-                </a:solidFill>
-                <a:latin typeface="Aptos"/>
-              </a:rPr>
-              <a:t>&amp; Validations</a:t>
-            </a:r>
-          </a:p>
-        </p:txBody>
-      </p:sp>
-      <p:sp>
-        <p:nvSpPr>
-          <p:cNvPr id="31" name="Rounded Rectangle 30"/>
-          <p:cNvSpPr/>
-          <p:nvPr/>
-        </p:nvSpPr>
-        <p:spPr>
-          <a:xfrm>
-            <a:off x="8641080" y="4617720"/>
-            <a:ext cx="2514600" cy="960120"/>
-          </a:xfrm>
-          <a:prstGeom prst="roundRect">
-            <a:avLst/>
-          </a:prstGeom>
-          <a:solidFill>
-            <a:srgbClr val="FFFFFF"/>
-          </a:solidFill>
-          <a:ln w="11430">
-            <a:solidFill>
-              <a:srgbClr val="BED3E4"/>
-            </a:solidFill>
-          </a:ln>
-        </p:spPr>
-        <p:style>
-          <a:lnRef idx="1">
-            <a:schemeClr val="accent1"/>
-          </a:lnRef>
-          <a:fillRef idx="3">
-            <a:schemeClr val="accent1"/>
-          </a:fillRef>
-          <a:effectRef idx="2">
-            <a:schemeClr val="accent1"/>
-          </a:effectRef>
-          <a:fontRef idx="minor">
-            <a:schemeClr val="lt1"/>
-          </a:fontRef>
-        </p:style>
-        <p:txBody>
-          <a:bodyPr rtlCol="0" anchor="ctr"/>
-          <a:lstStyle/>
-          <a:p>
-            <a:pPr algn="ctr"/>
-          </a:p>
-        </p:txBody>
-      </p:sp>
-      <p:sp>
-        <p:nvSpPr>
-          <p:cNvPr id="32" name="Rectangle 31"/>
-          <p:cNvSpPr/>
-          <p:nvPr/>
-        </p:nvSpPr>
-        <p:spPr>
-          <a:xfrm>
-            <a:off x="8641080" y="4617720"/>
-            <a:ext cx="64008" cy="960120"/>
+            <a:off x="658368" y="5265393"/>
+            <a:ext cx="64008" cy="1050000"/>
           </a:xfrm>
           <a:prstGeom prst="rect">
             <a:avLst/>
@@ -5781,82 +5530,83 @@
           <a:lstStyle/>
           <a:p>
             <a:pPr algn="ctr"/>
-          </a:p>
-        </p:txBody>
-      </p:sp>
-      <p:sp>
-        <p:nvSpPr>
-          <p:cNvPr id="33" name="TextBox 32"/>
-          <p:cNvSpPr txBox="1"/>
-          <p:nvPr/>
-        </p:nvSpPr>
-        <p:spPr>
-          <a:xfrm>
-            <a:off x="8823959" y="4727448"/>
-            <a:ext cx="2221992" cy="347472"/>
-          </a:xfrm>
-          <a:prstGeom prst="rect">
-            <a:avLst/>
-          </a:prstGeom>
-          <a:noFill/>
-        </p:spPr>
-        <p:txBody>
-          <a:bodyPr wrap="square" lIns="36576" rIns="36576" tIns="18288" bIns="18288" anchor="t">
+            <a:endParaRPr/>
+          </a:p>
+        </p:txBody>
+      </p:sp>
+      <p:sp>
+        <p:nvSpPr>
+          <p:cNvPr id="20" name="TextBox 19"/>
+          <p:cNvSpPr txBox="1"/>
+          <p:nvPr/>
+        </p:nvSpPr>
+        <p:spPr>
+          <a:xfrm>
+            <a:off x="841247" y="5375121"/>
+            <a:ext cx="5559552" cy="347472"/>
+          </a:xfrm>
+          <a:prstGeom prst="rect">
+            <a:avLst/>
+          </a:prstGeom>
+          <a:noFill/>
+        </p:spPr>
+        <p:txBody>
+          <a:bodyPr wrap="square" lIns="36576" tIns="18288" rIns="36576" bIns="18288" anchor="t">
             <a:spAutoFit/>
           </a:bodyPr>
           <a:lstStyle/>
           <a:p>
             <a:pPr algn="l"/>
             <a:r>
-              <a:rPr sz="1300" b="1">
+              <a:rPr sz="1550" b="1">
                 <a:solidFill>
                   <a:srgbClr val="584896"/>
                 </a:solidFill>
                 <a:latin typeface="Aptos"/>
               </a:rPr>
-              <a:t>Data Persistence</a:t>
-            </a:r>
-          </a:p>
-        </p:txBody>
-      </p:sp>
-      <p:sp>
-        <p:nvSpPr>
-          <p:cNvPr id="34" name="TextBox 33"/>
-          <p:cNvSpPr txBox="1"/>
-          <p:nvPr/>
-        </p:nvSpPr>
-        <p:spPr>
-          <a:xfrm>
-            <a:off x="8823959" y="5148072"/>
-            <a:ext cx="2221992" cy="338328"/>
-          </a:xfrm>
-          <a:prstGeom prst="rect">
-            <a:avLst/>
-          </a:prstGeom>
-          <a:noFill/>
-        </p:spPr>
-        <p:txBody>
-          <a:bodyPr wrap="square" lIns="36576" rIns="36576" tIns="18288" bIns="18288" anchor="t">
+              <a:t>AI/ML Based Risk Assessment</a:t>
+            </a:r>
+          </a:p>
+        </p:txBody>
+      </p:sp>
+      <p:sp>
+        <p:nvSpPr>
+          <p:cNvPr id="21" name="TextBox 20"/>
+          <p:cNvSpPr txBox="1"/>
+          <p:nvPr/>
+        </p:nvSpPr>
+        <p:spPr>
+          <a:xfrm>
+            <a:off x="841247" y="5795745"/>
+            <a:ext cx="5559552" cy="380000"/>
+          </a:xfrm>
+          <a:prstGeom prst="rect">
+            <a:avLst/>
+          </a:prstGeom>
+          <a:noFill/>
+        </p:spPr>
+        <p:txBody>
+          <a:bodyPr wrap="square" lIns="36576" tIns="18288" rIns="36576" bIns="18288" anchor="t">
             <a:spAutoFit/>
           </a:bodyPr>
           <a:lstStyle/>
           <a:p>
             <a:pPr algn="l"/>
             <a:r>
-              <a:rPr sz="1150" b="0">
+              <a:rPr sz="1350" b="0">
                 <a:solidFill>
                   <a:srgbClr val="1C2B39"/>
                 </a:solidFill>
                 <a:latin typeface="Aptos"/>
               </a:rPr>
-              <a:t>&amp; Management</a:t>
-            </a:r>
-          </a:p>
-        </p:txBody>
-      </p:sp>
-      <p:sp>
-        <p:nvSpPr>
-          <p:cNvPr id="35" name="TextBox 34"/>
+              <a:t>Intelligent loan approval and fraud detection.</a:t>
+            </a:r>
+          </a:p>
+        </p:txBody>
+      </p:sp>
+      <p:sp>
+        <p:nvSpPr>
+          <p:cNvPr id="22" name="TextBox 21"/>
           <p:cNvSpPr txBox="1"/>
           <p:nvPr/>
         </p:nvSpPr>
@@ -5871,7 +5621,7 @@
           <a:noFill/>
         </p:spPr>
         <p:txBody>
-          <a:bodyPr wrap="square" lIns="36576" rIns="36576" tIns="18288" bIns="18288" anchor="t">
+          <a:bodyPr wrap="square" lIns="36576" tIns="18288" rIns="36576" bIns="18288" anchor="t">
             <a:spAutoFit/>
           </a:bodyPr>
           <a:lstStyle/>
@@ -5891,7 +5641,7 @@
       </p:sp>
       <p:sp>
         <p:nvSpPr>
-          <p:cNvPr id="36" name="TextBox 35"/>
+          <p:cNvPr id="23" name="TextBox 22"/>
           <p:cNvSpPr txBox="1"/>
           <p:nvPr/>
         </p:nvSpPr>
@@ -5906,7 +5656,7 @@
           <a:noFill/>
         </p:spPr>
         <p:txBody>
-          <a:bodyPr wrap="square" lIns="36576" rIns="36576" tIns="18288" bIns="18288" anchor="t">
+          <a:bodyPr wrap="square" lIns="36576" tIns="18288" rIns="36576" bIns="18288" anchor="t">
             <a:spAutoFit/>
           </a:bodyPr>
           <a:lstStyle/>
@@ -5919,7 +5669,7 @@
                 </a:solidFill>
                 <a:latin typeface="Aptos"/>
               </a:rPr>
-              <a:t>11</a:t>
+              <a:t>14</a:t>
             </a:r>
           </a:p>
         </p:txBody>
@@ -5933,7 +5683,7 @@
 </file>
 
 <file path=ppt/slides/slide12.xml><?xml version="1.0" encoding="utf-8"?>
-<p:sld xmlns:a="http://schemas.openxmlformats.org/drawingml/2006/main" xmlns:p="http://schemas.openxmlformats.org/presentationml/2006/main" xmlns:r="http://schemas.openxmlformats.org/officeDocument/2006/relationships">
+<p:sld xmlns:a="http://schemas.openxmlformats.org/drawingml/2006/main" xmlns:r="http://schemas.openxmlformats.org/officeDocument/2006/relationships" xmlns:p="http://schemas.openxmlformats.org/presentationml/2006/main">
   <p:cSld>
     <p:spTree>
       <p:nvGrpSpPr>
@@ -5941,10 +5691,17 @@
         <p:cNvGrpSpPr/>
         <p:nvPr/>
       </p:nvGrpSpPr>
-      <p:grpSpPr/>
+      <p:grpSpPr>
+        <a:xfrm>
+          <a:off x="0" y="0"/>
+          <a:ext cx="0" cy="0"/>
+          <a:chOff x="0" y="0"/>
+          <a:chExt cx="0" cy="0"/>
+        </a:xfrm>
+      </p:grpSpPr>
       <p:pic>
         <p:nvPicPr>
-          <p:cNvPr id="2" name="Picture 1" descr="Slide_12_Background.png"/>
+          <p:cNvPr id="2" name="Picture 1" descr="Slide_16_Background.png"/>
           <p:cNvPicPr>
             <a:picLocks noChangeAspect="1"/>
           </p:cNvPicPr>
@@ -6008,6 +5765,7 @@
           <a:lstStyle/>
           <a:p>
             <a:pPr algn="ctr"/>
+            <a:endParaRPr/>
           </a:p>
         </p:txBody>
       </p:sp>
@@ -6028,7 +5786,7 @@
           <a:noFill/>
         </p:spPr>
         <p:txBody>
-          <a:bodyPr wrap="square" lIns="36576" rIns="36576" tIns="18288" bIns="18288" anchor="t">
+          <a:bodyPr wrap="square" lIns="36576" tIns="18288" rIns="36576" bIns="18288" anchor="t">
             <a:spAutoFit/>
           </a:bodyPr>
           <a:lstStyle/>
@@ -6041,7 +5799,7 @@
                 </a:solidFill>
                 <a:latin typeface="Aptos"/>
               </a:rPr>
-              <a:t>IMPLEMENTATION HIGHLIGHTS</a:t>
+              <a:t>CONCLUSION</a:t>
             </a:r>
           </a:p>
         </p:txBody>
@@ -6063,7 +5821,7 @@
           <a:noFill/>
         </p:spPr>
         <p:txBody>
-          <a:bodyPr wrap="square" lIns="36576" rIns="36576" tIns="18288" bIns="18288" anchor="t">
+          <a:bodyPr wrap="square" lIns="36576" tIns="18288" rIns="36576" bIns="18288" anchor="t">
             <a:spAutoFit/>
           </a:bodyPr>
           <a:lstStyle/>
@@ -6076,7 +5834,7 @@
                 </a:solidFill>
                 <a:latin typeface="Aptos"/>
               </a:rPr>
-              <a:t>Key Achievements</a:t>
+              <a:t>Building the Future of Banking</a:t>
             </a:r>
           </a:p>
         </p:txBody>
@@ -6089,8 +5847,8 @@
         </p:nvSpPr>
         <p:spPr>
           <a:xfrm>
-            <a:off x="640080" y="1353312"/>
-            <a:ext cx="5806440" cy="900000"/>
+            <a:off x="566928" y="1444752"/>
+            <a:ext cx="5715000" cy="3300000"/>
           </a:xfrm>
           <a:prstGeom prst="roundRect">
             <a:avLst/>
@@ -6123,49 +5881,43 @@
           <a:lstStyle/>
           <a:p>
             <a:pPr algn="ctr"/>
-          </a:p>
-        </p:txBody>
-      </p:sp>
-      <p:sp>
-        <p:nvSpPr>
-          <p:cNvPr id="7" name="Rectangle 6"/>
-          <p:cNvSpPr/>
-          <p:nvPr/>
-        </p:nvSpPr>
-        <p:spPr>
-          <a:xfrm>
-            <a:off x="640080" y="1353312"/>
-            <a:ext cx="64008" cy="900000"/>
-          </a:xfrm>
-          <a:prstGeom prst="rect">
-            <a:avLst/>
-          </a:prstGeom>
-          <a:solidFill>
-            <a:srgbClr val="1569B4"/>
-          </a:solidFill>
-          <a:ln>
-            <a:noFill/>
-          </a:ln>
-        </p:spPr>
-        <p:style>
-          <a:lnRef idx="1">
-            <a:schemeClr val="accent1"/>
-          </a:lnRef>
-          <a:fillRef idx="3">
-            <a:schemeClr val="accent1"/>
-          </a:fillRef>
-          <a:effectRef idx="2">
-            <a:schemeClr val="accent1"/>
-          </a:effectRef>
-          <a:fontRef idx="minor">
-            <a:schemeClr val="lt1"/>
-          </a:fontRef>
-        </p:style>
-        <p:txBody>
-          <a:bodyPr rtlCol="0" anchor="ctr"/>
-          <a:lstStyle/>
-          <a:p>
-            <a:pPr algn="ctr"/>
+            <a:endParaRPr/>
+          </a:p>
+        </p:txBody>
+      </p:sp>
+      <p:sp>
+        <p:nvSpPr>
+          <p:cNvPr id="7" name="TextBox 6"/>
+          <p:cNvSpPr txBox="1"/>
+          <p:nvPr/>
+        </p:nvSpPr>
+        <p:spPr>
+          <a:xfrm>
+            <a:off x="804672" y="1719072"/>
+            <a:ext cx="5257800" cy="960120"/>
+          </a:xfrm>
+          <a:prstGeom prst="rect">
+            <a:avLst/>
+          </a:prstGeom>
+          <a:noFill/>
+        </p:spPr>
+        <p:txBody>
+          <a:bodyPr wrap="square" lIns="36576" tIns="18288" rIns="36576" bIns="18288" anchor="t">
+            <a:spAutoFit/>
+          </a:bodyPr>
+          <a:lstStyle/>
+          <a:p>
+            <a:pPr algn="l"/>
+            <a:r>
+              <a:rPr sz="1400" b="0">
+                <a:solidFill>
+                  <a:srgbClr val="1C2B39"/>
+                </a:solidFill>
+                <a:latin typeface="Aptos"/>
+              </a:rPr>
+              <a:t>Fin Core demonstrates a complete digital banking solution that streamlines onboarding,
+transactions and loan management with security, validation and role-based access.</a:t>
+            </a:r>
           </a:p>
         </p:txBody>
       </p:sp>
@@ -6177,703 +5929,106 @@
         </p:nvSpPr>
         <p:spPr>
           <a:xfrm>
-            <a:off x="822959" y="1463040"/>
-            <a:ext cx="5513831" cy="347472"/>
-          </a:xfrm>
-          <a:prstGeom prst="rect">
-            <a:avLst/>
-          </a:prstGeom>
-          <a:noFill/>
-        </p:spPr>
-        <p:txBody>
-          <a:bodyPr wrap="square" lIns="36576" rIns="36576" tIns="18288" bIns="18288" anchor="t">
+            <a:off x="804672" y="3035808"/>
+            <a:ext cx="5074920" cy="347472"/>
+          </a:xfrm>
+          <a:prstGeom prst="rect">
+            <a:avLst/>
+          </a:prstGeom>
+          <a:noFill/>
+        </p:spPr>
+        <p:txBody>
+          <a:bodyPr wrap="square" lIns="36576" tIns="18288" rIns="36576" bIns="18288" anchor="t">
             <a:spAutoFit/>
           </a:bodyPr>
           <a:lstStyle/>
           <a:p>
             <a:pPr algn="l"/>
             <a:r>
-              <a:rPr sz="1450" b="1">
+              <a:rPr sz="1500" b="1">
+                <a:solidFill>
+                  <a:srgbClr val="139197"/>
+                </a:solidFill>
+                <a:latin typeface="Aptos"/>
+              </a:rPr>
+              <a:t>Smart Banking for a Better Tomorrow</a:t>
+            </a:r>
+          </a:p>
+        </p:txBody>
+      </p:sp>
+      <p:sp>
+        <p:nvSpPr>
+          <p:cNvPr id="9" name="TextBox 8"/>
+          <p:cNvSpPr txBox="1"/>
+          <p:nvPr/>
+        </p:nvSpPr>
+        <p:spPr>
+          <a:xfrm>
+            <a:off x="804672" y="3703320"/>
+            <a:ext cx="5074920" cy="457200"/>
+          </a:xfrm>
+          <a:prstGeom prst="rect">
+            <a:avLst/>
+          </a:prstGeom>
+          <a:noFill/>
+        </p:spPr>
+        <p:txBody>
+          <a:bodyPr wrap="square" lIns="36576" tIns="18288" rIns="36576" bIns="18288" anchor="t">
+            <a:spAutoFit/>
+          </a:bodyPr>
+          <a:lstStyle/>
+          <a:p>
+            <a:pPr algn="l"/>
+            <a:r>
+              <a:rPr sz="2500" b="1">
+                <a:solidFill>
+                  <a:srgbClr val="082F5D"/>
+                </a:solidFill>
+                <a:latin typeface="Aptos"/>
+              </a:rPr>
+              <a:t>Thank You!</a:t>
+            </a:r>
+          </a:p>
+        </p:txBody>
+      </p:sp>
+      <p:sp>
+        <p:nvSpPr>
+          <p:cNvPr id="10" name="TextBox 9"/>
+          <p:cNvSpPr txBox="1"/>
+          <p:nvPr/>
+        </p:nvSpPr>
+        <p:spPr>
+          <a:xfrm>
+            <a:off x="804672" y="4315968"/>
+            <a:ext cx="5074920" cy="292608"/>
+          </a:xfrm>
+          <a:prstGeom prst="rect">
+            <a:avLst/>
+          </a:prstGeom>
+          <a:noFill/>
+        </p:spPr>
+        <p:txBody>
+          <a:bodyPr wrap="square" lIns="36576" tIns="18288" rIns="36576" bIns="18288" anchor="t">
+            <a:spAutoFit/>
+          </a:bodyPr>
+          <a:lstStyle/>
+          <a:p>
+            <a:pPr algn="l"/>
+            <a:r>
+              <a:rPr sz="1350" b="1">
                 <a:solidFill>
                   <a:srgbClr val="1569B4"/>
                 </a:solidFill>
                 <a:latin typeface="Aptos"/>
               </a:rPr>
-              <a:t>Role-Based Security</a:t>
-            </a:r>
-          </a:p>
-        </p:txBody>
-      </p:sp>
-      <p:sp>
-        <p:nvSpPr>
-          <p:cNvPr id="9" name="TextBox 8"/>
-          <p:cNvSpPr txBox="1"/>
-          <p:nvPr/>
-        </p:nvSpPr>
-        <p:spPr>
-          <a:xfrm>
-            <a:off x="822959" y="1883664"/>
-            <a:ext cx="5513831" cy="380000"/>
-          </a:xfrm>
-          <a:prstGeom prst="rect">
-            <a:avLst/>
-          </a:prstGeom>
-          <a:noFill/>
-        </p:spPr>
-        <p:txBody>
-          <a:bodyPr wrap="square" lIns="36576" rIns="36576" tIns="18288" bIns="18288" anchor="t">
-            <a:spAutoFit/>
-          </a:bodyPr>
-          <a:lstStyle/>
-          <a:p>
-            <a:pPr algn="l"/>
-            <a:r>
-              <a:rPr sz="1250" b="0">
-                <a:solidFill>
-                  <a:srgbClr val="1C2B39"/>
-                </a:solidFill>
-                <a:latin typeface="Aptos"/>
-              </a:rPr>
-              <a:t>Spring Security separates Admin &amp; Customer permissions.</a:t>
-            </a:r>
-          </a:p>
-        </p:txBody>
-      </p:sp>
-      <p:sp>
-        <p:nvSpPr>
-          <p:cNvPr id="10" name="Rounded Rectangle 9"/>
-          <p:cNvSpPr/>
-          <p:nvPr/>
-        </p:nvSpPr>
-        <p:spPr>
-          <a:xfrm>
-            <a:off x="640080" y="2368312"/>
-            <a:ext cx="5806440" cy="900000"/>
-          </a:xfrm>
-          <a:prstGeom prst="roundRect">
-            <a:avLst/>
-          </a:prstGeom>
-          <a:solidFill>
-            <a:srgbClr val="FFFFFF"/>
-          </a:solidFill>
-          <a:ln w="11430">
-            <a:solidFill>
-              <a:srgbClr val="BED3E4"/>
-            </a:solidFill>
-          </a:ln>
-        </p:spPr>
-        <p:style>
-          <a:lnRef idx="1">
-            <a:schemeClr val="accent1"/>
-          </a:lnRef>
-          <a:fillRef idx="3">
-            <a:schemeClr val="accent1"/>
-          </a:fillRef>
-          <a:effectRef idx="2">
-            <a:schemeClr val="accent1"/>
-          </a:effectRef>
-          <a:fontRef idx="minor">
-            <a:schemeClr val="lt1"/>
-          </a:fontRef>
-        </p:style>
-        <p:txBody>
-          <a:bodyPr rtlCol="0" anchor="ctr"/>
-          <a:lstStyle/>
-          <a:p>
-            <a:pPr algn="ctr"/>
-          </a:p>
-        </p:txBody>
-      </p:sp>
-      <p:sp>
-        <p:nvSpPr>
-          <p:cNvPr id="11" name="Rectangle 10"/>
-          <p:cNvSpPr/>
-          <p:nvPr/>
-        </p:nvSpPr>
-        <p:spPr>
-          <a:xfrm>
-            <a:off x="640080" y="2368312"/>
-            <a:ext cx="64008" cy="900000"/>
-          </a:xfrm>
-          <a:prstGeom prst="rect">
-            <a:avLst/>
-          </a:prstGeom>
-          <a:solidFill>
-            <a:srgbClr val="139197"/>
-          </a:solidFill>
-          <a:ln>
-            <a:noFill/>
-          </a:ln>
-        </p:spPr>
-        <p:style>
-          <a:lnRef idx="1">
-            <a:schemeClr val="accent1"/>
-          </a:lnRef>
-          <a:fillRef idx="3">
-            <a:schemeClr val="accent1"/>
-          </a:fillRef>
-          <a:effectRef idx="2">
-            <a:schemeClr val="accent1"/>
-          </a:effectRef>
-          <a:fontRef idx="minor">
-            <a:schemeClr val="lt1"/>
-          </a:fontRef>
-        </p:style>
-        <p:txBody>
-          <a:bodyPr rtlCol="0" anchor="ctr"/>
-          <a:lstStyle/>
-          <a:p>
-            <a:pPr algn="ctr"/>
-          </a:p>
-        </p:txBody>
-      </p:sp>
-      <p:sp>
-        <p:nvSpPr>
-          <p:cNvPr id="12" name="TextBox 11"/>
-          <p:cNvSpPr txBox="1"/>
-          <p:nvPr/>
-        </p:nvSpPr>
-        <p:spPr>
-          <a:xfrm>
-            <a:off x="822959" y="2478040"/>
-            <a:ext cx="5513831" cy="347472"/>
-          </a:xfrm>
-          <a:prstGeom prst="rect">
-            <a:avLst/>
-          </a:prstGeom>
-          <a:noFill/>
-        </p:spPr>
-        <p:txBody>
-          <a:bodyPr wrap="square" lIns="36576" rIns="36576" tIns="18288" bIns="18288" anchor="t">
-            <a:spAutoFit/>
-          </a:bodyPr>
-          <a:lstStyle/>
-          <a:p>
-            <a:pPr algn="l"/>
-            <a:r>
-              <a:rPr sz="1450" b="1">
-                <a:solidFill>
-                  <a:srgbClr val="139197"/>
-                </a:solidFill>
-                <a:latin typeface="Aptos"/>
-              </a:rPr>
-              <a:t>Customer Management</a:t>
-            </a:r>
-          </a:p>
-        </p:txBody>
-      </p:sp>
-      <p:sp>
-        <p:nvSpPr>
-          <p:cNvPr id="13" name="TextBox 12"/>
-          <p:cNvSpPr txBox="1"/>
-          <p:nvPr/>
-        </p:nvSpPr>
-        <p:spPr>
-          <a:xfrm>
-            <a:off x="822959" y="2898664"/>
-            <a:ext cx="5513831" cy="380000"/>
-          </a:xfrm>
-          <a:prstGeom prst="rect">
-            <a:avLst/>
-          </a:prstGeom>
-          <a:noFill/>
-        </p:spPr>
-        <p:txBody>
-          <a:bodyPr wrap="square" lIns="36576" rIns="36576" tIns="18288" bIns="18288" anchor="t">
-            <a:spAutoFit/>
-          </a:bodyPr>
-          <a:lstStyle/>
-          <a:p>
-            <a:pPr algn="l"/>
-            <a:r>
-              <a:rPr sz="1250" b="0">
-                <a:solidFill>
-                  <a:srgbClr val="1C2B39"/>
-                </a:solidFill>
-                <a:latin typeface="Aptos"/>
-              </a:rPr>
-              <a:t>Request, approval &amp; account access workflow.</a:t>
-            </a:r>
-          </a:p>
-        </p:txBody>
-      </p:sp>
-      <p:sp>
-        <p:nvSpPr>
-          <p:cNvPr id="14" name="Rounded Rectangle 13"/>
-          <p:cNvSpPr/>
-          <p:nvPr/>
-        </p:nvSpPr>
-        <p:spPr>
-          <a:xfrm>
-            <a:off x="640080" y="3383312"/>
-            <a:ext cx="5806440" cy="900000"/>
-          </a:xfrm>
-          <a:prstGeom prst="roundRect">
-            <a:avLst/>
-          </a:prstGeom>
-          <a:solidFill>
-            <a:srgbClr val="FFFFFF"/>
-          </a:solidFill>
-          <a:ln w="11430">
-            <a:solidFill>
-              <a:srgbClr val="BED3E4"/>
-            </a:solidFill>
-          </a:ln>
-        </p:spPr>
-        <p:style>
-          <a:lnRef idx="1">
-            <a:schemeClr val="accent1"/>
-          </a:lnRef>
-          <a:fillRef idx="3">
-            <a:schemeClr val="accent1"/>
-          </a:fillRef>
-          <a:effectRef idx="2">
-            <a:schemeClr val="accent1"/>
-          </a:effectRef>
-          <a:fontRef idx="minor">
-            <a:schemeClr val="lt1"/>
-          </a:fontRef>
-        </p:style>
-        <p:txBody>
-          <a:bodyPr rtlCol="0" anchor="ctr"/>
-          <a:lstStyle/>
-          <a:p>
-            <a:pPr algn="ctr"/>
-          </a:p>
-        </p:txBody>
-      </p:sp>
-      <p:sp>
-        <p:nvSpPr>
-          <p:cNvPr id="15" name="Rectangle 14"/>
-          <p:cNvSpPr/>
-          <p:nvPr/>
-        </p:nvSpPr>
-        <p:spPr>
-          <a:xfrm>
-            <a:off x="640080" y="3383312"/>
-            <a:ext cx="64008" cy="900000"/>
-          </a:xfrm>
-          <a:prstGeom prst="rect">
-            <a:avLst/>
-          </a:prstGeom>
-          <a:solidFill>
-            <a:srgbClr val="489757"/>
-          </a:solidFill>
-          <a:ln>
-            <a:noFill/>
-          </a:ln>
-        </p:spPr>
-        <p:style>
-          <a:lnRef idx="1">
-            <a:schemeClr val="accent1"/>
-          </a:lnRef>
-          <a:fillRef idx="3">
-            <a:schemeClr val="accent1"/>
-          </a:fillRef>
-          <a:effectRef idx="2">
-            <a:schemeClr val="accent1"/>
-          </a:effectRef>
-          <a:fontRef idx="minor">
-            <a:schemeClr val="lt1"/>
-          </a:fontRef>
-        </p:style>
-        <p:txBody>
-          <a:bodyPr rtlCol="0" anchor="ctr"/>
-          <a:lstStyle/>
-          <a:p>
-            <a:pPr algn="ctr"/>
-          </a:p>
-        </p:txBody>
-      </p:sp>
-      <p:sp>
-        <p:nvSpPr>
-          <p:cNvPr id="16" name="TextBox 15"/>
-          <p:cNvSpPr txBox="1"/>
-          <p:nvPr/>
-        </p:nvSpPr>
-        <p:spPr>
-          <a:xfrm>
-            <a:off x="822959" y="3493040"/>
-            <a:ext cx="5513831" cy="347472"/>
-          </a:xfrm>
-          <a:prstGeom prst="rect">
-            <a:avLst/>
-          </a:prstGeom>
-          <a:noFill/>
-        </p:spPr>
-        <p:txBody>
-          <a:bodyPr wrap="square" lIns="36576" rIns="36576" tIns="18288" bIns="18288" anchor="t">
-            <a:spAutoFit/>
-          </a:bodyPr>
-          <a:lstStyle/>
-          <a:p>
-            <a:pPr algn="l"/>
-            <a:r>
-              <a:rPr sz="1450" b="1">
-                <a:solidFill>
-                  <a:srgbClr val="489757"/>
-                </a:solidFill>
-                <a:latin typeface="Aptos"/>
-              </a:rPr>
-              <a:t>Transaction Management</a:t>
-            </a:r>
-          </a:p>
-        </p:txBody>
-      </p:sp>
-      <p:sp>
-        <p:nvSpPr>
-          <p:cNvPr id="17" name="TextBox 16"/>
-          <p:cNvSpPr txBox="1"/>
-          <p:nvPr/>
-        </p:nvSpPr>
-        <p:spPr>
-          <a:xfrm>
-            <a:off x="822959" y="3913664"/>
-            <a:ext cx="5513831" cy="380000"/>
-          </a:xfrm>
-          <a:prstGeom prst="rect">
-            <a:avLst/>
-          </a:prstGeom>
-          <a:noFill/>
-        </p:spPr>
-        <p:txBody>
-          <a:bodyPr wrap="square" lIns="36576" rIns="36576" tIns="18288" bIns="18288" anchor="t">
-            <a:spAutoFit/>
-          </a:bodyPr>
-          <a:lstStyle/>
-          <a:p>
-            <a:pPr algn="l"/>
-            <a:r>
-              <a:rPr sz="1250" b="0">
-                <a:solidFill>
-                  <a:srgbClr val="1C2B39"/>
-                </a:solidFill>
-                <a:latin typeface="Aptos"/>
-              </a:rPr>
-              <a:t>Deposit, withdrawal, transfer &amp; history with validation.</a:t>
-            </a:r>
-          </a:p>
-        </p:txBody>
-      </p:sp>
-      <p:sp>
-        <p:nvSpPr>
-          <p:cNvPr id="18" name="Rounded Rectangle 17"/>
-          <p:cNvSpPr/>
-          <p:nvPr/>
-        </p:nvSpPr>
-        <p:spPr>
-          <a:xfrm>
-            <a:off x="640080" y="4398312"/>
-            <a:ext cx="5806440" cy="900000"/>
-          </a:xfrm>
-          <a:prstGeom prst="roundRect">
-            <a:avLst/>
-          </a:prstGeom>
-          <a:solidFill>
-            <a:srgbClr val="FFFFFF"/>
-          </a:solidFill>
-          <a:ln w="11430">
-            <a:solidFill>
-              <a:srgbClr val="BED3E4"/>
-            </a:solidFill>
-          </a:ln>
-        </p:spPr>
-        <p:style>
-          <a:lnRef idx="1">
-            <a:schemeClr val="accent1"/>
-          </a:lnRef>
-          <a:fillRef idx="3">
-            <a:schemeClr val="accent1"/>
-          </a:fillRef>
-          <a:effectRef idx="2">
-            <a:schemeClr val="accent1"/>
-          </a:effectRef>
-          <a:fontRef idx="minor">
-            <a:schemeClr val="lt1"/>
-          </a:fontRef>
-        </p:style>
-        <p:txBody>
-          <a:bodyPr rtlCol="0" anchor="ctr"/>
-          <a:lstStyle/>
-          <a:p>
-            <a:pPr algn="ctr"/>
-          </a:p>
-        </p:txBody>
-      </p:sp>
-      <p:sp>
-        <p:nvSpPr>
-          <p:cNvPr id="19" name="Rectangle 18"/>
-          <p:cNvSpPr/>
-          <p:nvPr/>
-        </p:nvSpPr>
-        <p:spPr>
-          <a:xfrm>
-            <a:off x="640080" y="4398312"/>
-            <a:ext cx="64008" cy="900000"/>
-          </a:xfrm>
-          <a:prstGeom prst="rect">
-            <a:avLst/>
-          </a:prstGeom>
-          <a:solidFill>
-            <a:srgbClr val="E88B19"/>
-          </a:solidFill>
-          <a:ln>
-            <a:noFill/>
-          </a:ln>
-        </p:spPr>
-        <p:style>
-          <a:lnRef idx="1">
-            <a:schemeClr val="accent1"/>
-          </a:lnRef>
-          <a:fillRef idx="3">
-            <a:schemeClr val="accent1"/>
-          </a:fillRef>
-          <a:effectRef idx="2">
-            <a:schemeClr val="accent1"/>
-          </a:effectRef>
-          <a:fontRef idx="minor">
-            <a:schemeClr val="lt1"/>
-          </a:fontRef>
-        </p:style>
-        <p:txBody>
-          <a:bodyPr rtlCol="0" anchor="ctr"/>
-          <a:lstStyle/>
-          <a:p>
-            <a:pPr algn="ctr"/>
-          </a:p>
-        </p:txBody>
-      </p:sp>
-      <p:sp>
-        <p:nvSpPr>
-          <p:cNvPr id="20" name="TextBox 19"/>
-          <p:cNvSpPr txBox="1"/>
-          <p:nvPr/>
-        </p:nvSpPr>
-        <p:spPr>
-          <a:xfrm>
-            <a:off x="822959" y="4508040"/>
-            <a:ext cx="5513831" cy="347472"/>
-          </a:xfrm>
-          <a:prstGeom prst="rect">
-            <a:avLst/>
-          </a:prstGeom>
-          <a:noFill/>
-        </p:spPr>
-        <p:txBody>
-          <a:bodyPr wrap="square" lIns="36576" rIns="36576" tIns="18288" bIns="18288" anchor="t">
-            <a:spAutoFit/>
-          </a:bodyPr>
-          <a:lstStyle/>
-          <a:p>
-            <a:pPr algn="l"/>
-            <a:r>
-              <a:rPr sz="1450" b="1">
-                <a:solidFill>
-                  <a:srgbClr val="E88B19"/>
-                </a:solidFill>
-                <a:latin typeface="Aptos"/>
-              </a:rPr>
-              <a:t>Loan Management</a:t>
-            </a:r>
-          </a:p>
-        </p:txBody>
-      </p:sp>
-      <p:sp>
-        <p:nvSpPr>
-          <p:cNvPr id="21" name="TextBox 20"/>
-          <p:cNvSpPr txBox="1"/>
-          <p:nvPr/>
-        </p:nvSpPr>
-        <p:spPr>
-          <a:xfrm>
-            <a:off x="822959" y="4928664"/>
-            <a:ext cx="5513831" cy="380000"/>
-          </a:xfrm>
-          <a:prstGeom prst="rect">
-            <a:avLst/>
-          </a:prstGeom>
-          <a:noFill/>
-        </p:spPr>
-        <p:txBody>
-          <a:bodyPr wrap="square" lIns="36576" rIns="36576" tIns="18288" bIns="18288" anchor="t">
-            <a:spAutoFit/>
-          </a:bodyPr>
-          <a:lstStyle/>
-          <a:p>
-            <a:pPr algn="l"/>
-            <a:r>
-              <a:rPr sz="1250" b="0">
-                <a:solidFill>
-                  <a:srgbClr val="1C2B39"/>
-                </a:solidFill>
-                <a:latin typeface="Aptos"/>
-              </a:rPr>
-              <a:t>Application, admin approval/rejection &amp; repayment.</a:t>
-            </a:r>
-          </a:p>
-        </p:txBody>
-      </p:sp>
-      <p:sp>
-        <p:nvSpPr>
-          <p:cNvPr id="22" name="Rounded Rectangle 21"/>
-          <p:cNvSpPr/>
-          <p:nvPr/>
-        </p:nvSpPr>
-        <p:spPr>
-          <a:xfrm>
-            <a:off x="640080" y="5413312"/>
-            <a:ext cx="5806440" cy="900000"/>
-          </a:xfrm>
-          <a:prstGeom prst="roundRect">
-            <a:avLst/>
-          </a:prstGeom>
-          <a:solidFill>
-            <a:srgbClr val="FFFFFF"/>
-          </a:solidFill>
-          <a:ln w="11430">
-            <a:solidFill>
-              <a:srgbClr val="BED3E4"/>
-            </a:solidFill>
-          </a:ln>
-        </p:spPr>
-        <p:style>
-          <a:lnRef idx="1">
-            <a:schemeClr val="accent1"/>
-          </a:lnRef>
-          <a:fillRef idx="3">
-            <a:schemeClr val="accent1"/>
-          </a:fillRef>
-          <a:effectRef idx="2">
-            <a:schemeClr val="accent1"/>
-          </a:effectRef>
-          <a:fontRef idx="minor">
-            <a:schemeClr val="lt1"/>
-          </a:fontRef>
-        </p:style>
-        <p:txBody>
-          <a:bodyPr rtlCol="0" anchor="ctr"/>
-          <a:lstStyle/>
-          <a:p>
-            <a:pPr algn="ctr"/>
-          </a:p>
-        </p:txBody>
-      </p:sp>
-      <p:sp>
-        <p:nvSpPr>
-          <p:cNvPr id="23" name="Rectangle 22"/>
-          <p:cNvSpPr/>
-          <p:nvPr/>
-        </p:nvSpPr>
-        <p:spPr>
-          <a:xfrm>
-            <a:off x="640080" y="5413312"/>
-            <a:ext cx="64008" cy="900000"/>
-          </a:xfrm>
-          <a:prstGeom prst="rect">
-            <a:avLst/>
-          </a:prstGeom>
-          <a:solidFill>
-            <a:srgbClr val="584896"/>
-          </a:solidFill>
-          <a:ln>
-            <a:noFill/>
-          </a:ln>
-        </p:spPr>
-        <p:style>
-          <a:lnRef idx="1">
-            <a:schemeClr val="accent1"/>
-          </a:lnRef>
-          <a:fillRef idx="3">
-            <a:schemeClr val="accent1"/>
-          </a:fillRef>
-          <a:effectRef idx="2">
-            <a:schemeClr val="accent1"/>
-          </a:effectRef>
-          <a:fontRef idx="minor">
-            <a:schemeClr val="lt1"/>
-          </a:fontRef>
-        </p:style>
-        <p:txBody>
-          <a:bodyPr rtlCol="0" anchor="ctr"/>
-          <a:lstStyle/>
-          <a:p>
-            <a:pPr algn="ctr"/>
-          </a:p>
-        </p:txBody>
-      </p:sp>
-      <p:sp>
-        <p:nvSpPr>
-          <p:cNvPr id="24" name="TextBox 23"/>
-          <p:cNvSpPr txBox="1"/>
-          <p:nvPr/>
-        </p:nvSpPr>
-        <p:spPr>
-          <a:xfrm>
-            <a:off x="822959" y="5523040"/>
-            <a:ext cx="5513831" cy="347472"/>
-          </a:xfrm>
-          <a:prstGeom prst="rect">
-            <a:avLst/>
-          </a:prstGeom>
-          <a:noFill/>
-        </p:spPr>
-        <p:txBody>
-          <a:bodyPr wrap="square" lIns="36576" rIns="36576" tIns="18288" bIns="18288" anchor="t">
-            <a:spAutoFit/>
-          </a:bodyPr>
-          <a:lstStyle/>
-          <a:p>
-            <a:pPr algn="l"/>
-            <a:r>
-              <a:rPr sz="1450" b="1">
-                <a:solidFill>
-                  <a:srgbClr val="584896"/>
-                </a:solidFill>
-                <a:latin typeface="Aptos"/>
-              </a:rPr>
-              <a:t>Validation Layer</a:t>
-            </a:r>
-          </a:p>
-        </p:txBody>
-      </p:sp>
-      <p:sp>
-        <p:nvSpPr>
-          <p:cNvPr id="25" name="TextBox 24"/>
-          <p:cNvSpPr txBox="1"/>
-          <p:nvPr/>
-        </p:nvSpPr>
-        <p:spPr>
-          <a:xfrm>
-            <a:off x="822959" y="5943664"/>
-            <a:ext cx="5513831" cy="380000"/>
-          </a:xfrm>
-          <a:prstGeom prst="rect">
-            <a:avLst/>
-          </a:prstGeom>
-          <a:noFill/>
-        </p:spPr>
-        <p:txBody>
-          <a:bodyPr wrap="square" lIns="36576" rIns="36576" tIns="18288" bIns="18288" anchor="t">
-            <a:spAutoFit/>
-          </a:bodyPr>
-          <a:lstStyle/>
-          <a:p>
-            <a:pPr algn="l"/>
-            <a:r>
-              <a:rPr sz="1250" b="0">
-                <a:solidFill>
-                  <a:srgbClr val="1C2B39"/>
-                </a:solidFill>
-                <a:latin typeface="Aptos"/>
-              </a:rPr>
-              <a:t>Account, balance &amp; business rules checked before processing.</a:t>
-            </a:r>
-          </a:p>
-        </p:txBody>
-      </p:sp>
-      <p:sp>
-        <p:nvSpPr>
-          <p:cNvPr id="26" name="TextBox 25"/>
+              <a:t>Questions &amp; Discussion</a:t>
+            </a:r>
+          </a:p>
+        </p:txBody>
+      </p:sp>
+      <p:sp>
+        <p:nvSpPr>
+          <p:cNvPr id="11" name="TextBox 10"/>
           <p:cNvSpPr txBox="1"/>
           <p:nvPr/>
         </p:nvSpPr>
@@ -6888,7 +6043,7 @@
           <a:noFill/>
         </p:spPr>
         <p:txBody>
-          <a:bodyPr wrap="square" lIns="36576" rIns="36576" tIns="18288" bIns="18288" anchor="t">
+          <a:bodyPr wrap="square" lIns="36576" tIns="18288" rIns="36576" bIns="18288" anchor="t">
             <a:spAutoFit/>
           </a:bodyPr>
           <a:lstStyle/>
@@ -6908,7 +6063,7 @@
       </p:sp>
       <p:sp>
         <p:nvSpPr>
-          <p:cNvPr id="27" name="TextBox 26"/>
+          <p:cNvPr id="12" name="TextBox 11"/>
           <p:cNvSpPr txBox="1"/>
           <p:nvPr/>
         </p:nvSpPr>
@@ -6923,2180 +6078,7 @@
           <a:noFill/>
         </p:spPr>
         <p:txBody>
-          <a:bodyPr wrap="square" lIns="36576" rIns="36576" tIns="18288" bIns="18288" anchor="t">
-            <a:spAutoFit/>
-          </a:bodyPr>
-          <a:lstStyle/>
-          <a:p>
-            <a:pPr algn="r"/>
-            <a:r>
-              <a:rPr sz="750" b="1">
-                <a:solidFill>
-                  <a:srgbClr val="082F5D"/>
-                </a:solidFill>
-                <a:latin typeface="Aptos"/>
-              </a:rPr>
-              <a:t>12</a:t>
-            </a:r>
-          </a:p>
-        </p:txBody>
-      </p:sp>
-    </p:spTree>
-  </p:cSld>
-  <p:clrMapOvr>
-    <a:masterClrMapping/>
-  </p:clrMapOvr>
-</p:sld>
-</file>
-
-<file path=ppt/slides/slide13.xml><?xml version="1.0" encoding="utf-8"?>
-<p:sld xmlns:a="http://schemas.openxmlformats.org/drawingml/2006/main" xmlns:p="http://schemas.openxmlformats.org/presentationml/2006/main" xmlns:r="http://schemas.openxmlformats.org/officeDocument/2006/relationships">
-  <p:cSld>
-    <p:spTree>
-      <p:nvGrpSpPr>
-        <p:cNvPr id="1" name=""/>
-        <p:cNvGrpSpPr/>
-        <p:nvPr/>
-      </p:nvGrpSpPr>
-      <p:grpSpPr/>
-      <p:pic>
-        <p:nvPicPr>
-          <p:cNvPr id="2" name="Picture 1" descr="Slide_13_Background.png"/>
-          <p:cNvPicPr>
-            <a:picLocks noChangeAspect="1"/>
-          </p:cNvPicPr>
-          <p:nvPr/>
-        </p:nvPicPr>
-        <p:blipFill>
-          <a:blip r:embed="rId2"/>
-          <a:stretch>
-            <a:fillRect/>
-          </a:stretch>
-        </p:blipFill>
-        <p:spPr>
-          <a:xfrm>
-            <a:off x="0" y="0"/>
-            <a:ext cx="12191999" cy="6858000"/>
-          </a:xfrm>
-          <a:prstGeom prst="rect">
-            <a:avLst/>
-          </a:prstGeom>
-        </p:spPr>
-      </p:pic>
-      <p:sp>
-        <p:nvSpPr>
-          <p:cNvPr id="3" name="Rounded Rectangle 2"/>
-          <p:cNvSpPr/>
-          <p:nvPr/>
-        </p:nvSpPr>
-        <p:spPr>
-          <a:xfrm>
-            <a:off x="347472" y="228600"/>
-            <a:ext cx="6858000" cy="960120"/>
-          </a:xfrm>
-          <a:prstGeom prst="roundRect">
-            <a:avLst/>
-          </a:prstGeom>
-          <a:solidFill>
-            <a:srgbClr val="FFFFFF"/>
-          </a:solidFill>
-          <a:ln w="11430">
-            <a:solidFill>
-              <a:srgbClr val="BED3E4"/>
-            </a:solidFill>
-          </a:ln>
-        </p:spPr>
-        <p:style>
-          <a:lnRef idx="1">
-            <a:schemeClr val="accent1"/>
-          </a:lnRef>
-          <a:fillRef idx="3">
-            <a:schemeClr val="accent1"/>
-          </a:fillRef>
-          <a:effectRef idx="2">
-            <a:schemeClr val="accent1"/>
-          </a:effectRef>
-          <a:fontRef idx="minor">
-            <a:schemeClr val="lt1"/>
-          </a:fontRef>
-        </p:style>
-        <p:txBody>
-          <a:bodyPr rtlCol="0" anchor="ctr"/>
-          <a:lstStyle/>
-          <a:p>
-            <a:pPr algn="ctr"/>
-          </a:p>
-        </p:txBody>
-      </p:sp>
-      <p:sp>
-        <p:nvSpPr>
-          <p:cNvPr id="4" name="TextBox 3"/>
-          <p:cNvSpPr txBox="1"/>
-          <p:nvPr/>
-        </p:nvSpPr>
-        <p:spPr>
-          <a:xfrm>
-            <a:off x="548640" y="338328"/>
-            <a:ext cx="6400800" cy="393192"/>
-          </a:xfrm>
-          <a:prstGeom prst="rect">
-            <a:avLst/>
-          </a:prstGeom>
-          <a:noFill/>
-        </p:spPr>
-        <p:txBody>
-          <a:bodyPr wrap="square" lIns="36576" rIns="36576" tIns="18288" bIns="18288" anchor="t">
-            <a:spAutoFit/>
-          </a:bodyPr>
-          <a:lstStyle/>
-          <a:p>
-            <a:pPr algn="l"/>
-            <a:r>
-              <a:rPr sz="2400" b="1">
-                <a:solidFill>
-                  <a:srgbClr val="082F5D"/>
-                </a:solidFill>
-                <a:latin typeface="Aptos"/>
-              </a:rPr>
-              <a:t>VALIDATIONS &amp; SECURITY</a:t>
-            </a:r>
-          </a:p>
-        </p:txBody>
-      </p:sp>
-      <p:sp>
-        <p:nvSpPr>
-          <p:cNvPr id="5" name="TextBox 4"/>
-          <p:cNvSpPr txBox="1"/>
-          <p:nvPr/>
-        </p:nvSpPr>
-        <p:spPr>
-          <a:xfrm>
-            <a:off x="566928" y="749808"/>
-            <a:ext cx="6217920" cy="228600"/>
-          </a:xfrm>
-          <a:prstGeom prst="rect">
-            <a:avLst/>
-          </a:prstGeom>
-          <a:noFill/>
-        </p:spPr>
-        <p:txBody>
-          <a:bodyPr wrap="square" lIns="36576" rIns="36576" tIns="18288" bIns="18288" anchor="t">
-            <a:spAutoFit/>
-          </a:bodyPr>
-          <a:lstStyle/>
-          <a:p>
-            <a:pPr algn="l"/>
-            <a:r>
-              <a:rPr sz="1300" b="0">
-                <a:solidFill>
-                  <a:srgbClr val="082F5D"/>
-                </a:solidFill>
-                <a:latin typeface="Aptos"/>
-              </a:rPr>
-              <a:t>Ensuring Data Integrity</a:t>
-            </a:r>
-          </a:p>
-        </p:txBody>
-      </p:sp>
-      <p:sp>
-        <p:nvSpPr>
-          <p:cNvPr id="6" name="Rounded Rectangle 5"/>
-          <p:cNvSpPr/>
-          <p:nvPr/>
-        </p:nvSpPr>
-        <p:spPr>
-          <a:xfrm>
-            <a:off x="621792" y="1417320"/>
-            <a:ext cx="5715000" cy="1050000"/>
-          </a:xfrm>
-          <a:prstGeom prst="roundRect">
-            <a:avLst/>
-          </a:prstGeom>
-          <a:solidFill>
-            <a:srgbClr val="FFFFFF"/>
-          </a:solidFill>
-          <a:ln w="11430">
-            <a:solidFill>
-              <a:srgbClr val="BED3E4"/>
-            </a:solidFill>
-          </a:ln>
-        </p:spPr>
-        <p:style>
-          <a:lnRef idx="1">
-            <a:schemeClr val="accent1"/>
-          </a:lnRef>
-          <a:fillRef idx="3">
-            <a:schemeClr val="accent1"/>
-          </a:fillRef>
-          <a:effectRef idx="2">
-            <a:schemeClr val="accent1"/>
-          </a:effectRef>
-          <a:fontRef idx="minor">
-            <a:schemeClr val="lt1"/>
-          </a:fontRef>
-        </p:style>
-        <p:txBody>
-          <a:bodyPr rtlCol="0" anchor="ctr"/>
-          <a:lstStyle/>
-          <a:p>
-            <a:pPr algn="ctr"/>
-          </a:p>
-        </p:txBody>
-      </p:sp>
-      <p:sp>
-        <p:nvSpPr>
-          <p:cNvPr id="7" name="Rectangle 6"/>
-          <p:cNvSpPr/>
-          <p:nvPr/>
-        </p:nvSpPr>
-        <p:spPr>
-          <a:xfrm>
-            <a:off x="621792" y="1417320"/>
-            <a:ext cx="64008" cy="1050000"/>
-          </a:xfrm>
-          <a:prstGeom prst="rect">
-            <a:avLst/>
-          </a:prstGeom>
-          <a:solidFill>
-            <a:srgbClr val="1569B4"/>
-          </a:solidFill>
-          <a:ln>
-            <a:noFill/>
-          </a:ln>
-        </p:spPr>
-        <p:style>
-          <a:lnRef idx="1">
-            <a:schemeClr val="accent1"/>
-          </a:lnRef>
-          <a:fillRef idx="3">
-            <a:schemeClr val="accent1"/>
-          </a:fillRef>
-          <a:effectRef idx="2">
-            <a:schemeClr val="accent1"/>
-          </a:effectRef>
-          <a:fontRef idx="minor">
-            <a:schemeClr val="lt1"/>
-          </a:fontRef>
-        </p:style>
-        <p:txBody>
-          <a:bodyPr rtlCol="0" anchor="ctr"/>
-          <a:lstStyle/>
-          <a:p>
-            <a:pPr algn="ctr"/>
-          </a:p>
-        </p:txBody>
-      </p:sp>
-      <p:sp>
-        <p:nvSpPr>
-          <p:cNvPr id="8" name="TextBox 7"/>
-          <p:cNvSpPr txBox="1"/>
-          <p:nvPr/>
-        </p:nvSpPr>
-        <p:spPr>
-          <a:xfrm>
-            <a:off x="804672" y="1527048"/>
-            <a:ext cx="5422392" cy="347472"/>
-          </a:xfrm>
-          <a:prstGeom prst="rect">
-            <a:avLst/>
-          </a:prstGeom>
-          <a:noFill/>
-        </p:spPr>
-        <p:txBody>
-          <a:bodyPr wrap="square" lIns="36576" rIns="36576" tIns="18288" bIns="18288" anchor="t">
-            <a:spAutoFit/>
-          </a:bodyPr>
-          <a:lstStyle/>
-          <a:p>
-            <a:pPr algn="l"/>
-            <a:r>
-              <a:rPr sz="1550" b="1">
-                <a:solidFill>
-                  <a:srgbClr val="1569B4"/>
-                </a:solidFill>
-                <a:latin typeface="Aptos"/>
-              </a:rPr>
-              <a:t>Form Validations</a:t>
-            </a:r>
-          </a:p>
-        </p:txBody>
-      </p:sp>
-      <p:sp>
-        <p:nvSpPr>
-          <p:cNvPr id="9" name="TextBox 8"/>
-          <p:cNvSpPr txBox="1"/>
-          <p:nvPr/>
-        </p:nvSpPr>
-        <p:spPr>
-          <a:xfrm>
-            <a:off x="804672" y="1947672"/>
-            <a:ext cx="5422392" cy="380000"/>
-          </a:xfrm>
-          <a:prstGeom prst="rect">
-            <a:avLst/>
-          </a:prstGeom>
-          <a:noFill/>
-        </p:spPr>
-        <p:txBody>
-          <a:bodyPr wrap="square" lIns="36576" rIns="36576" tIns="18288" bIns="18288" anchor="t">
-            <a:spAutoFit/>
-          </a:bodyPr>
-          <a:lstStyle/>
-          <a:p>
-            <a:pPr algn="l"/>
-            <a:r>
-              <a:rPr sz="1350" b="0">
-                <a:solidFill>
-                  <a:srgbClr val="1C2B39"/>
-                </a:solidFill>
-                <a:latin typeface="Aptos"/>
-              </a:rPr>
-              <a:t>Input validations on all forms to prevent invalid or incomplete data.</a:t>
-            </a:r>
-          </a:p>
-        </p:txBody>
-      </p:sp>
-      <p:sp>
-        <p:nvSpPr>
-          <p:cNvPr id="10" name="Rounded Rectangle 9"/>
-          <p:cNvSpPr/>
-          <p:nvPr/>
-        </p:nvSpPr>
-        <p:spPr>
-          <a:xfrm>
-            <a:off x="621792" y="2700010"/>
-            <a:ext cx="5715000" cy="1050000"/>
-          </a:xfrm>
-          <a:prstGeom prst="roundRect">
-            <a:avLst/>
-          </a:prstGeom>
-          <a:solidFill>
-            <a:srgbClr val="FFFFFF"/>
-          </a:solidFill>
-          <a:ln w="11430">
-            <a:solidFill>
-              <a:srgbClr val="BED3E4"/>
-            </a:solidFill>
-          </a:ln>
-        </p:spPr>
-        <p:style>
-          <a:lnRef idx="1">
-            <a:schemeClr val="accent1"/>
-          </a:lnRef>
-          <a:fillRef idx="3">
-            <a:schemeClr val="accent1"/>
-          </a:fillRef>
-          <a:effectRef idx="2">
-            <a:schemeClr val="accent1"/>
-          </a:effectRef>
-          <a:fontRef idx="minor">
-            <a:schemeClr val="lt1"/>
-          </a:fontRef>
-        </p:style>
-        <p:txBody>
-          <a:bodyPr rtlCol="0" anchor="ctr"/>
-          <a:lstStyle/>
-          <a:p>
-            <a:pPr algn="ctr"/>
-          </a:p>
-        </p:txBody>
-      </p:sp>
-      <p:sp>
-        <p:nvSpPr>
-          <p:cNvPr id="11" name="Rectangle 10"/>
-          <p:cNvSpPr/>
-          <p:nvPr/>
-        </p:nvSpPr>
-        <p:spPr>
-          <a:xfrm>
-            <a:off x="621792" y="2700010"/>
-            <a:ext cx="64008" cy="1050000"/>
-          </a:xfrm>
-          <a:prstGeom prst="rect">
-            <a:avLst/>
-          </a:prstGeom>
-          <a:solidFill>
-            <a:srgbClr val="489757"/>
-          </a:solidFill>
-          <a:ln>
-            <a:noFill/>
-          </a:ln>
-        </p:spPr>
-        <p:style>
-          <a:lnRef idx="1">
-            <a:schemeClr val="accent1"/>
-          </a:lnRef>
-          <a:fillRef idx="3">
-            <a:schemeClr val="accent1"/>
-          </a:fillRef>
-          <a:effectRef idx="2">
-            <a:schemeClr val="accent1"/>
-          </a:effectRef>
-          <a:fontRef idx="minor">
-            <a:schemeClr val="lt1"/>
-          </a:fontRef>
-        </p:style>
-        <p:txBody>
-          <a:bodyPr rtlCol="0" anchor="ctr"/>
-          <a:lstStyle/>
-          <a:p>
-            <a:pPr algn="ctr"/>
-          </a:p>
-        </p:txBody>
-      </p:sp>
-      <p:sp>
-        <p:nvSpPr>
-          <p:cNvPr id="12" name="TextBox 11"/>
-          <p:cNvSpPr txBox="1"/>
-          <p:nvPr/>
-        </p:nvSpPr>
-        <p:spPr>
-          <a:xfrm>
-            <a:off x="804672" y="2809738"/>
-            <a:ext cx="5422392" cy="347472"/>
-          </a:xfrm>
-          <a:prstGeom prst="rect">
-            <a:avLst/>
-          </a:prstGeom>
-          <a:noFill/>
-        </p:spPr>
-        <p:txBody>
-          <a:bodyPr wrap="square" lIns="36576" rIns="36576" tIns="18288" bIns="18288" anchor="t">
-            <a:spAutoFit/>
-          </a:bodyPr>
-          <a:lstStyle/>
-          <a:p>
-            <a:pPr algn="l"/>
-            <a:r>
-              <a:rPr sz="1550" b="1">
-                <a:solidFill>
-                  <a:srgbClr val="489757"/>
-                </a:solidFill>
-                <a:latin typeface="Aptos"/>
-              </a:rPr>
-              <a:t>Business Rule Validations</a:t>
-            </a:r>
-          </a:p>
-        </p:txBody>
-      </p:sp>
-      <p:sp>
-        <p:nvSpPr>
-          <p:cNvPr id="13" name="TextBox 12"/>
-          <p:cNvSpPr txBox="1"/>
-          <p:nvPr/>
-        </p:nvSpPr>
-        <p:spPr>
-          <a:xfrm>
-            <a:off x="804672" y="3230362"/>
-            <a:ext cx="5422392" cy="380000"/>
-          </a:xfrm>
-          <a:prstGeom prst="rect">
-            <a:avLst/>
-          </a:prstGeom>
-          <a:noFill/>
-        </p:spPr>
-        <p:txBody>
-          <a:bodyPr wrap="square" lIns="36576" rIns="36576" tIns="18288" bIns="18288" anchor="t">
-            <a:spAutoFit/>
-          </a:bodyPr>
-          <a:lstStyle/>
-          <a:p>
-            <a:pPr algn="l"/>
-            <a:r>
-              <a:rPr sz="1350" b="0">
-                <a:solidFill>
-                  <a:srgbClr val="1C2B39"/>
-                </a:solidFill>
-                <a:latin typeface="Aptos"/>
-              </a:rPr>
-              <a:t>Account, balance, loan eligibility and transaction rules enforced.</a:t>
-            </a:r>
-          </a:p>
-        </p:txBody>
-      </p:sp>
-      <p:sp>
-        <p:nvSpPr>
-          <p:cNvPr id="14" name="Rounded Rectangle 13"/>
-          <p:cNvSpPr/>
-          <p:nvPr/>
-        </p:nvSpPr>
-        <p:spPr>
-          <a:xfrm>
-            <a:off x="621792" y="3982700"/>
-            <a:ext cx="5715000" cy="1050000"/>
-          </a:xfrm>
-          <a:prstGeom prst="roundRect">
-            <a:avLst/>
-          </a:prstGeom>
-          <a:solidFill>
-            <a:srgbClr val="FFFFFF"/>
-          </a:solidFill>
-          <a:ln w="11430">
-            <a:solidFill>
-              <a:srgbClr val="BED3E4"/>
-            </a:solidFill>
-          </a:ln>
-        </p:spPr>
-        <p:style>
-          <a:lnRef idx="1">
-            <a:schemeClr val="accent1"/>
-          </a:lnRef>
-          <a:fillRef idx="3">
-            <a:schemeClr val="accent1"/>
-          </a:fillRef>
-          <a:effectRef idx="2">
-            <a:schemeClr val="accent1"/>
-          </a:effectRef>
-          <a:fontRef idx="minor">
-            <a:schemeClr val="lt1"/>
-          </a:fontRef>
-        </p:style>
-        <p:txBody>
-          <a:bodyPr rtlCol="0" anchor="ctr"/>
-          <a:lstStyle/>
-          <a:p>
-            <a:pPr algn="ctr"/>
-          </a:p>
-        </p:txBody>
-      </p:sp>
-      <p:sp>
-        <p:nvSpPr>
-          <p:cNvPr id="15" name="Rectangle 14"/>
-          <p:cNvSpPr/>
-          <p:nvPr/>
-        </p:nvSpPr>
-        <p:spPr>
-          <a:xfrm>
-            <a:off x="621792" y="3982700"/>
-            <a:ext cx="64008" cy="1050000"/>
-          </a:xfrm>
-          <a:prstGeom prst="rect">
-            <a:avLst/>
-          </a:prstGeom>
-          <a:solidFill>
-            <a:srgbClr val="584896"/>
-          </a:solidFill>
-          <a:ln>
-            <a:noFill/>
-          </a:ln>
-        </p:spPr>
-        <p:style>
-          <a:lnRef idx="1">
-            <a:schemeClr val="accent1"/>
-          </a:lnRef>
-          <a:fillRef idx="3">
-            <a:schemeClr val="accent1"/>
-          </a:fillRef>
-          <a:effectRef idx="2">
-            <a:schemeClr val="accent1"/>
-          </a:effectRef>
-          <a:fontRef idx="minor">
-            <a:schemeClr val="lt1"/>
-          </a:fontRef>
-        </p:style>
-        <p:txBody>
-          <a:bodyPr rtlCol="0" anchor="ctr"/>
-          <a:lstStyle/>
-          <a:p>
-            <a:pPr algn="ctr"/>
-          </a:p>
-        </p:txBody>
-      </p:sp>
-      <p:sp>
-        <p:nvSpPr>
-          <p:cNvPr id="16" name="TextBox 15"/>
-          <p:cNvSpPr txBox="1"/>
-          <p:nvPr/>
-        </p:nvSpPr>
-        <p:spPr>
-          <a:xfrm>
-            <a:off x="804672" y="4092428"/>
-            <a:ext cx="5422392" cy="347472"/>
-          </a:xfrm>
-          <a:prstGeom prst="rect">
-            <a:avLst/>
-          </a:prstGeom>
-          <a:noFill/>
-        </p:spPr>
-        <p:txBody>
-          <a:bodyPr wrap="square" lIns="36576" rIns="36576" tIns="18288" bIns="18288" anchor="t">
-            <a:spAutoFit/>
-          </a:bodyPr>
-          <a:lstStyle/>
-          <a:p>
-            <a:pPr algn="l"/>
-            <a:r>
-              <a:rPr sz="1550" b="1">
-                <a:solidFill>
-                  <a:srgbClr val="584896"/>
-                </a:solidFill>
-                <a:latin typeface="Aptos"/>
-              </a:rPr>
-              <a:t>Secure Access</a:t>
-            </a:r>
-          </a:p>
-        </p:txBody>
-      </p:sp>
-      <p:sp>
-        <p:nvSpPr>
-          <p:cNvPr id="17" name="TextBox 16"/>
-          <p:cNvSpPr txBox="1"/>
-          <p:nvPr/>
-        </p:nvSpPr>
-        <p:spPr>
-          <a:xfrm>
-            <a:off x="804672" y="4513052"/>
-            <a:ext cx="5422392" cy="380000"/>
-          </a:xfrm>
-          <a:prstGeom prst="rect">
-            <a:avLst/>
-          </a:prstGeom>
-          <a:noFill/>
-        </p:spPr>
-        <p:txBody>
-          <a:bodyPr wrap="square" lIns="36576" rIns="36576" tIns="18288" bIns="18288" anchor="t">
-            <a:spAutoFit/>
-          </a:bodyPr>
-          <a:lstStyle/>
-          <a:p>
-            <a:pPr algn="l"/>
-            <a:r>
-              <a:rPr sz="1350" b="0">
-                <a:solidFill>
-                  <a:srgbClr val="1C2B39"/>
-                </a:solidFill>
-                <a:latin typeface="Aptos"/>
-              </a:rPr>
-              <a:t>Spring Security ensures only authorized users can access features.</a:t>
-            </a:r>
-          </a:p>
-        </p:txBody>
-      </p:sp>
-      <p:sp>
-        <p:nvSpPr>
-          <p:cNvPr id="18" name="Rounded Rectangle 17"/>
-          <p:cNvSpPr/>
-          <p:nvPr/>
-        </p:nvSpPr>
-        <p:spPr>
-          <a:xfrm>
-            <a:off x="621792" y="5265390"/>
-            <a:ext cx="5715000" cy="1050000"/>
-          </a:xfrm>
-          <a:prstGeom prst="roundRect">
-            <a:avLst/>
-          </a:prstGeom>
-          <a:solidFill>
-            <a:srgbClr val="FFFFFF"/>
-          </a:solidFill>
-          <a:ln w="11430">
-            <a:solidFill>
-              <a:srgbClr val="BED3E4"/>
-            </a:solidFill>
-          </a:ln>
-        </p:spPr>
-        <p:style>
-          <a:lnRef idx="1">
-            <a:schemeClr val="accent1"/>
-          </a:lnRef>
-          <a:fillRef idx="3">
-            <a:schemeClr val="accent1"/>
-          </a:fillRef>
-          <a:effectRef idx="2">
-            <a:schemeClr val="accent1"/>
-          </a:effectRef>
-          <a:fontRef idx="minor">
-            <a:schemeClr val="lt1"/>
-          </a:fontRef>
-        </p:style>
-        <p:txBody>
-          <a:bodyPr rtlCol="0" anchor="ctr"/>
-          <a:lstStyle/>
-          <a:p>
-            <a:pPr algn="ctr"/>
-          </a:p>
-        </p:txBody>
-      </p:sp>
-      <p:sp>
-        <p:nvSpPr>
-          <p:cNvPr id="19" name="Rectangle 18"/>
-          <p:cNvSpPr/>
-          <p:nvPr/>
-        </p:nvSpPr>
-        <p:spPr>
-          <a:xfrm>
-            <a:off x="621792" y="5265390"/>
-            <a:ext cx="64008" cy="1050000"/>
-          </a:xfrm>
-          <a:prstGeom prst="rect">
-            <a:avLst/>
-          </a:prstGeom>
-          <a:solidFill>
-            <a:srgbClr val="139197"/>
-          </a:solidFill>
-          <a:ln>
-            <a:noFill/>
-          </a:ln>
-        </p:spPr>
-        <p:style>
-          <a:lnRef idx="1">
-            <a:schemeClr val="accent1"/>
-          </a:lnRef>
-          <a:fillRef idx="3">
-            <a:schemeClr val="accent1"/>
-          </a:fillRef>
-          <a:effectRef idx="2">
-            <a:schemeClr val="accent1"/>
-          </a:effectRef>
-          <a:fontRef idx="minor">
-            <a:schemeClr val="lt1"/>
-          </a:fontRef>
-        </p:style>
-        <p:txBody>
-          <a:bodyPr rtlCol="0" anchor="ctr"/>
-          <a:lstStyle/>
-          <a:p>
-            <a:pPr algn="ctr"/>
-          </a:p>
-        </p:txBody>
-      </p:sp>
-      <p:sp>
-        <p:nvSpPr>
-          <p:cNvPr id="20" name="TextBox 19"/>
-          <p:cNvSpPr txBox="1"/>
-          <p:nvPr/>
-        </p:nvSpPr>
-        <p:spPr>
-          <a:xfrm>
-            <a:off x="804672" y="5375118"/>
-            <a:ext cx="5422392" cy="347472"/>
-          </a:xfrm>
-          <a:prstGeom prst="rect">
-            <a:avLst/>
-          </a:prstGeom>
-          <a:noFill/>
-        </p:spPr>
-        <p:txBody>
-          <a:bodyPr wrap="square" lIns="36576" rIns="36576" tIns="18288" bIns="18288" anchor="t">
-            <a:spAutoFit/>
-          </a:bodyPr>
-          <a:lstStyle/>
-          <a:p>
-            <a:pPr algn="l"/>
-            <a:r>
-              <a:rPr sz="1550" b="1">
-                <a:solidFill>
-                  <a:srgbClr val="139197"/>
-                </a:solidFill>
-                <a:latin typeface="Aptos"/>
-              </a:rPr>
-              <a:t>Data Integrity</a:t>
-            </a:r>
-          </a:p>
-        </p:txBody>
-      </p:sp>
-      <p:sp>
-        <p:nvSpPr>
-          <p:cNvPr id="21" name="TextBox 20"/>
-          <p:cNvSpPr txBox="1"/>
-          <p:nvPr/>
-        </p:nvSpPr>
-        <p:spPr>
-          <a:xfrm>
-            <a:off x="804672" y="5795742"/>
-            <a:ext cx="5422392" cy="380000"/>
-          </a:xfrm>
-          <a:prstGeom prst="rect">
-            <a:avLst/>
-          </a:prstGeom>
-          <a:noFill/>
-        </p:spPr>
-        <p:txBody>
-          <a:bodyPr wrap="square" lIns="36576" rIns="36576" tIns="18288" bIns="18288" anchor="t">
-            <a:spAutoFit/>
-          </a:bodyPr>
-          <a:lstStyle/>
-          <a:p>
-            <a:pPr algn="l"/>
-            <a:r>
-              <a:rPr sz="1350" b="0">
-                <a:solidFill>
-                  <a:srgbClr val="1C2B39"/>
-                </a:solidFill>
-                <a:latin typeface="Aptos"/>
-              </a:rPr>
-              <a:t>Data consistency maintained across all operations.</a:t>
-            </a:r>
-          </a:p>
-        </p:txBody>
-      </p:sp>
-      <p:sp>
-        <p:nvSpPr>
-          <p:cNvPr id="22" name="TextBox 21"/>
-          <p:cNvSpPr txBox="1"/>
-          <p:nvPr/>
-        </p:nvSpPr>
-        <p:spPr>
-          <a:xfrm>
-            <a:off x="384048" y="6565392"/>
-            <a:ext cx="3840480" cy="146304"/>
-          </a:xfrm>
-          <a:prstGeom prst="rect">
-            <a:avLst/>
-          </a:prstGeom>
-          <a:noFill/>
-        </p:spPr>
-        <p:txBody>
-          <a:bodyPr wrap="square" lIns="36576" rIns="36576" tIns="18288" bIns="18288" anchor="t">
-            <a:spAutoFit/>
-          </a:bodyPr>
-          <a:lstStyle/>
-          <a:p>
-            <a:pPr algn="l"/>
-            <a:r>
-              <a:rPr sz="700" b="1">
-                <a:solidFill>
-                  <a:srgbClr val="082F5D"/>
-                </a:solidFill>
-                <a:latin typeface="Aptos"/>
-              </a:rPr>
-              <a:t>FIN CORE  •  DIGITAL BANKING MANAGEMENT</a:t>
-            </a:r>
-          </a:p>
-        </p:txBody>
-      </p:sp>
-      <p:sp>
-        <p:nvSpPr>
-          <p:cNvPr id="23" name="TextBox 22"/>
-          <p:cNvSpPr txBox="1"/>
-          <p:nvPr/>
-        </p:nvSpPr>
-        <p:spPr>
-          <a:xfrm>
-            <a:off x="11384280" y="6547104"/>
-            <a:ext cx="365760" cy="164592"/>
-          </a:xfrm>
-          <a:prstGeom prst="rect">
-            <a:avLst/>
-          </a:prstGeom>
-          <a:noFill/>
-        </p:spPr>
-        <p:txBody>
-          <a:bodyPr wrap="square" lIns="36576" rIns="36576" tIns="18288" bIns="18288" anchor="t">
-            <a:spAutoFit/>
-          </a:bodyPr>
-          <a:lstStyle/>
-          <a:p>
-            <a:pPr algn="r"/>
-            <a:r>
-              <a:rPr sz="750" b="1">
-                <a:solidFill>
-                  <a:srgbClr val="082F5D"/>
-                </a:solidFill>
-                <a:latin typeface="Aptos"/>
-              </a:rPr>
-              <a:t>13</a:t>
-            </a:r>
-          </a:p>
-        </p:txBody>
-      </p:sp>
-    </p:spTree>
-  </p:cSld>
-  <p:clrMapOvr>
-    <a:masterClrMapping/>
-  </p:clrMapOvr>
-</p:sld>
-</file>
-
-<file path=ppt/slides/slide14.xml><?xml version="1.0" encoding="utf-8"?>
-<p:sld xmlns:a="http://schemas.openxmlformats.org/drawingml/2006/main" xmlns:p="http://schemas.openxmlformats.org/presentationml/2006/main" xmlns:r="http://schemas.openxmlformats.org/officeDocument/2006/relationships">
-  <p:cSld>
-    <p:spTree>
-      <p:nvGrpSpPr>
-        <p:cNvPr id="1" name=""/>
-        <p:cNvGrpSpPr/>
-        <p:nvPr/>
-      </p:nvGrpSpPr>
-      <p:grpSpPr/>
-      <p:pic>
-        <p:nvPicPr>
-          <p:cNvPr id="2" name="Picture 1" descr="Slide_14_Background.png"/>
-          <p:cNvPicPr>
-            <a:picLocks noChangeAspect="1"/>
-          </p:cNvPicPr>
-          <p:nvPr/>
-        </p:nvPicPr>
-        <p:blipFill>
-          <a:blip r:embed="rId2"/>
-          <a:stretch>
-            <a:fillRect/>
-          </a:stretch>
-        </p:blipFill>
-        <p:spPr>
-          <a:xfrm>
-            <a:off x="0" y="0"/>
-            <a:ext cx="12191999" cy="6858000"/>
-          </a:xfrm>
-          <a:prstGeom prst="rect">
-            <a:avLst/>
-          </a:prstGeom>
-        </p:spPr>
-      </p:pic>
-      <p:sp>
-        <p:nvSpPr>
-          <p:cNvPr id="3" name="Rounded Rectangle 2"/>
-          <p:cNvSpPr/>
-          <p:nvPr/>
-        </p:nvSpPr>
-        <p:spPr>
-          <a:xfrm>
-            <a:off x="347472" y="228600"/>
-            <a:ext cx="6858000" cy="960120"/>
-          </a:xfrm>
-          <a:prstGeom prst="roundRect">
-            <a:avLst/>
-          </a:prstGeom>
-          <a:solidFill>
-            <a:srgbClr val="FFFFFF"/>
-          </a:solidFill>
-          <a:ln w="11430">
-            <a:solidFill>
-              <a:srgbClr val="BED3E4"/>
-            </a:solidFill>
-          </a:ln>
-        </p:spPr>
-        <p:style>
-          <a:lnRef idx="1">
-            <a:schemeClr val="accent1"/>
-          </a:lnRef>
-          <a:fillRef idx="3">
-            <a:schemeClr val="accent1"/>
-          </a:fillRef>
-          <a:effectRef idx="2">
-            <a:schemeClr val="accent1"/>
-          </a:effectRef>
-          <a:fontRef idx="minor">
-            <a:schemeClr val="lt1"/>
-          </a:fontRef>
-        </p:style>
-        <p:txBody>
-          <a:bodyPr rtlCol="0" anchor="ctr"/>
-          <a:lstStyle/>
-          <a:p>
-            <a:pPr algn="ctr"/>
-          </a:p>
-        </p:txBody>
-      </p:sp>
-      <p:sp>
-        <p:nvSpPr>
-          <p:cNvPr id="4" name="TextBox 3"/>
-          <p:cNvSpPr txBox="1"/>
-          <p:nvPr/>
-        </p:nvSpPr>
-        <p:spPr>
-          <a:xfrm>
-            <a:off x="548640" y="338328"/>
-            <a:ext cx="6400800" cy="393192"/>
-          </a:xfrm>
-          <a:prstGeom prst="rect">
-            <a:avLst/>
-          </a:prstGeom>
-          <a:noFill/>
-        </p:spPr>
-        <p:txBody>
-          <a:bodyPr wrap="square" lIns="36576" rIns="36576" tIns="18288" bIns="18288" anchor="t">
-            <a:spAutoFit/>
-          </a:bodyPr>
-          <a:lstStyle/>
-          <a:p>
-            <a:pPr algn="l"/>
-            <a:r>
-              <a:rPr sz="2400" b="1">
-                <a:solidFill>
-                  <a:srgbClr val="082F5D"/>
-                </a:solidFill>
-                <a:latin typeface="Aptos"/>
-              </a:rPr>
-              <a:t>ROADMAP</a:t>
-            </a:r>
-          </a:p>
-        </p:txBody>
-      </p:sp>
-      <p:sp>
-        <p:nvSpPr>
-          <p:cNvPr id="5" name="TextBox 4"/>
-          <p:cNvSpPr txBox="1"/>
-          <p:nvPr/>
-        </p:nvSpPr>
-        <p:spPr>
-          <a:xfrm>
-            <a:off x="566928" y="749808"/>
-            <a:ext cx="6217920" cy="228600"/>
-          </a:xfrm>
-          <a:prstGeom prst="rect">
-            <a:avLst/>
-          </a:prstGeom>
-          <a:noFill/>
-        </p:spPr>
-        <p:txBody>
-          <a:bodyPr wrap="square" lIns="36576" rIns="36576" tIns="18288" bIns="18288" anchor="t">
-            <a:spAutoFit/>
-          </a:bodyPr>
-          <a:lstStyle/>
-          <a:p>
-            <a:pPr algn="l"/>
-            <a:r>
-              <a:rPr sz="1300" b="0">
-                <a:solidFill>
-                  <a:srgbClr val="082F5D"/>
-                </a:solidFill>
-                <a:latin typeface="Aptos"/>
-              </a:rPr>
-              <a:t>Future Enhancements</a:t>
-            </a:r>
-          </a:p>
-        </p:txBody>
-      </p:sp>
-      <p:sp>
-        <p:nvSpPr>
-          <p:cNvPr id="6" name="Rounded Rectangle 5"/>
-          <p:cNvSpPr/>
-          <p:nvPr/>
-        </p:nvSpPr>
-        <p:spPr>
-          <a:xfrm>
-            <a:off x="658368" y="1389888"/>
-            <a:ext cx="5852160" cy="1050000"/>
-          </a:xfrm>
-          <a:prstGeom prst="roundRect">
-            <a:avLst/>
-          </a:prstGeom>
-          <a:solidFill>
-            <a:srgbClr val="FFFFFF"/>
-          </a:solidFill>
-          <a:ln w="11430">
-            <a:solidFill>
-              <a:srgbClr val="BED3E4"/>
-            </a:solidFill>
-          </a:ln>
-        </p:spPr>
-        <p:style>
-          <a:lnRef idx="1">
-            <a:schemeClr val="accent1"/>
-          </a:lnRef>
-          <a:fillRef idx="3">
-            <a:schemeClr val="accent1"/>
-          </a:fillRef>
-          <a:effectRef idx="2">
-            <a:schemeClr val="accent1"/>
-          </a:effectRef>
-          <a:fontRef idx="minor">
-            <a:schemeClr val="lt1"/>
-          </a:fontRef>
-        </p:style>
-        <p:txBody>
-          <a:bodyPr rtlCol="0" anchor="ctr"/>
-          <a:lstStyle/>
-          <a:p>
-            <a:pPr algn="ctr"/>
-          </a:p>
-        </p:txBody>
-      </p:sp>
-      <p:sp>
-        <p:nvSpPr>
-          <p:cNvPr id="7" name="Rectangle 6"/>
-          <p:cNvSpPr/>
-          <p:nvPr/>
-        </p:nvSpPr>
-        <p:spPr>
-          <a:xfrm>
-            <a:off x="658368" y="1389888"/>
-            <a:ext cx="64008" cy="1050000"/>
-          </a:xfrm>
-          <a:prstGeom prst="rect">
-            <a:avLst/>
-          </a:prstGeom>
-          <a:solidFill>
-            <a:srgbClr val="1569B4"/>
-          </a:solidFill>
-          <a:ln>
-            <a:noFill/>
-          </a:ln>
-        </p:spPr>
-        <p:style>
-          <a:lnRef idx="1">
-            <a:schemeClr val="accent1"/>
-          </a:lnRef>
-          <a:fillRef idx="3">
-            <a:schemeClr val="accent1"/>
-          </a:fillRef>
-          <a:effectRef idx="2">
-            <a:schemeClr val="accent1"/>
-          </a:effectRef>
-          <a:fontRef idx="minor">
-            <a:schemeClr val="lt1"/>
-          </a:fontRef>
-        </p:style>
-        <p:txBody>
-          <a:bodyPr rtlCol="0" anchor="ctr"/>
-          <a:lstStyle/>
-          <a:p>
-            <a:pPr algn="ctr"/>
-          </a:p>
-        </p:txBody>
-      </p:sp>
-      <p:sp>
-        <p:nvSpPr>
-          <p:cNvPr id="8" name="TextBox 7"/>
-          <p:cNvSpPr txBox="1"/>
-          <p:nvPr/>
-        </p:nvSpPr>
-        <p:spPr>
-          <a:xfrm>
-            <a:off x="841247" y="1499616"/>
-            <a:ext cx="5559552" cy="347472"/>
-          </a:xfrm>
-          <a:prstGeom prst="rect">
-            <a:avLst/>
-          </a:prstGeom>
-          <a:noFill/>
-        </p:spPr>
-        <p:txBody>
-          <a:bodyPr wrap="square" lIns="36576" rIns="36576" tIns="18288" bIns="18288" anchor="t">
-            <a:spAutoFit/>
-          </a:bodyPr>
-          <a:lstStyle/>
-          <a:p>
-            <a:pPr algn="l"/>
-            <a:r>
-              <a:rPr sz="1550" b="1">
-                <a:solidFill>
-                  <a:srgbClr val="1569B4"/>
-                </a:solidFill>
-                <a:latin typeface="Aptos"/>
-              </a:rPr>
-              <a:t>Mobile Application</a:t>
-            </a:r>
-          </a:p>
-        </p:txBody>
-      </p:sp>
-      <p:sp>
-        <p:nvSpPr>
-          <p:cNvPr id="9" name="TextBox 8"/>
-          <p:cNvSpPr txBox="1"/>
-          <p:nvPr/>
-        </p:nvSpPr>
-        <p:spPr>
-          <a:xfrm>
-            <a:off x="841247" y="1920240"/>
-            <a:ext cx="5559552" cy="380000"/>
-          </a:xfrm>
-          <a:prstGeom prst="rect">
-            <a:avLst/>
-          </a:prstGeom>
-          <a:noFill/>
-        </p:spPr>
-        <p:txBody>
-          <a:bodyPr wrap="square" lIns="36576" rIns="36576" tIns="18288" bIns="18288" anchor="t">
-            <a:spAutoFit/>
-          </a:bodyPr>
-          <a:lstStyle/>
-          <a:p>
-            <a:pPr algn="l"/>
-            <a:r>
-              <a:rPr sz="1350" b="0">
-                <a:solidFill>
-                  <a:srgbClr val="1C2B39"/>
-                </a:solidFill>
-                <a:latin typeface="Aptos"/>
-              </a:rPr>
-              <a:t>Native mobile app for Android and iOS.</a:t>
-            </a:r>
-          </a:p>
-        </p:txBody>
-      </p:sp>
-      <p:sp>
-        <p:nvSpPr>
-          <p:cNvPr id="10" name="Rounded Rectangle 9"/>
-          <p:cNvSpPr/>
-          <p:nvPr/>
-        </p:nvSpPr>
-        <p:spPr>
-          <a:xfrm>
-            <a:off x="658368" y="2681723"/>
-            <a:ext cx="5852160" cy="1050000"/>
-          </a:xfrm>
-          <a:prstGeom prst="roundRect">
-            <a:avLst/>
-          </a:prstGeom>
-          <a:solidFill>
-            <a:srgbClr val="FFFFFF"/>
-          </a:solidFill>
-          <a:ln w="11430">
-            <a:solidFill>
-              <a:srgbClr val="BED3E4"/>
-            </a:solidFill>
-          </a:ln>
-        </p:spPr>
-        <p:style>
-          <a:lnRef idx="1">
-            <a:schemeClr val="accent1"/>
-          </a:lnRef>
-          <a:fillRef idx="3">
-            <a:schemeClr val="accent1"/>
-          </a:fillRef>
-          <a:effectRef idx="2">
-            <a:schemeClr val="accent1"/>
-          </a:effectRef>
-          <a:fontRef idx="minor">
-            <a:schemeClr val="lt1"/>
-          </a:fontRef>
-        </p:style>
-        <p:txBody>
-          <a:bodyPr rtlCol="0" anchor="ctr"/>
-          <a:lstStyle/>
-          <a:p>
-            <a:pPr algn="ctr"/>
-          </a:p>
-        </p:txBody>
-      </p:sp>
-      <p:sp>
-        <p:nvSpPr>
-          <p:cNvPr id="11" name="Rectangle 10"/>
-          <p:cNvSpPr/>
-          <p:nvPr/>
-        </p:nvSpPr>
-        <p:spPr>
-          <a:xfrm>
-            <a:off x="658368" y="2681723"/>
-            <a:ext cx="64008" cy="1050000"/>
-          </a:xfrm>
-          <a:prstGeom prst="rect">
-            <a:avLst/>
-          </a:prstGeom>
-          <a:solidFill>
-            <a:srgbClr val="139197"/>
-          </a:solidFill>
-          <a:ln>
-            <a:noFill/>
-          </a:ln>
-        </p:spPr>
-        <p:style>
-          <a:lnRef idx="1">
-            <a:schemeClr val="accent1"/>
-          </a:lnRef>
-          <a:fillRef idx="3">
-            <a:schemeClr val="accent1"/>
-          </a:fillRef>
-          <a:effectRef idx="2">
-            <a:schemeClr val="accent1"/>
-          </a:effectRef>
-          <a:fontRef idx="minor">
-            <a:schemeClr val="lt1"/>
-          </a:fontRef>
-        </p:style>
-        <p:txBody>
-          <a:bodyPr rtlCol="0" anchor="ctr"/>
-          <a:lstStyle/>
-          <a:p>
-            <a:pPr algn="ctr"/>
-          </a:p>
-        </p:txBody>
-      </p:sp>
-      <p:sp>
-        <p:nvSpPr>
-          <p:cNvPr id="12" name="TextBox 11"/>
-          <p:cNvSpPr txBox="1"/>
-          <p:nvPr/>
-        </p:nvSpPr>
-        <p:spPr>
-          <a:xfrm>
-            <a:off x="841247" y="2791451"/>
-            <a:ext cx="5559552" cy="347472"/>
-          </a:xfrm>
-          <a:prstGeom prst="rect">
-            <a:avLst/>
-          </a:prstGeom>
-          <a:noFill/>
-        </p:spPr>
-        <p:txBody>
-          <a:bodyPr wrap="square" lIns="36576" rIns="36576" tIns="18288" bIns="18288" anchor="t">
-            <a:spAutoFit/>
-          </a:bodyPr>
-          <a:lstStyle/>
-          <a:p>
-            <a:pPr algn="l"/>
-            <a:r>
-              <a:rPr sz="1550" b="1">
-                <a:solidFill>
-                  <a:srgbClr val="139197"/>
-                </a:solidFill>
-                <a:latin typeface="Aptos"/>
-              </a:rPr>
-              <a:t>UPI &amp; Payment Gateway</a:t>
-            </a:r>
-          </a:p>
-        </p:txBody>
-      </p:sp>
-      <p:sp>
-        <p:nvSpPr>
-          <p:cNvPr id="13" name="TextBox 12"/>
-          <p:cNvSpPr txBox="1"/>
-          <p:nvPr/>
-        </p:nvSpPr>
-        <p:spPr>
-          <a:xfrm>
-            <a:off x="841247" y="3212075"/>
-            <a:ext cx="5559552" cy="380000"/>
-          </a:xfrm>
-          <a:prstGeom prst="rect">
-            <a:avLst/>
-          </a:prstGeom>
-          <a:noFill/>
-        </p:spPr>
-        <p:txBody>
-          <a:bodyPr wrap="square" lIns="36576" rIns="36576" tIns="18288" bIns="18288" anchor="t">
-            <a:spAutoFit/>
-          </a:bodyPr>
-          <a:lstStyle/>
-          <a:p>
-            <a:pPr algn="l"/>
-            <a:r>
-              <a:rPr sz="1350" b="0">
-                <a:solidFill>
-                  <a:srgbClr val="1C2B39"/>
-                </a:solidFill>
-                <a:latin typeface="Aptos"/>
-              </a:rPr>
-              <a:t>Integrate UPI and payment gateway services.</a:t>
-            </a:r>
-          </a:p>
-        </p:txBody>
-      </p:sp>
-      <p:sp>
-        <p:nvSpPr>
-          <p:cNvPr id="14" name="Rounded Rectangle 13"/>
-          <p:cNvSpPr/>
-          <p:nvPr/>
-        </p:nvSpPr>
-        <p:spPr>
-          <a:xfrm>
-            <a:off x="658368" y="3973558"/>
-            <a:ext cx="5852160" cy="1050000"/>
-          </a:xfrm>
-          <a:prstGeom prst="roundRect">
-            <a:avLst/>
-          </a:prstGeom>
-          <a:solidFill>
-            <a:srgbClr val="FFFFFF"/>
-          </a:solidFill>
-          <a:ln w="11430">
-            <a:solidFill>
-              <a:srgbClr val="BED3E4"/>
-            </a:solidFill>
-          </a:ln>
-        </p:spPr>
-        <p:style>
-          <a:lnRef idx="1">
-            <a:schemeClr val="accent1"/>
-          </a:lnRef>
-          <a:fillRef idx="3">
-            <a:schemeClr val="accent1"/>
-          </a:fillRef>
-          <a:effectRef idx="2">
-            <a:schemeClr val="accent1"/>
-          </a:effectRef>
-          <a:fontRef idx="minor">
-            <a:schemeClr val="lt1"/>
-          </a:fontRef>
-        </p:style>
-        <p:txBody>
-          <a:bodyPr rtlCol="0" anchor="ctr"/>
-          <a:lstStyle/>
-          <a:p>
-            <a:pPr algn="ctr"/>
-          </a:p>
-        </p:txBody>
-      </p:sp>
-      <p:sp>
-        <p:nvSpPr>
-          <p:cNvPr id="15" name="Rectangle 14"/>
-          <p:cNvSpPr/>
-          <p:nvPr/>
-        </p:nvSpPr>
-        <p:spPr>
-          <a:xfrm>
-            <a:off x="658368" y="3973558"/>
-            <a:ext cx="64008" cy="1050000"/>
-          </a:xfrm>
-          <a:prstGeom prst="rect">
-            <a:avLst/>
-          </a:prstGeom>
-          <a:solidFill>
-            <a:srgbClr val="489757"/>
-          </a:solidFill>
-          <a:ln>
-            <a:noFill/>
-          </a:ln>
-        </p:spPr>
-        <p:style>
-          <a:lnRef idx="1">
-            <a:schemeClr val="accent1"/>
-          </a:lnRef>
-          <a:fillRef idx="3">
-            <a:schemeClr val="accent1"/>
-          </a:fillRef>
-          <a:effectRef idx="2">
-            <a:schemeClr val="accent1"/>
-          </a:effectRef>
-          <a:fontRef idx="minor">
-            <a:schemeClr val="lt1"/>
-          </a:fontRef>
-        </p:style>
-        <p:txBody>
-          <a:bodyPr rtlCol="0" anchor="ctr"/>
-          <a:lstStyle/>
-          <a:p>
-            <a:pPr algn="ctr"/>
-          </a:p>
-        </p:txBody>
-      </p:sp>
-      <p:sp>
-        <p:nvSpPr>
-          <p:cNvPr id="16" name="TextBox 15"/>
-          <p:cNvSpPr txBox="1"/>
-          <p:nvPr/>
-        </p:nvSpPr>
-        <p:spPr>
-          <a:xfrm>
-            <a:off x="841247" y="4083286"/>
-            <a:ext cx="5559552" cy="347472"/>
-          </a:xfrm>
-          <a:prstGeom prst="rect">
-            <a:avLst/>
-          </a:prstGeom>
-          <a:noFill/>
-        </p:spPr>
-        <p:txBody>
-          <a:bodyPr wrap="square" lIns="36576" rIns="36576" tIns="18288" bIns="18288" anchor="t">
-            <a:spAutoFit/>
-          </a:bodyPr>
-          <a:lstStyle/>
-          <a:p>
-            <a:pPr algn="l"/>
-            <a:r>
-              <a:rPr sz="1550" b="1">
-                <a:solidFill>
-                  <a:srgbClr val="489757"/>
-                </a:solidFill>
-                <a:latin typeface="Aptos"/>
-              </a:rPr>
-              <a:t>Advanced Analytics</a:t>
-            </a:r>
-          </a:p>
-        </p:txBody>
-      </p:sp>
-      <p:sp>
-        <p:nvSpPr>
-          <p:cNvPr id="17" name="TextBox 16"/>
-          <p:cNvSpPr txBox="1"/>
-          <p:nvPr/>
-        </p:nvSpPr>
-        <p:spPr>
-          <a:xfrm>
-            <a:off x="841247" y="4503910"/>
-            <a:ext cx="5559552" cy="380000"/>
-          </a:xfrm>
-          <a:prstGeom prst="rect">
-            <a:avLst/>
-          </a:prstGeom>
-          <a:noFill/>
-        </p:spPr>
-        <p:txBody>
-          <a:bodyPr wrap="square" lIns="36576" rIns="36576" tIns="18288" bIns="18288" anchor="t">
-            <a:spAutoFit/>
-          </a:bodyPr>
-          <a:lstStyle/>
-          <a:p>
-            <a:pPr algn="l"/>
-            <a:r>
-              <a:rPr sz="1350" b="0">
-                <a:solidFill>
-                  <a:srgbClr val="1C2B39"/>
-                </a:solidFill>
-                <a:latin typeface="Aptos"/>
-              </a:rPr>
-              <a:t>Reports and dashboards for better insights.</a:t>
-            </a:r>
-          </a:p>
-        </p:txBody>
-      </p:sp>
-      <p:sp>
-        <p:nvSpPr>
-          <p:cNvPr id="18" name="Rounded Rectangle 17"/>
-          <p:cNvSpPr/>
-          <p:nvPr/>
-        </p:nvSpPr>
-        <p:spPr>
-          <a:xfrm>
-            <a:off x="658368" y="5265393"/>
-            <a:ext cx="5852160" cy="1050000"/>
-          </a:xfrm>
-          <a:prstGeom prst="roundRect">
-            <a:avLst/>
-          </a:prstGeom>
-          <a:solidFill>
-            <a:srgbClr val="FFFFFF"/>
-          </a:solidFill>
-          <a:ln w="11430">
-            <a:solidFill>
-              <a:srgbClr val="BED3E4"/>
-            </a:solidFill>
-          </a:ln>
-        </p:spPr>
-        <p:style>
-          <a:lnRef idx="1">
-            <a:schemeClr val="accent1"/>
-          </a:lnRef>
-          <a:fillRef idx="3">
-            <a:schemeClr val="accent1"/>
-          </a:fillRef>
-          <a:effectRef idx="2">
-            <a:schemeClr val="accent1"/>
-          </a:effectRef>
-          <a:fontRef idx="minor">
-            <a:schemeClr val="lt1"/>
-          </a:fontRef>
-        </p:style>
-        <p:txBody>
-          <a:bodyPr rtlCol="0" anchor="ctr"/>
-          <a:lstStyle/>
-          <a:p>
-            <a:pPr algn="ctr"/>
-          </a:p>
-        </p:txBody>
-      </p:sp>
-      <p:sp>
-        <p:nvSpPr>
-          <p:cNvPr id="19" name="Rectangle 18"/>
-          <p:cNvSpPr/>
-          <p:nvPr/>
-        </p:nvSpPr>
-        <p:spPr>
-          <a:xfrm>
-            <a:off x="658368" y="5265393"/>
-            <a:ext cx="64008" cy="1050000"/>
-          </a:xfrm>
-          <a:prstGeom prst="rect">
-            <a:avLst/>
-          </a:prstGeom>
-          <a:solidFill>
-            <a:srgbClr val="584896"/>
-          </a:solidFill>
-          <a:ln>
-            <a:noFill/>
-          </a:ln>
-        </p:spPr>
-        <p:style>
-          <a:lnRef idx="1">
-            <a:schemeClr val="accent1"/>
-          </a:lnRef>
-          <a:fillRef idx="3">
-            <a:schemeClr val="accent1"/>
-          </a:fillRef>
-          <a:effectRef idx="2">
-            <a:schemeClr val="accent1"/>
-          </a:effectRef>
-          <a:fontRef idx="minor">
-            <a:schemeClr val="lt1"/>
-          </a:fontRef>
-        </p:style>
-        <p:txBody>
-          <a:bodyPr rtlCol="0" anchor="ctr"/>
-          <a:lstStyle/>
-          <a:p>
-            <a:pPr algn="ctr"/>
-          </a:p>
-        </p:txBody>
-      </p:sp>
-      <p:sp>
-        <p:nvSpPr>
-          <p:cNvPr id="20" name="TextBox 19"/>
-          <p:cNvSpPr txBox="1"/>
-          <p:nvPr/>
-        </p:nvSpPr>
-        <p:spPr>
-          <a:xfrm>
-            <a:off x="841247" y="5375121"/>
-            <a:ext cx="5559552" cy="347472"/>
-          </a:xfrm>
-          <a:prstGeom prst="rect">
-            <a:avLst/>
-          </a:prstGeom>
-          <a:noFill/>
-        </p:spPr>
-        <p:txBody>
-          <a:bodyPr wrap="square" lIns="36576" rIns="36576" tIns="18288" bIns="18288" anchor="t">
-            <a:spAutoFit/>
-          </a:bodyPr>
-          <a:lstStyle/>
-          <a:p>
-            <a:pPr algn="l"/>
-            <a:r>
-              <a:rPr sz="1550" b="1">
-                <a:solidFill>
-                  <a:srgbClr val="584896"/>
-                </a:solidFill>
-                <a:latin typeface="Aptos"/>
-              </a:rPr>
-              <a:t>AI/ML Based Risk Assessment</a:t>
-            </a:r>
-          </a:p>
-        </p:txBody>
-      </p:sp>
-      <p:sp>
-        <p:nvSpPr>
-          <p:cNvPr id="21" name="TextBox 20"/>
-          <p:cNvSpPr txBox="1"/>
-          <p:nvPr/>
-        </p:nvSpPr>
-        <p:spPr>
-          <a:xfrm>
-            <a:off x="841247" y="5795745"/>
-            <a:ext cx="5559552" cy="380000"/>
-          </a:xfrm>
-          <a:prstGeom prst="rect">
-            <a:avLst/>
-          </a:prstGeom>
-          <a:noFill/>
-        </p:spPr>
-        <p:txBody>
-          <a:bodyPr wrap="square" lIns="36576" rIns="36576" tIns="18288" bIns="18288" anchor="t">
-            <a:spAutoFit/>
-          </a:bodyPr>
-          <a:lstStyle/>
-          <a:p>
-            <a:pPr algn="l"/>
-            <a:r>
-              <a:rPr sz="1350" b="0">
-                <a:solidFill>
-                  <a:srgbClr val="1C2B39"/>
-                </a:solidFill>
-                <a:latin typeface="Aptos"/>
-              </a:rPr>
-              <a:t>Intelligent loan approval and fraud detection.</a:t>
-            </a:r>
-          </a:p>
-        </p:txBody>
-      </p:sp>
-      <p:sp>
-        <p:nvSpPr>
-          <p:cNvPr id="22" name="TextBox 21"/>
-          <p:cNvSpPr txBox="1"/>
-          <p:nvPr/>
-        </p:nvSpPr>
-        <p:spPr>
-          <a:xfrm>
-            <a:off x="384048" y="6565392"/>
-            <a:ext cx="3840480" cy="146304"/>
-          </a:xfrm>
-          <a:prstGeom prst="rect">
-            <a:avLst/>
-          </a:prstGeom>
-          <a:noFill/>
-        </p:spPr>
-        <p:txBody>
-          <a:bodyPr wrap="square" lIns="36576" rIns="36576" tIns="18288" bIns="18288" anchor="t">
-            <a:spAutoFit/>
-          </a:bodyPr>
-          <a:lstStyle/>
-          <a:p>
-            <a:pPr algn="l"/>
-            <a:r>
-              <a:rPr sz="700" b="1">
-                <a:solidFill>
-                  <a:srgbClr val="082F5D"/>
-                </a:solidFill>
-                <a:latin typeface="Aptos"/>
-              </a:rPr>
-              <a:t>FIN CORE  •  DIGITAL BANKING MANAGEMENT</a:t>
-            </a:r>
-          </a:p>
-        </p:txBody>
-      </p:sp>
-      <p:sp>
-        <p:nvSpPr>
-          <p:cNvPr id="23" name="TextBox 22"/>
-          <p:cNvSpPr txBox="1"/>
-          <p:nvPr/>
-        </p:nvSpPr>
-        <p:spPr>
-          <a:xfrm>
-            <a:off x="11384280" y="6547104"/>
-            <a:ext cx="365760" cy="164592"/>
-          </a:xfrm>
-          <a:prstGeom prst="rect">
-            <a:avLst/>
-          </a:prstGeom>
-          <a:noFill/>
-        </p:spPr>
-        <p:txBody>
-          <a:bodyPr wrap="square" lIns="36576" rIns="36576" tIns="18288" bIns="18288" anchor="t">
-            <a:spAutoFit/>
-          </a:bodyPr>
-          <a:lstStyle/>
-          <a:p>
-            <a:pPr algn="r"/>
-            <a:r>
-              <a:rPr sz="750" b="1">
-                <a:solidFill>
-                  <a:srgbClr val="082F5D"/>
-                </a:solidFill>
-                <a:latin typeface="Aptos"/>
-              </a:rPr>
-              <a:t>14</a:t>
-            </a:r>
-          </a:p>
-        </p:txBody>
-      </p:sp>
-    </p:spTree>
-  </p:cSld>
-  <p:clrMapOvr>
-    <a:masterClrMapping/>
-  </p:clrMapOvr>
-</p:sld>
-</file>
-
-<file path=ppt/slides/slide15.xml><?xml version="1.0" encoding="utf-8"?>
-<p:sld xmlns:a="http://schemas.openxmlformats.org/drawingml/2006/main" xmlns:p="http://schemas.openxmlformats.org/presentationml/2006/main" xmlns:r="http://schemas.openxmlformats.org/officeDocument/2006/relationships">
-  <p:cSld>
-    <p:spTree>
-      <p:nvGrpSpPr>
-        <p:cNvPr id="1" name=""/>
-        <p:cNvGrpSpPr/>
-        <p:nvPr/>
-      </p:nvGrpSpPr>
-      <p:grpSpPr/>
-      <p:pic>
-        <p:nvPicPr>
-          <p:cNvPr id="2" name="Picture 1" descr="pic2_slide15_crop.png"/>
-          <p:cNvPicPr>
-            <a:picLocks noChangeAspect="1"/>
-          </p:cNvPicPr>
-          <p:nvPr/>
-        </p:nvPicPr>
-        <p:blipFill>
-          <a:blip r:embed="rId3"/>
-          <a:stretch>
-            <a:fillRect/>
-          </a:stretch>
-        </p:blipFill>
-        <p:spPr>
-          <a:xfrm>
-            <a:off x="0" y="0"/>
-            <a:ext cx="12191999" cy="6858000"/>
-          </a:xfrm>
-          <a:prstGeom prst="rect">
-            <a:avLst/>
-          </a:prstGeom>
-        </p:spPr>
-      </p:pic>
-    </p:spTree>
-  </p:cSld>
-  <p:clrMapOvr>
-    <a:masterClrMapping/>
-  </p:clrMapOvr>
-</p:sld>
-</file>
-
-<file path=ppt/slides/slide16.xml><?xml version="1.0" encoding="utf-8"?>
-<p:sld xmlns:a="http://schemas.openxmlformats.org/drawingml/2006/main" xmlns:p="http://schemas.openxmlformats.org/presentationml/2006/main" xmlns:r="http://schemas.openxmlformats.org/officeDocument/2006/relationships">
-  <p:cSld>
-    <p:spTree>
-      <p:nvGrpSpPr>
-        <p:cNvPr id="1" name=""/>
-        <p:cNvGrpSpPr/>
-        <p:nvPr/>
-      </p:nvGrpSpPr>
-      <p:grpSpPr/>
-      <p:pic>
-        <p:nvPicPr>
-          <p:cNvPr id="2" name="Picture 1" descr="Slide_16_Background.png"/>
-          <p:cNvPicPr>
-            <a:picLocks noChangeAspect="1"/>
-          </p:cNvPicPr>
-          <p:nvPr/>
-        </p:nvPicPr>
-        <p:blipFill>
-          <a:blip r:embed="rId2"/>
-          <a:stretch>
-            <a:fillRect/>
-          </a:stretch>
-        </p:blipFill>
-        <p:spPr>
-          <a:xfrm>
-            <a:off x="0" y="0"/>
-            <a:ext cx="12191999" cy="6858000"/>
-          </a:xfrm>
-          <a:prstGeom prst="rect">
-            <a:avLst/>
-          </a:prstGeom>
-        </p:spPr>
-      </p:pic>
-      <p:sp>
-        <p:nvSpPr>
-          <p:cNvPr id="3" name="Rounded Rectangle 2"/>
-          <p:cNvSpPr/>
-          <p:nvPr/>
-        </p:nvSpPr>
-        <p:spPr>
-          <a:xfrm>
-            <a:off x="347472" y="228600"/>
-            <a:ext cx="6858000" cy="960120"/>
-          </a:xfrm>
-          <a:prstGeom prst="roundRect">
-            <a:avLst/>
-          </a:prstGeom>
-          <a:solidFill>
-            <a:srgbClr val="FFFFFF"/>
-          </a:solidFill>
-          <a:ln w="11430">
-            <a:solidFill>
-              <a:srgbClr val="BED3E4"/>
-            </a:solidFill>
-          </a:ln>
-        </p:spPr>
-        <p:style>
-          <a:lnRef idx="1">
-            <a:schemeClr val="accent1"/>
-          </a:lnRef>
-          <a:fillRef idx="3">
-            <a:schemeClr val="accent1"/>
-          </a:fillRef>
-          <a:effectRef idx="2">
-            <a:schemeClr val="accent1"/>
-          </a:effectRef>
-          <a:fontRef idx="minor">
-            <a:schemeClr val="lt1"/>
-          </a:fontRef>
-        </p:style>
-        <p:txBody>
-          <a:bodyPr rtlCol="0" anchor="ctr"/>
-          <a:lstStyle/>
-          <a:p>
-            <a:pPr algn="ctr"/>
-          </a:p>
-        </p:txBody>
-      </p:sp>
-      <p:sp>
-        <p:nvSpPr>
-          <p:cNvPr id="4" name="TextBox 3"/>
-          <p:cNvSpPr txBox="1"/>
-          <p:nvPr/>
-        </p:nvSpPr>
-        <p:spPr>
-          <a:xfrm>
-            <a:off x="548640" y="338328"/>
-            <a:ext cx="6400800" cy="393192"/>
-          </a:xfrm>
-          <a:prstGeom prst="rect">
-            <a:avLst/>
-          </a:prstGeom>
-          <a:noFill/>
-        </p:spPr>
-        <p:txBody>
-          <a:bodyPr wrap="square" lIns="36576" rIns="36576" tIns="18288" bIns="18288" anchor="t">
-            <a:spAutoFit/>
-          </a:bodyPr>
-          <a:lstStyle/>
-          <a:p>
-            <a:pPr algn="l"/>
-            <a:r>
-              <a:rPr sz="2400" b="1">
-                <a:solidFill>
-                  <a:srgbClr val="082F5D"/>
-                </a:solidFill>
-                <a:latin typeface="Aptos"/>
-              </a:rPr>
-              <a:t>CONCLUSION</a:t>
-            </a:r>
-          </a:p>
-        </p:txBody>
-      </p:sp>
-      <p:sp>
-        <p:nvSpPr>
-          <p:cNvPr id="5" name="TextBox 4"/>
-          <p:cNvSpPr txBox="1"/>
-          <p:nvPr/>
-        </p:nvSpPr>
-        <p:spPr>
-          <a:xfrm>
-            <a:off x="566928" y="749808"/>
-            <a:ext cx="6217920" cy="228600"/>
-          </a:xfrm>
-          <a:prstGeom prst="rect">
-            <a:avLst/>
-          </a:prstGeom>
-          <a:noFill/>
-        </p:spPr>
-        <p:txBody>
-          <a:bodyPr wrap="square" lIns="36576" rIns="36576" tIns="18288" bIns="18288" anchor="t">
-            <a:spAutoFit/>
-          </a:bodyPr>
-          <a:lstStyle/>
-          <a:p>
-            <a:pPr algn="l"/>
-            <a:r>
-              <a:rPr sz="1300" b="0">
-                <a:solidFill>
-                  <a:srgbClr val="082F5D"/>
-                </a:solidFill>
-                <a:latin typeface="Aptos"/>
-              </a:rPr>
-              <a:t>Building the Future of Banking</a:t>
-            </a:r>
-          </a:p>
-        </p:txBody>
-      </p:sp>
-      <p:sp>
-        <p:nvSpPr>
-          <p:cNvPr id="6" name="Rounded Rectangle 5"/>
-          <p:cNvSpPr/>
-          <p:nvPr/>
-        </p:nvSpPr>
-        <p:spPr>
-          <a:xfrm>
-            <a:off x="566928" y="1444752"/>
-            <a:ext cx="5715000" cy="3300000"/>
-          </a:xfrm>
-          <a:prstGeom prst="roundRect">
-            <a:avLst/>
-          </a:prstGeom>
-          <a:solidFill>
-            <a:srgbClr val="FFFFFF"/>
-          </a:solidFill>
-          <a:ln w="11430">
-            <a:solidFill>
-              <a:srgbClr val="BED3E4"/>
-            </a:solidFill>
-          </a:ln>
-        </p:spPr>
-        <p:style>
-          <a:lnRef idx="1">
-            <a:schemeClr val="accent1"/>
-          </a:lnRef>
-          <a:fillRef idx="3">
-            <a:schemeClr val="accent1"/>
-          </a:fillRef>
-          <a:effectRef idx="2">
-            <a:schemeClr val="accent1"/>
-          </a:effectRef>
-          <a:fontRef idx="minor">
-            <a:schemeClr val="lt1"/>
-          </a:fontRef>
-        </p:style>
-        <p:txBody>
-          <a:bodyPr rtlCol="0" anchor="ctr"/>
-          <a:lstStyle/>
-          <a:p>
-            <a:pPr algn="ctr"/>
-          </a:p>
-        </p:txBody>
-      </p:sp>
-      <p:sp>
-        <p:nvSpPr>
-          <p:cNvPr id="7" name="TextBox 6"/>
-          <p:cNvSpPr txBox="1"/>
-          <p:nvPr/>
-        </p:nvSpPr>
-        <p:spPr>
-          <a:xfrm>
-            <a:off x="804672" y="1719072"/>
-            <a:ext cx="5257800" cy="960120"/>
-          </a:xfrm>
-          <a:prstGeom prst="rect">
-            <a:avLst/>
-          </a:prstGeom>
-          <a:noFill/>
-        </p:spPr>
-        <p:txBody>
-          <a:bodyPr wrap="square" lIns="36576" rIns="36576" tIns="18288" bIns="18288" anchor="t">
-            <a:spAutoFit/>
-          </a:bodyPr>
-          <a:lstStyle/>
-          <a:p>
-            <a:pPr algn="l"/>
-            <a:r>
-              <a:rPr sz="1400" b="0">
-                <a:solidFill>
-                  <a:srgbClr val="1C2B39"/>
-                </a:solidFill>
-                <a:latin typeface="Aptos"/>
-              </a:rPr>
-              <a:t>Fin Core demonstrates a complete digital banking solution that streamlines onboarding,
-transactions and loan management with security, validation and role-based access.</a:t>
-            </a:r>
-          </a:p>
-        </p:txBody>
-      </p:sp>
-      <p:sp>
-        <p:nvSpPr>
-          <p:cNvPr id="8" name="TextBox 7"/>
-          <p:cNvSpPr txBox="1"/>
-          <p:nvPr/>
-        </p:nvSpPr>
-        <p:spPr>
-          <a:xfrm>
-            <a:off x="804672" y="3035808"/>
-            <a:ext cx="5074920" cy="347472"/>
-          </a:xfrm>
-          <a:prstGeom prst="rect">
-            <a:avLst/>
-          </a:prstGeom>
-          <a:noFill/>
-        </p:spPr>
-        <p:txBody>
-          <a:bodyPr wrap="square" lIns="36576" rIns="36576" tIns="18288" bIns="18288" anchor="t">
-            <a:spAutoFit/>
-          </a:bodyPr>
-          <a:lstStyle/>
-          <a:p>
-            <a:pPr algn="l"/>
-            <a:r>
-              <a:rPr sz="1500" b="1">
-                <a:solidFill>
-                  <a:srgbClr val="139197"/>
-                </a:solidFill>
-                <a:latin typeface="Aptos"/>
-              </a:rPr>
-              <a:t>Smart Banking for a Better Tomorrow</a:t>
-            </a:r>
-          </a:p>
-        </p:txBody>
-      </p:sp>
-      <p:sp>
-        <p:nvSpPr>
-          <p:cNvPr id="9" name="TextBox 8"/>
-          <p:cNvSpPr txBox="1"/>
-          <p:nvPr/>
-        </p:nvSpPr>
-        <p:spPr>
-          <a:xfrm>
-            <a:off x="804672" y="3703320"/>
-            <a:ext cx="5074920" cy="457200"/>
-          </a:xfrm>
-          <a:prstGeom prst="rect">
-            <a:avLst/>
-          </a:prstGeom>
-          <a:noFill/>
-        </p:spPr>
-        <p:txBody>
-          <a:bodyPr wrap="square" lIns="36576" rIns="36576" tIns="18288" bIns="18288" anchor="t">
-            <a:spAutoFit/>
-          </a:bodyPr>
-          <a:lstStyle/>
-          <a:p>
-            <a:pPr algn="l"/>
-            <a:r>
-              <a:rPr sz="2500" b="1">
-                <a:solidFill>
-                  <a:srgbClr val="082F5D"/>
-                </a:solidFill>
-                <a:latin typeface="Aptos"/>
-              </a:rPr>
-              <a:t>Thank You!</a:t>
-            </a:r>
-          </a:p>
-        </p:txBody>
-      </p:sp>
-      <p:sp>
-        <p:nvSpPr>
-          <p:cNvPr id="10" name="TextBox 9"/>
-          <p:cNvSpPr txBox="1"/>
-          <p:nvPr/>
-        </p:nvSpPr>
-        <p:spPr>
-          <a:xfrm>
-            <a:off x="804672" y="4315968"/>
-            <a:ext cx="5074920" cy="292608"/>
-          </a:xfrm>
-          <a:prstGeom prst="rect">
-            <a:avLst/>
-          </a:prstGeom>
-          <a:noFill/>
-        </p:spPr>
-        <p:txBody>
-          <a:bodyPr wrap="square" lIns="36576" rIns="36576" tIns="18288" bIns="18288" anchor="t">
-            <a:spAutoFit/>
-          </a:bodyPr>
-          <a:lstStyle/>
-          <a:p>
-            <a:pPr algn="l"/>
-            <a:r>
-              <a:rPr sz="1350" b="1">
-                <a:solidFill>
-                  <a:srgbClr val="1569B4"/>
-                </a:solidFill>
-                <a:latin typeface="Aptos"/>
-              </a:rPr>
-              <a:t>Questions &amp; Discussion</a:t>
-            </a:r>
-          </a:p>
-        </p:txBody>
-      </p:sp>
-      <p:sp>
-        <p:nvSpPr>
-          <p:cNvPr id="11" name="TextBox 10"/>
-          <p:cNvSpPr txBox="1"/>
-          <p:nvPr/>
-        </p:nvSpPr>
-        <p:spPr>
-          <a:xfrm>
-            <a:off x="384048" y="6565392"/>
-            <a:ext cx="3840480" cy="146304"/>
-          </a:xfrm>
-          <a:prstGeom prst="rect">
-            <a:avLst/>
-          </a:prstGeom>
-          <a:noFill/>
-        </p:spPr>
-        <p:txBody>
-          <a:bodyPr wrap="square" lIns="36576" rIns="36576" tIns="18288" bIns="18288" anchor="t">
-            <a:spAutoFit/>
-          </a:bodyPr>
-          <a:lstStyle/>
-          <a:p>
-            <a:pPr algn="l"/>
-            <a:r>
-              <a:rPr sz="700" b="1">
-                <a:solidFill>
-                  <a:srgbClr val="082F5D"/>
-                </a:solidFill>
-                <a:latin typeface="Aptos"/>
-              </a:rPr>
-              <a:t>FIN CORE  •  DIGITAL BANKING MANAGEMENT</a:t>
-            </a:r>
-          </a:p>
-        </p:txBody>
-      </p:sp>
-      <p:sp>
-        <p:nvSpPr>
-          <p:cNvPr id="12" name="TextBox 11"/>
-          <p:cNvSpPr txBox="1"/>
-          <p:nvPr/>
-        </p:nvSpPr>
-        <p:spPr>
-          <a:xfrm>
-            <a:off x="11384280" y="6547104"/>
-            <a:ext cx="365760" cy="164592"/>
-          </a:xfrm>
-          <a:prstGeom prst="rect">
-            <a:avLst/>
-          </a:prstGeom>
-          <a:noFill/>
-        </p:spPr>
-        <p:txBody>
-          <a:bodyPr wrap="square" lIns="36576" rIns="36576" tIns="18288" bIns="18288" anchor="t">
+          <a:bodyPr wrap="square" lIns="36576" tIns="18288" rIns="36576" bIns="18288" anchor="t">
             <a:spAutoFit/>
           </a:bodyPr>
           <a:lstStyle/>
@@ -9123,7 +6105,7 @@
 </file>
 
 <file path=ppt/slides/slide2.xml><?xml version="1.0" encoding="utf-8"?>
-<p:sld xmlns:a="http://schemas.openxmlformats.org/drawingml/2006/main" xmlns:p="http://schemas.openxmlformats.org/presentationml/2006/main" xmlns:r="http://schemas.openxmlformats.org/officeDocument/2006/relationships">
+<p:sld xmlns:a="http://schemas.openxmlformats.org/drawingml/2006/main" xmlns:r="http://schemas.openxmlformats.org/officeDocument/2006/relationships" xmlns:p="http://schemas.openxmlformats.org/presentationml/2006/main">
   <p:cSld>
     <p:spTree>
       <p:nvGrpSpPr>
@@ -9131,7 +6113,14 @@
         <p:cNvGrpSpPr/>
         <p:nvPr/>
       </p:nvGrpSpPr>
-      <p:grpSpPr/>
+      <p:grpSpPr>
+        <a:xfrm>
+          <a:off x="0" y="0"/>
+          <a:ext cx="0" cy="0"/>
+          <a:chOff x="0" y="0"/>
+          <a:chExt cx="0" cy="0"/>
+        </a:xfrm>
+      </p:grpSpPr>
       <p:pic>
         <p:nvPicPr>
           <p:cNvPr id="2" name="Picture 1" descr="Slide_02_Background.png"/>
@@ -9198,6 +6187,7 @@
           <a:lstStyle/>
           <a:p>
             <a:pPr algn="ctr"/>
+            <a:endParaRPr/>
           </a:p>
         </p:txBody>
       </p:sp>
@@ -9218,7 +6208,7 @@
           <a:noFill/>
         </p:spPr>
         <p:txBody>
-          <a:bodyPr wrap="square" lIns="36576" rIns="36576" tIns="18288" bIns="18288" anchor="t">
+          <a:bodyPr wrap="square" lIns="36576" tIns="18288" rIns="36576" bIns="18288" anchor="t">
             <a:spAutoFit/>
           </a:bodyPr>
           <a:lstStyle/>
@@ -9253,7 +6243,7 @@
           <a:noFill/>
         </p:spPr>
         <p:txBody>
-          <a:bodyPr wrap="square" lIns="36576" rIns="36576" tIns="18288" bIns="18288" anchor="t">
+          <a:bodyPr wrap="square" lIns="36576" tIns="18288" rIns="36576" bIns="18288" anchor="t">
             <a:spAutoFit/>
           </a:bodyPr>
           <a:lstStyle/>
@@ -9313,6 +6303,7 @@
           <a:lstStyle/>
           <a:p>
             <a:pPr algn="ctr"/>
+            <a:endParaRPr/>
           </a:p>
         </p:txBody>
       </p:sp>
@@ -9356,6 +6347,7 @@
           <a:lstStyle/>
           <a:p>
             <a:pPr algn="ctr"/>
+            <a:endParaRPr/>
           </a:p>
         </p:txBody>
       </p:sp>
@@ -9376,7 +6368,7 @@
           <a:noFill/>
         </p:spPr>
         <p:txBody>
-          <a:bodyPr wrap="square" lIns="36576" rIns="36576" tIns="18288" bIns="18288" anchor="t">
+          <a:bodyPr wrap="square" lIns="36576" tIns="18288" rIns="36576" bIns="18288" anchor="t">
             <a:spAutoFit/>
           </a:bodyPr>
           <a:lstStyle/>
@@ -9411,7 +6403,7 @@
           <a:noFill/>
         </p:spPr>
         <p:txBody>
-          <a:bodyPr wrap="square" lIns="36576" rIns="36576" tIns="18288" bIns="18288" anchor="t">
+          <a:bodyPr wrap="square" lIns="36576" tIns="18288" rIns="36576" bIns="18288" anchor="t">
             <a:spAutoFit/>
           </a:bodyPr>
           <a:lstStyle/>
@@ -9471,6 +6463,7 @@
           <a:lstStyle/>
           <a:p>
             <a:pPr algn="ctr"/>
+            <a:endParaRPr/>
           </a:p>
         </p:txBody>
       </p:sp>
@@ -9514,6 +6507,7 @@
           <a:lstStyle/>
           <a:p>
             <a:pPr algn="ctr"/>
+            <a:endParaRPr/>
           </a:p>
         </p:txBody>
       </p:sp>
@@ -9534,7 +6528,7 @@
           <a:noFill/>
         </p:spPr>
         <p:txBody>
-          <a:bodyPr wrap="square" lIns="36576" rIns="36576" tIns="18288" bIns="18288" anchor="t">
+          <a:bodyPr wrap="square" lIns="36576" tIns="18288" rIns="36576" bIns="18288" anchor="t">
             <a:spAutoFit/>
           </a:bodyPr>
           <a:lstStyle/>
@@ -9569,7 +6563,7 @@
           <a:noFill/>
         </p:spPr>
         <p:txBody>
-          <a:bodyPr wrap="square" lIns="36576" rIns="36576" tIns="18288" bIns="18288" anchor="t">
+          <a:bodyPr wrap="square" lIns="36576" tIns="18288" rIns="36576" bIns="18288" anchor="t">
             <a:spAutoFit/>
           </a:bodyPr>
           <a:lstStyle/>
@@ -9629,6 +6623,7 @@
           <a:lstStyle/>
           <a:p>
             <a:pPr algn="ctr"/>
+            <a:endParaRPr/>
           </a:p>
         </p:txBody>
       </p:sp>
@@ -9672,6 +6667,7 @@
           <a:lstStyle/>
           <a:p>
             <a:pPr algn="ctr"/>
+            <a:endParaRPr/>
           </a:p>
         </p:txBody>
       </p:sp>
@@ -9692,7 +6688,7 @@
           <a:noFill/>
         </p:spPr>
         <p:txBody>
-          <a:bodyPr wrap="square" lIns="36576" rIns="36576" tIns="18288" bIns="18288" anchor="t">
+          <a:bodyPr wrap="square" lIns="36576" tIns="18288" rIns="36576" bIns="18288" anchor="t">
             <a:spAutoFit/>
           </a:bodyPr>
           <a:lstStyle/>
@@ -9727,7 +6723,7 @@
           <a:noFill/>
         </p:spPr>
         <p:txBody>
-          <a:bodyPr wrap="square" lIns="36576" rIns="36576" tIns="18288" bIns="18288" anchor="t">
+          <a:bodyPr wrap="square" lIns="36576" tIns="18288" rIns="36576" bIns="18288" anchor="t">
             <a:spAutoFit/>
           </a:bodyPr>
           <a:lstStyle/>
@@ -9787,6 +6783,7 @@
           <a:lstStyle/>
           <a:p>
             <a:pPr algn="ctr"/>
+            <a:endParaRPr/>
           </a:p>
         </p:txBody>
       </p:sp>
@@ -9830,6 +6827,7 @@
           <a:lstStyle/>
           <a:p>
             <a:pPr algn="ctr"/>
+            <a:endParaRPr/>
           </a:p>
         </p:txBody>
       </p:sp>
@@ -9850,7 +6848,7 @@
           <a:noFill/>
         </p:spPr>
         <p:txBody>
-          <a:bodyPr wrap="square" lIns="36576" rIns="36576" tIns="18288" bIns="18288" anchor="t">
+          <a:bodyPr wrap="square" lIns="36576" tIns="18288" rIns="36576" bIns="18288" anchor="t">
             <a:spAutoFit/>
           </a:bodyPr>
           <a:lstStyle/>
@@ -9885,7 +6883,7 @@
           <a:noFill/>
         </p:spPr>
         <p:txBody>
-          <a:bodyPr wrap="square" lIns="36576" rIns="36576" tIns="18288" bIns="18288" anchor="t">
+          <a:bodyPr wrap="square" lIns="36576" tIns="18288" rIns="36576" bIns="18288" anchor="t">
             <a:spAutoFit/>
           </a:bodyPr>
           <a:lstStyle/>
@@ -9945,6 +6943,7 @@
           <a:lstStyle/>
           <a:p>
             <a:pPr algn="ctr"/>
+            <a:endParaRPr/>
           </a:p>
         </p:txBody>
       </p:sp>
@@ -9988,6 +6987,7 @@
           <a:lstStyle/>
           <a:p>
             <a:pPr algn="ctr"/>
+            <a:endParaRPr/>
           </a:p>
         </p:txBody>
       </p:sp>
@@ -10008,7 +7008,7 @@
           <a:noFill/>
         </p:spPr>
         <p:txBody>
-          <a:bodyPr wrap="square" lIns="36576" rIns="36576" tIns="18288" bIns="18288" anchor="t">
+          <a:bodyPr wrap="square" lIns="36576" tIns="18288" rIns="36576" bIns="18288" anchor="t">
             <a:spAutoFit/>
           </a:bodyPr>
           <a:lstStyle/>
@@ -10043,7 +7043,7 @@
           <a:noFill/>
         </p:spPr>
         <p:txBody>
-          <a:bodyPr wrap="square" lIns="36576" rIns="36576" tIns="18288" bIns="18288" anchor="t">
+          <a:bodyPr wrap="square" lIns="36576" tIns="18288" rIns="36576" bIns="18288" anchor="t">
             <a:spAutoFit/>
           </a:bodyPr>
           <a:lstStyle/>
@@ -10103,6 +7103,7 @@
           <a:lstStyle/>
           <a:p>
             <a:pPr algn="ctr"/>
+            <a:endParaRPr/>
           </a:p>
         </p:txBody>
       </p:sp>
@@ -10146,6 +7147,7 @@
           <a:lstStyle/>
           <a:p>
             <a:pPr algn="ctr"/>
+            <a:endParaRPr/>
           </a:p>
         </p:txBody>
       </p:sp>
@@ -10166,7 +7168,7 @@
           <a:noFill/>
         </p:spPr>
         <p:txBody>
-          <a:bodyPr wrap="square" lIns="36576" rIns="36576" tIns="18288" bIns="18288" anchor="t">
+          <a:bodyPr wrap="square" lIns="36576" tIns="18288" rIns="36576" bIns="18288" anchor="t">
             <a:spAutoFit/>
           </a:bodyPr>
           <a:lstStyle/>
@@ -10201,7 +7203,7 @@
           <a:noFill/>
         </p:spPr>
         <p:txBody>
-          <a:bodyPr wrap="square" lIns="36576" rIns="36576" tIns="18288" bIns="18288" anchor="t">
+          <a:bodyPr wrap="square" lIns="36576" tIns="18288" rIns="36576" bIns="18288" anchor="t">
             <a:spAutoFit/>
           </a:bodyPr>
           <a:lstStyle/>
@@ -10261,6 +7263,7 @@
           <a:lstStyle/>
           <a:p>
             <a:pPr algn="ctr"/>
+            <a:endParaRPr/>
           </a:p>
         </p:txBody>
       </p:sp>
@@ -10304,6 +7307,7 @@
           <a:lstStyle/>
           <a:p>
             <a:pPr algn="ctr"/>
+            <a:endParaRPr/>
           </a:p>
         </p:txBody>
       </p:sp>
@@ -10324,7 +7328,7 @@
           <a:noFill/>
         </p:spPr>
         <p:txBody>
-          <a:bodyPr wrap="square" lIns="36576" rIns="36576" tIns="18288" bIns="18288" anchor="t">
+          <a:bodyPr wrap="square" lIns="36576" tIns="18288" rIns="36576" bIns="18288" anchor="t">
             <a:spAutoFit/>
           </a:bodyPr>
           <a:lstStyle/>
@@ -10359,7 +7363,7 @@
           <a:noFill/>
         </p:spPr>
         <p:txBody>
-          <a:bodyPr wrap="square" lIns="36576" rIns="36576" tIns="18288" bIns="18288" anchor="t">
+          <a:bodyPr wrap="square" lIns="36576" tIns="18288" rIns="36576" bIns="18288" anchor="t">
             <a:spAutoFit/>
           </a:bodyPr>
           <a:lstStyle/>
@@ -10394,7 +7398,7 @@
           <a:noFill/>
         </p:spPr>
         <p:txBody>
-          <a:bodyPr wrap="square" lIns="36576" rIns="36576" tIns="18288" bIns="18288" anchor="t">
+          <a:bodyPr wrap="square" lIns="36576" tIns="18288" rIns="36576" bIns="18288" anchor="t">
             <a:spAutoFit/>
           </a:bodyPr>
           <a:lstStyle/>
@@ -10429,7 +7433,7 @@
           <a:noFill/>
         </p:spPr>
         <p:txBody>
-          <a:bodyPr wrap="square" lIns="36576" rIns="36576" tIns="18288" bIns="18288" anchor="t">
+          <a:bodyPr wrap="square" lIns="36576" tIns="18288" rIns="36576" bIns="18288" anchor="t">
             <a:spAutoFit/>
           </a:bodyPr>
           <a:lstStyle/>
@@ -10456,7 +7460,7 @@
 </file>
 
 <file path=ppt/slides/slide3.xml><?xml version="1.0" encoding="utf-8"?>
-<p:sld xmlns:a="http://schemas.openxmlformats.org/drawingml/2006/main" xmlns:p="http://schemas.openxmlformats.org/presentationml/2006/main" xmlns:r="http://schemas.openxmlformats.org/officeDocument/2006/relationships">
+<p:sld xmlns:a="http://schemas.openxmlformats.org/drawingml/2006/main" xmlns:r="http://schemas.openxmlformats.org/officeDocument/2006/relationships" xmlns:p="http://schemas.openxmlformats.org/presentationml/2006/main">
   <p:cSld>
     <p:spTree>
       <p:nvGrpSpPr>
@@ -10464,7 +7468,14 @@
         <p:cNvGrpSpPr/>
         <p:nvPr/>
       </p:nvGrpSpPr>
-      <p:grpSpPr/>
+      <p:grpSpPr>
+        <a:xfrm>
+          <a:off x="0" y="0"/>
+          <a:ext cx="0" cy="0"/>
+          <a:chOff x="0" y="0"/>
+          <a:chExt cx="0" cy="0"/>
+        </a:xfrm>
+      </p:grpSpPr>
       <p:pic>
         <p:nvPicPr>
           <p:cNvPr id="2" name="Picture 1" descr="Slide_03_Background.png"/>
@@ -10531,6 +7542,7 @@
           <a:lstStyle/>
           <a:p>
             <a:pPr algn="ctr"/>
+            <a:endParaRPr/>
           </a:p>
         </p:txBody>
       </p:sp>
@@ -10551,7 +7563,7 @@
           <a:noFill/>
         </p:spPr>
         <p:txBody>
-          <a:bodyPr wrap="square" lIns="36576" rIns="36576" tIns="18288" bIns="18288" anchor="t">
+          <a:bodyPr wrap="square" lIns="36576" tIns="18288" rIns="36576" bIns="18288" anchor="t">
             <a:spAutoFit/>
           </a:bodyPr>
           <a:lstStyle/>
@@ -10586,7 +7598,7 @@
           <a:noFill/>
         </p:spPr>
         <p:txBody>
-          <a:bodyPr wrap="square" lIns="36576" rIns="36576" tIns="18288" bIns="18288" anchor="t">
+          <a:bodyPr wrap="square" lIns="36576" tIns="18288" rIns="36576" bIns="18288" anchor="t">
             <a:spAutoFit/>
           </a:bodyPr>
           <a:lstStyle/>
@@ -10646,6 +7658,7 @@
           <a:lstStyle/>
           <a:p>
             <a:pPr algn="ctr"/>
+            <a:endParaRPr/>
           </a:p>
         </p:txBody>
       </p:sp>
@@ -10689,6 +7702,7 @@
           <a:lstStyle/>
           <a:p>
             <a:pPr algn="ctr"/>
+            <a:endParaRPr/>
           </a:p>
         </p:txBody>
       </p:sp>
@@ -10709,7 +7723,7 @@
           <a:noFill/>
         </p:spPr>
         <p:txBody>
-          <a:bodyPr wrap="square" lIns="36576" rIns="36576" tIns="18288" bIns="18288" anchor="t">
+          <a:bodyPr wrap="square" lIns="36576" tIns="18288" rIns="36576" bIns="18288" anchor="t">
             <a:spAutoFit/>
           </a:bodyPr>
           <a:lstStyle/>
@@ -10744,7 +7758,7 @@
           <a:noFill/>
         </p:spPr>
         <p:txBody>
-          <a:bodyPr wrap="square" lIns="36576" rIns="36576" tIns="18288" bIns="18288" anchor="t">
+          <a:bodyPr wrap="square" lIns="36576" tIns="18288" rIns="36576" bIns="18288" anchor="t">
             <a:spAutoFit/>
           </a:bodyPr>
           <a:lstStyle/>
@@ -10804,6 +7818,7 @@
           <a:lstStyle/>
           <a:p>
             <a:pPr algn="ctr"/>
+            <a:endParaRPr/>
           </a:p>
         </p:txBody>
       </p:sp>
@@ -10847,6 +7862,7 @@
           <a:lstStyle/>
           <a:p>
             <a:pPr algn="ctr"/>
+            <a:endParaRPr/>
           </a:p>
         </p:txBody>
       </p:sp>
@@ -10867,7 +7883,7 @@
           <a:noFill/>
         </p:spPr>
         <p:txBody>
-          <a:bodyPr wrap="square" lIns="36576" rIns="36576" tIns="18288" bIns="18288" anchor="t">
+          <a:bodyPr wrap="square" lIns="36576" tIns="18288" rIns="36576" bIns="18288" anchor="t">
             <a:spAutoFit/>
           </a:bodyPr>
           <a:lstStyle/>
@@ -10902,7 +7918,7 @@
           <a:noFill/>
         </p:spPr>
         <p:txBody>
-          <a:bodyPr wrap="square" lIns="36576" rIns="36576" tIns="18288" bIns="18288" anchor="t">
+          <a:bodyPr wrap="square" lIns="36576" tIns="18288" rIns="36576" bIns="18288" anchor="t">
             <a:spAutoFit/>
           </a:bodyPr>
           <a:lstStyle/>
@@ -10962,6 +7978,7 @@
           <a:lstStyle/>
           <a:p>
             <a:pPr algn="ctr"/>
+            <a:endParaRPr/>
           </a:p>
         </p:txBody>
       </p:sp>
@@ -11005,6 +8022,7 @@
           <a:lstStyle/>
           <a:p>
             <a:pPr algn="ctr"/>
+            <a:endParaRPr/>
           </a:p>
         </p:txBody>
       </p:sp>
@@ -11025,7 +8043,7 @@
           <a:noFill/>
         </p:spPr>
         <p:txBody>
-          <a:bodyPr wrap="square" lIns="36576" rIns="36576" tIns="18288" bIns="18288" anchor="t">
+          <a:bodyPr wrap="square" lIns="36576" tIns="18288" rIns="36576" bIns="18288" anchor="t">
             <a:spAutoFit/>
           </a:bodyPr>
           <a:lstStyle/>
@@ -11060,7 +8078,7 @@
           <a:noFill/>
         </p:spPr>
         <p:txBody>
-          <a:bodyPr wrap="square" lIns="36576" rIns="36576" tIns="18288" bIns="18288" anchor="t">
+          <a:bodyPr wrap="square" lIns="36576" tIns="18288" rIns="36576" bIns="18288" anchor="t">
             <a:spAutoFit/>
           </a:bodyPr>
           <a:lstStyle/>
@@ -11120,6 +8138,7 @@
           <a:lstStyle/>
           <a:p>
             <a:pPr algn="ctr"/>
+            <a:endParaRPr/>
           </a:p>
         </p:txBody>
       </p:sp>
@@ -11163,6 +8182,7 @@
           <a:lstStyle/>
           <a:p>
             <a:pPr algn="ctr"/>
+            <a:endParaRPr/>
           </a:p>
         </p:txBody>
       </p:sp>
@@ -11183,7 +8203,7 @@
           <a:noFill/>
         </p:spPr>
         <p:txBody>
-          <a:bodyPr wrap="square" lIns="36576" rIns="36576" tIns="18288" bIns="18288" anchor="t">
+          <a:bodyPr wrap="square" lIns="36576" tIns="18288" rIns="36576" bIns="18288" anchor="t">
             <a:spAutoFit/>
           </a:bodyPr>
           <a:lstStyle/>
@@ -11218,7 +8238,7 @@
           <a:noFill/>
         </p:spPr>
         <p:txBody>
-          <a:bodyPr wrap="square" lIns="36576" rIns="36576" tIns="18288" bIns="18288" anchor="t">
+          <a:bodyPr wrap="square" lIns="36576" tIns="18288" rIns="36576" bIns="18288" anchor="t">
             <a:spAutoFit/>
           </a:bodyPr>
           <a:lstStyle/>
@@ -11253,7 +8273,7 @@
           <a:noFill/>
         </p:spPr>
         <p:txBody>
-          <a:bodyPr wrap="square" lIns="36576" rIns="36576" tIns="18288" bIns="18288" anchor="t">
+          <a:bodyPr wrap="square" lIns="36576" tIns="18288" rIns="36576" bIns="18288" anchor="t">
             <a:spAutoFit/>
           </a:bodyPr>
           <a:lstStyle/>
@@ -11288,7 +8308,7 @@
           <a:noFill/>
         </p:spPr>
         <p:txBody>
-          <a:bodyPr wrap="square" lIns="36576" rIns="36576" tIns="18288" bIns="18288" anchor="t">
+          <a:bodyPr wrap="square" lIns="36576" tIns="18288" rIns="36576" bIns="18288" anchor="t">
             <a:spAutoFit/>
           </a:bodyPr>
           <a:lstStyle/>
@@ -11315,7 +8335,7 @@
 </file>
 
 <file path=ppt/slides/slide4.xml><?xml version="1.0" encoding="utf-8"?>
-<p:sld xmlns:a="http://schemas.openxmlformats.org/drawingml/2006/main" xmlns:p="http://schemas.openxmlformats.org/presentationml/2006/main" xmlns:r="http://schemas.openxmlformats.org/officeDocument/2006/relationships">
+<p:sld xmlns:a="http://schemas.openxmlformats.org/drawingml/2006/main" xmlns:r="http://schemas.openxmlformats.org/officeDocument/2006/relationships" xmlns:p="http://schemas.openxmlformats.org/presentationml/2006/main">
   <p:cSld>
     <p:spTree>
       <p:nvGrpSpPr>
@@ -11323,7 +8343,14 @@
         <p:cNvGrpSpPr/>
         <p:nvPr/>
       </p:nvGrpSpPr>
-      <p:grpSpPr/>
+      <p:grpSpPr>
+        <a:xfrm>
+          <a:off x="0" y="0"/>
+          <a:ext cx="0" cy="0"/>
+          <a:chOff x="0" y="0"/>
+          <a:chExt cx="0" cy="0"/>
+        </a:xfrm>
+      </p:grpSpPr>
       <p:pic>
         <p:nvPicPr>
           <p:cNvPr id="2" name="Picture 1" descr="Slide_04_Background.png"/>
@@ -11340,8 +8367,8 @@
         </p:blipFill>
         <p:spPr>
           <a:xfrm>
-            <a:off x="0" y="0"/>
-            <a:ext cx="12191999" cy="6858000"/>
+            <a:off x="-665017" y="0"/>
+            <a:ext cx="12857018" cy="6858000"/>
           </a:xfrm>
           <a:prstGeom prst="rect">
             <a:avLst/>
@@ -11390,6 +8417,7 @@
           <a:lstStyle/>
           <a:p>
             <a:pPr algn="ctr"/>
+            <a:endParaRPr/>
           </a:p>
         </p:txBody>
       </p:sp>
@@ -11410,7 +8438,7 @@
           <a:noFill/>
         </p:spPr>
         <p:txBody>
-          <a:bodyPr wrap="square" lIns="36576" rIns="36576" tIns="18288" bIns="18288" anchor="t">
+          <a:bodyPr wrap="square" lIns="36576" tIns="18288" rIns="36576" bIns="18288" anchor="t">
             <a:spAutoFit/>
           </a:bodyPr>
           <a:lstStyle/>
@@ -11445,7 +8473,7 @@
           <a:noFill/>
         </p:spPr>
         <p:txBody>
-          <a:bodyPr wrap="square" lIns="36576" rIns="36576" tIns="18288" bIns="18288" anchor="t">
+          <a:bodyPr wrap="square" lIns="36576" tIns="18288" rIns="36576" bIns="18288" anchor="t">
             <a:spAutoFit/>
           </a:bodyPr>
           <a:lstStyle/>
@@ -11480,7 +8508,7 @@
           <a:noFill/>
         </p:spPr>
         <p:txBody>
-          <a:bodyPr wrap="square" lIns="36576" rIns="36576" tIns="18288" bIns="18288" anchor="t">
+          <a:bodyPr wrap="square" lIns="36576" tIns="18288" rIns="36576" bIns="18288" anchor="t">
             <a:spAutoFit/>
           </a:bodyPr>
           <a:lstStyle/>
@@ -11541,6 +8569,7 @@
           <a:lstStyle/>
           <a:p>
             <a:pPr algn="ctr"/>
+            <a:endParaRPr/>
           </a:p>
         </p:txBody>
       </p:sp>
@@ -11584,6 +8613,7 @@
           <a:lstStyle/>
           <a:p>
             <a:pPr algn="ctr"/>
+            <a:endParaRPr/>
           </a:p>
         </p:txBody>
       </p:sp>
@@ -11604,7 +8634,7 @@
           <a:noFill/>
         </p:spPr>
         <p:txBody>
-          <a:bodyPr wrap="square" lIns="36576" rIns="36576" tIns="18288" bIns="18288" anchor="t">
+          <a:bodyPr wrap="square" lIns="36576" tIns="18288" rIns="36576" bIns="18288" anchor="t">
             <a:spAutoFit/>
           </a:bodyPr>
           <a:lstStyle/>
@@ -11639,7 +8669,7 @@
           <a:noFill/>
         </p:spPr>
         <p:txBody>
-          <a:bodyPr wrap="square" lIns="36576" rIns="36576" tIns="18288" bIns="18288" anchor="t">
+          <a:bodyPr wrap="square" lIns="36576" tIns="18288" rIns="36576" bIns="18288" anchor="t">
             <a:spAutoFit/>
           </a:bodyPr>
           <a:lstStyle/>
@@ -11699,6 +8729,7 @@
           <a:lstStyle/>
           <a:p>
             <a:pPr algn="ctr"/>
+            <a:endParaRPr/>
           </a:p>
         </p:txBody>
       </p:sp>
@@ -11742,6 +8773,7 @@
           <a:lstStyle/>
           <a:p>
             <a:pPr algn="ctr"/>
+            <a:endParaRPr/>
           </a:p>
         </p:txBody>
       </p:sp>
@@ -11762,7 +8794,7 @@
           <a:noFill/>
         </p:spPr>
         <p:txBody>
-          <a:bodyPr wrap="square" lIns="36576" rIns="36576" tIns="18288" bIns="18288" anchor="t">
+          <a:bodyPr wrap="square" lIns="36576" tIns="18288" rIns="36576" bIns="18288" anchor="t">
             <a:spAutoFit/>
           </a:bodyPr>
           <a:lstStyle/>
@@ -11797,7 +8829,7 @@
           <a:noFill/>
         </p:spPr>
         <p:txBody>
-          <a:bodyPr wrap="square" lIns="36576" rIns="36576" tIns="18288" bIns="18288" anchor="t">
+          <a:bodyPr wrap="square" lIns="36576" tIns="18288" rIns="36576" bIns="18288" anchor="t">
             <a:spAutoFit/>
           </a:bodyPr>
           <a:lstStyle/>
@@ -11857,6 +8889,7 @@
           <a:lstStyle/>
           <a:p>
             <a:pPr algn="ctr"/>
+            <a:endParaRPr/>
           </a:p>
         </p:txBody>
       </p:sp>
@@ -11900,6 +8933,7 @@
           <a:lstStyle/>
           <a:p>
             <a:pPr algn="ctr"/>
+            <a:endParaRPr/>
           </a:p>
         </p:txBody>
       </p:sp>
@@ -11920,7 +8954,7 @@
           <a:noFill/>
         </p:spPr>
         <p:txBody>
-          <a:bodyPr wrap="square" lIns="36576" rIns="36576" tIns="18288" bIns="18288" anchor="t">
+          <a:bodyPr wrap="square" lIns="36576" tIns="18288" rIns="36576" bIns="18288" anchor="t">
             <a:spAutoFit/>
           </a:bodyPr>
           <a:lstStyle/>
@@ -11955,7 +8989,7 @@
           <a:noFill/>
         </p:spPr>
         <p:txBody>
-          <a:bodyPr wrap="square" lIns="36576" rIns="36576" tIns="18288" bIns="18288" anchor="t">
+          <a:bodyPr wrap="square" lIns="36576" tIns="18288" rIns="36576" bIns="18288" anchor="t">
             <a:spAutoFit/>
           </a:bodyPr>
           <a:lstStyle/>
@@ -12015,6 +9049,7 @@
           <a:lstStyle/>
           <a:p>
             <a:pPr algn="ctr"/>
+            <a:endParaRPr/>
           </a:p>
         </p:txBody>
       </p:sp>
@@ -12058,6 +9093,7 @@
           <a:lstStyle/>
           <a:p>
             <a:pPr algn="ctr"/>
+            <a:endParaRPr/>
           </a:p>
         </p:txBody>
       </p:sp>
@@ -12078,7 +9114,7 @@
           <a:noFill/>
         </p:spPr>
         <p:txBody>
-          <a:bodyPr wrap="square" lIns="36576" rIns="36576" tIns="18288" bIns="18288" anchor="t">
+          <a:bodyPr wrap="square" lIns="36576" tIns="18288" rIns="36576" bIns="18288" anchor="t">
             <a:spAutoFit/>
           </a:bodyPr>
           <a:lstStyle/>
@@ -12113,7 +9149,7 @@
           <a:noFill/>
         </p:spPr>
         <p:txBody>
-          <a:bodyPr wrap="square" lIns="36576" rIns="36576" tIns="18288" bIns="18288" anchor="t">
+          <a:bodyPr wrap="square" lIns="36576" tIns="18288" rIns="36576" bIns="18288" anchor="t">
             <a:spAutoFit/>
           </a:bodyPr>
           <a:lstStyle/>
@@ -12148,7 +9184,7 @@
           <a:noFill/>
         </p:spPr>
         <p:txBody>
-          <a:bodyPr wrap="square" lIns="36576" rIns="36576" tIns="18288" bIns="18288" anchor="t">
+          <a:bodyPr wrap="square" lIns="36576" tIns="18288" rIns="36576" bIns="18288" anchor="t">
             <a:spAutoFit/>
           </a:bodyPr>
           <a:lstStyle/>
@@ -12183,7 +9219,7 @@
           <a:noFill/>
         </p:spPr>
         <p:txBody>
-          <a:bodyPr wrap="square" lIns="36576" rIns="36576" tIns="18288" bIns="18288" anchor="t">
+          <a:bodyPr wrap="square" lIns="36576" tIns="18288" rIns="36576" bIns="18288" anchor="t">
             <a:spAutoFit/>
           </a:bodyPr>
           <a:lstStyle/>
@@ -12210,7 +9246,7 @@
 </file>
 
 <file path=ppt/slides/slide5.xml><?xml version="1.0" encoding="utf-8"?>
-<p:sld xmlns:a="http://schemas.openxmlformats.org/drawingml/2006/main" xmlns:p="http://schemas.openxmlformats.org/presentationml/2006/main" xmlns:r="http://schemas.openxmlformats.org/officeDocument/2006/relationships">
+<p:sld xmlns:a="http://schemas.openxmlformats.org/drawingml/2006/main" xmlns:r="http://schemas.openxmlformats.org/officeDocument/2006/relationships" xmlns:p="http://schemas.openxmlformats.org/presentationml/2006/main">
   <p:cSld>
     <p:spTree>
       <p:nvGrpSpPr>
@@ -12218,7 +9254,14 @@
         <p:cNvGrpSpPr/>
         <p:nvPr/>
       </p:nvGrpSpPr>
-      <p:grpSpPr/>
+      <p:grpSpPr>
+        <a:xfrm>
+          <a:off x="0" y="0"/>
+          <a:ext cx="0" cy="0"/>
+          <a:chOff x="0" y="0"/>
+          <a:chExt cx="0" cy="0"/>
+        </a:xfrm>
+      </p:grpSpPr>
       <p:pic>
         <p:nvPicPr>
           <p:cNvPr id="2" name="Picture 1" descr="Slide_05_Background.png"/>
@@ -12285,6 +9328,7 @@
           <a:lstStyle/>
           <a:p>
             <a:pPr algn="ctr"/>
+            <a:endParaRPr/>
           </a:p>
         </p:txBody>
       </p:sp>
@@ -12305,7 +9349,7 @@
           <a:noFill/>
         </p:spPr>
         <p:txBody>
-          <a:bodyPr wrap="square" lIns="36576" rIns="36576" tIns="18288" bIns="18288" anchor="t">
+          <a:bodyPr wrap="square" lIns="36576" tIns="18288" rIns="36576" bIns="18288" anchor="t">
             <a:spAutoFit/>
           </a:bodyPr>
           <a:lstStyle/>
@@ -12340,7 +9384,7 @@
           <a:noFill/>
         </p:spPr>
         <p:txBody>
-          <a:bodyPr wrap="square" lIns="36576" rIns="36576" tIns="18288" bIns="18288" anchor="t">
+          <a:bodyPr wrap="square" lIns="36576" tIns="18288" rIns="36576" bIns="18288" anchor="t">
             <a:spAutoFit/>
           </a:bodyPr>
           <a:lstStyle/>
@@ -12375,7 +9419,7 @@
           <a:noFill/>
         </p:spPr>
         <p:txBody>
-          <a:bodyPr wrap="square" lIns="36576" rIns="36576" tIns="18288" bIns="18288" anchor="t">
+          <a:bodyPr wrap="square" lIns="36576" tIns="18288" rIns="36576" bIns="18288" anchor="t">
             <a:spAutoFit/>
           </a:bodyPr>
           <a:lstStyle/>
@@ -12435,6 +9479,7 @@
           <a:lstStyle/>
           <a:p>
             <a:pPr algn="ctr"/>
+            <a:endParaRPr/>
           </a:p>
         </p:txBody>
       </p:sp>
@@ -12478,6 +9523,7 @@
           <a:lstStyle/>
           <a:p>
             <a:pPr algn="ctr"/>
+            <a:endParaRPr/>
           </a:p>
         </p:txBody>
       </p:sp>
@@ -12498,7 +9544,7 @@
           <a:noFill/>
         </p:spPr>
         <p:txBody>
-          <a:bodyPr wrap="square" lIns="36576" rIns="36576" tIns="18288" bIns="18288" anchor="t">
+          <a:bodyPr wrap="square" lIns="36576" tIns="18288" rIns="36576" bIns="18288" anchor="t">
             <a:spAutoFit/>
           </a:bodyPr>
           <a:lstStyle/>
@@ -12533,7 +9579,7 @@
           <a:noFill/>
         </p:spPr>
         <p:txBody>
-          <a:bodyPr wrap="square" lIns="36576" rIns="36576" tIns="18288" bIns="18288" anchor="t">
+          <a:bodyPr wrap="square" lIns="36576" tIns="18288" rIns="36576" bIns="18288" anchor="t">
             <a:spAutoFit/>
           </a:bodyPr>
           <a:lstStyle/>
@@ -12593,6 +9639,7 @@
           <a:lstStyle/>
           <a:p>
             <a:pPr algn="ctr"/>
+            <a:endParaRPr/>
           </a:p>
         </p:txBody>
       </p:sp>
@@ -12636,6 +9683,7 @@
           <a:lstStyle/>
           <a:p>
             <a:pPr algn="ctr"/>
+            <a:endParaRPr/>
           </a:p>
         </p:txBody>
       </p:sp>
@@ -12656,7 +9704,7 @@
           <a:noFill/>
         </p:spPr>
         <p:txBody>
-          <a:bodyPr wrap="square" lIns="36576" rIns="36576" tIns="18288" bIns="18288" anchor="t">
+          <a:bodyPr wrap="square" lIns="36576" tIns="18288" rIns="36576" bIns="18288" anchor="t">
             <a:spAutoFit/>
           </a:bodyPr>
           <a:lstStyle/>
@@ -12691,7 +9739,7 @@
           <a:noFill/>
         </p:spPr>
         <p:txBody>
-          <a:bodyPr wrap="square" lIns="36576" rIns="36576" tIns="18288" bIns="18288" anchor="t">
+          <a:bodyPr wrap="square" lIns="36576" tIns="18288" rIns="36576" bIns="18288" anchor="t">
             <a:spAutoFit/>
           </a:bodyPr>
           <a:lstStyle/>
@@ -12751,6 +9799,7 @@
           <a:lstStyle/>
           <a:p>
             <a:pPr algn="ctr"/>
+            <a:endParaRPr/>
           </a:p>
         </p:txBody>
       </p:sp>
@@ -12794,6 +9843,7 @@
           <a:lstStyle/>
           <a:p>
             <a:pPr algn="ctr"/>
+            <a:endParaRPr/>
           </a:p>
         </p:txBody>
       </p:sp>
@@ -12814,7 +9864,7 @@
           <a:noFill/>
         </p:spPr>
         <p:txBody>
-          <a:bodyPr wrap="square" lIns="36576" rIns="36576" tIns="18288" bIns="18288" anchor="t">
+          <a:bodyPr wrap="square" lIns="36576" tIns="18288" rIns="36576" bIns="18288" anchor="t">
             <a:spAutoFit/>
           </a:bodyPr>
           <a:lstStyle/>
@@ -12849,7 +9899,7 @@
           <a:noFill/>
         </p:spPr>
         <p:txBody>
-          <a:bodyPr wrap="square" lIns="36576" rIns="36576" tIns="18288" bIns="18288" anchor="t">
+          <a:bodyPr wrap="square" lIns="36576" tIns="18288" rIns="36576" bIns="18288" anchor="t">
             <a:spAutoFit/>
           </a:bodyPr>
           <a:lstStyle/>
@@ -12909,6 +9959,7 @@
           <a:lstStyle/>
           <a:p>
             <a:pPr algn="ctr"/>
+            <a:endParaRPr/>
           </a:p>
         </p:txBody>
       </p:sp>
@@ -12952,6 +10003,7 @@
           <a:lstStyle/>
           <a:p>
             <a:pPr algn="ctr"/>
+            <a:endParaRPr/>
           </a:p>
         </p:txBody>
       </p:sp>
@@ -12972,7 +10024,7 @@
           <a:noFill/>
         </p:spPr>
         <p:txBody>
-          <a:bodyPr wrap="square" lIns="36576" rIns="36576" tIns="18288" bIns="18288" anchor="t">
+          <a:bodyPr wrap="square" lIns="36576" tIns="18288" rIns="36576" bIns="18288" anchor="t">
             <a:spAutoFit/>
           </a:bodyPr>
           <a:lstStyle/>
@@ -13007,7 +10059,7 @@
           <a:noFill/>
         </p:spPr>
         <p:txBody>
-          <a:bodyPr wrap="square" lIns="36576" rIns="36576" tIns="18288" bIns="18288" anchor="t">
+          <a:bodyPr wrap="square" lIns="36576" tIns="18288" rIns="36576" bIns="18288" anchor="t">
             <a:spAutoFit/>
           </a:bodyPr>
           <a:lstStyle/>
@@ -13042,7 +10094,7 @@
           <a:noFill/>
         </p:spPr>
         <p:txBody>
-          <a:bodyPr wrap="square" lIns="36576" rIns="36576" tIns="18288" bIns="18288" anchor="t">
+          <a:bodyPr wrap="square" lIns="36576" tIns="18288" rIns="36576" bIns="18288" anchor="t">
             <a:spAutoFit/>
           </a:bodyPr>
           <a:lstStyle/>
@@ -13077,7 +10129,7 @@
           <a:noFill/>
         </p:spPr>
         <p:txBody>
-          <a:bodyPr wrap="square" lIns="36576" rIns="36576" tIns="18288" bIns="18288" anchor="t">
+          <a:bodyPr wrap="square" lIns="36576" tIns="18288" rIns="36576" bIns="18288" anchor="t">
             <a:spAutoFit/>
           </a:bodyPr>
           <a:lstStyle/>
@@ -13104,7 +10156,7 @@
 </file>
 
 <file path=ppt/slides/slide6.xml><?xml version="1.0" encoding="utf-8"?>
-<p:sld xmlns:a="http://schemas.openxmlformats.org/drawingml/2006/main" xmlns:p="http://schemas.openxmlformats.org/presentationml/2006/main" xmlns:r="http://schemas.openxmlformats.org/officeDocument/2006/relationships">
+<p:sld xmlns:a="http://schemas.openxmlformats.org/drawingml/2006/main" xmlns:r="http://schemas.openxmlformats.org/officeDocument/2006/relationships" xmlns:p="http://schemas.openxmlformats.org/presentationml/2006/main">
   <p:cSld>
     <p:spTree>
       <p:nvGrpSpPr>
@@ -13112,7 +10164,14 @@
         <p:cNvGrpSpPr/>
         <p:nvPr/>
       </p:nvGrpSpPr>
-      <p:grpSpPr/>
+      <p:grpSpPr>
+        <a:xfrm>
+          <a:off x="0" y="0"/>
+          <a:ext cx="0" cy="0"/>
+          <a:chOff x="0" y="0"/>
+          <a:chExt cx="0" cy="0"/>
+        </a:xfrm>
+      </p:grpSpPr>
       <p:pic>
         <p:nvPicPr>
           <p:cNvPr id="2" name="Picture 1" descr="Slide_06_Background.png"/>
@@ -13179,6 +10238,7 @@
           <a:lstStyle/>
           <a:p>
             <a:pPr algn="ctr"/>
+            <a:endParaRPr/>
           </a:p>
         </p:txBody>
       </p:sp>
@@ -13199,7 +10259,7 @@
           <a:noFill/>
         </p:spPr>
         <p:txBody>
-          <a:bodyPr wrap="square" lIns="36576" rIns="36576" tIns="18288" bIns="18288" anchor="t">
+          <a:bodyPr wrap="square" lIns="36576" tIns="18288" rIns="36576" bIns="18288" anchor="t">
             <a:spAutoFit/>
           </a:bodyPr>
           <a:lstStyle/>
@@ -13234,7 +10294,7 @@
           <a:noFill/>
         </p:spPr>
         <p:txBody>
-          <a:bodyPr wrap="square" lIns="36576" rIns="36576" tIns="18288" bIns="18288" anchor="t">
+          <a:bodyPr wrap="square" lIns="36576" tIns="18288" rIns="36576" bIns="18288" anchor="t">
             <a:spAutoFit/>
           </a:bodyPr>
           <a:lstStyle/>
@@ -13294,6 +10354,7 @@
           <a:lstStyle/>
           <a:p>
             <a:pPr algn="ctr"/>
+            <a:endParaRPr/>
           </a:p>
         </p:txBody>
       </p:sp>
@@ -13337,6 +10398,7 @@
           <a:lstStyle/>
           <a:p>
             <a:pPr algn="ctr"/>
+            <a:endParaRPr/>
           </a:p>
         </p:txBody>
       </p:sp>
@@ -13357,7 +10419,7 @@
           <a:noFill/>
         </p:spPr>
         <p:txBody>
-          <a:bodyPr wrap="square" lIns="36576" rIns="36576" tIns="18288" bIns="18288" anchor="t">
+          <a:bodyPr wrap="square" lIns="36576" tIns="18288" rIns="36576" bIns="18288" anchor="t">
             <a:spAutoFit/>
           </a:bodyPr>
           <a:lstStyle/>
@@ -13392,7 +10454,7 @@
           <a:noFill/>
         </p:spPr>
         <p:txBody>
-          <a:bodyPr wrap="square" lIns="36576" rIns="36576" tIns="18288" bIns="18288" anchor="t">
+          <a:bodyPr wrap="square" lIns="36576" tIns="18288" rIns="36576" bIns="18288" anchor="t">
             <a:spAutoFit/>
           </a:bodyPr>
           <a:lstStyle/>
@@ -13427,7 +10489,7 @@
           <a:noFill/>
         </p:spPr>
         <p:txBody>
-          <a:bodyPr wrap="square" lIns="36576" rIns="36576" tIns="18288" bIns="18288" anchor="t">
+          <a:bodyPr wrap="square" lIns="36576" tIns="18288" rIns="36576" bIns="18288" anchor="t">
             <a:spAutoFit/>
           </a:bodyPr>
           <a:lstStyle/>
@@ -13487,6 +10549,7 @@
           <a:lstStyle/>
           <a:p>
             <a:pPr algn="ctr"/>
+            <a:endParaRPr/>
           </a:p>
         </p:txBody>
       </p:sp>
@@ -13530,6 +10593,7 @@
           <a:lstStyle/>
           <a:p>
             <a:pPr algn="ctr"/>
+            <a:endParaRPr/>
           </a:p>
         </p:txBody>
       </p:sp>
@@ -13550,7 +10614,7 @@
           <a:noFill/>
         </p:spPr>
         <p:txBody>
-          <a:bodyPr wrap="square" lIns="36576" rIns="36576" tIns="18288" bIns="18288" anchor="t">
+          <a:bodyPr wrap="square" lIns="36576" tIns="18288" rIns="36576" bIns="18288" anchor="t">
             <a:spAutoFit/>
           </a:bodyPr>
           <a:lstStyle/>
@@ -13585,7 +10649,7 @@
           <a:noFill/>
         </p:spPr>
         <p:txBody>
-          <a:bodyPr wrap="square" lIns="36576" rIns="36576" tIns="18288" bIns="18288" anchor="t">
+          <a:bodyPr wrap="square" lIns="36576" tIns="18288" rIns="36576" bIns="18288" anchor="t">
             <a:spAutoFit/>
           </a:bodyPr>
           <a:lstStyle/>
@@ -13620,7 +10684,7 @@
           <a:noFill/>
         </p:spPr>
         <p:txBody>
-          <a:bodyPr wrap="square" lIns="36576" rIns="36576" tIns="18288" bIns="18288" anchor="t">
+          <a:bodyPr wrap="square" lIns="36576" tIns="18288" rIns="36576" bIns="18288" anchor="t">
             <a:spAutoFit/>
           </a:bodyPr>
           <a:lstStyle/>
@@ -13680,6 +10744,7 @@
           <a:lstStyle/>
           <a:p>
             <a:pPr algn="ctr"/>
+            <a:endParaRPr/>
           </a:p>
         </p:txBody>
       </p:sp>
@@ -13723,6 +10788,7 @@
           <a:lstStyle/>
           <a:p>
             <a:pPr algn="ctr"/>
+            <a:endParaRPr/>
           </a:p>
         </p:txBody>
       </p:sp>
@@ -13743,7 +10809,7 @@
           <a:noFill/>
         </p:spPr>
         <p:txBody>
-          <a:bodyPr wrap="square" lIns="36576" rIns="36576" tIns="18288" bIns="18288" anchor="t">
+          <a:bodyPr wrap="square" lIns="36576" tIns="18288" rIns="36576" bIns="18288" anchor="t">
             <a:spAutoFit/>
           </a:bodyPr>
           <a:lstStyle/>
@@ -13778,7 +10844,7 @@
           <a:noFill/>
         </p:spPr>
         <p:txBody>
-          <a:bodyPr wrap="square" lIns="36576" rIns="36576" tIns="18288" bIns="18288" anchor="t">
+          <a:bodyPr wrap="square" lIns="36576" tIns="18288" rIns="36576" bIns="18288" anchor="t">
             <a:spAutoFit/>
           </a:bodyPr>
           <a:lstStyle/>
@@ -13813,7 +10879,7 @@
           <a:noFill/>
         </p:spPr>
         <p:txBody>
-          <a:bodyPr wrap="square" lIns="36576" rIns="36576" tIns="18288" bIns="18288" anchor="t">
+          <a:bodyPr wrap="square" lIns="36576" tIns="18288" rIns="36576" bIns="18288" anchor="t">
             <a:spAutoFit/>
           </a:bodyPr>
           <a:lstStyle/>
@@ -13873,6 +10939,7 @@
           <a:lstStyle/>
           <a:p>
             <a:pPr algn="ctr"/>
+            <a:endParaRPr/>
           </a:p>
         </p:txBody>
       </p:sp>
@@ -13916,6 +10983,7 @@
           <a:lstStyle/>
           <a:p>
             <a:pPr algn="ctr"/>
+            <a:endParaRPr/>
           </a:p>
         </p:txBody>
       </p:sp>
@@ -13936,7 +11004,7 @@
           <a:noFill/>
         </p:spPr>
         <p:txBody>
-          <a:bodyPr wrap="square" lIns="36576" rIns="36576" tIns="18288" bIns="18288" anchor="t">
+          <a:bodyPr wrap="square" lIns="36576" tIns="18288" rIns="36576" bIns="18288" anchor="t">
             <a:spAutoFit/>
           </a:bodyPr>
           <a:lstStyle/>
@@ -13971,7 +11039,7 @@
           <a:noFill/>
         </p:spPr>
         <p:txBody>
-          <a:bodyPr wrap="square" lIns="36576" rIns="36576" tIns="18288" bIns="18288" anchor="t">
+          <a:bodyPr wrap="square" lIns="36576" tIns="18288" rIns="36576" bIns="18288" anchor="t">
             <a:spAutoFit/>
           </a:bodyPr>
           <a:lstStyle/>
@@ -14006,7 +11074,7 @@
           <a:noFill/>
         </p:spPr>
         <p:txBody>
-          <a:bodyPr wrap="square" lIns="36576" rIns="36576" tIns="18288" bIns="18288" anchor="t">
+          <a:bodyPr wrap="square" lIns="36576" tIns="18288" rIns="36576" bIns="18288" anchor="t">
             <a:spAutoFit/>
           </a:bodyPr>
           <a:lstStyle/>
@@ -14066,6 +11134,7 @@
           <a:lstStyle/>
           <a:p>
             <a:pPr algn="ctr"/>
+            <a:endParaRPr/>
           </a:p>
         </p:txBody>
       </p:sp>
@@ -14109,6 +11178,7 @@
           <a:lstStyle/>
           <a:p>
             <a:pPr algn="ctr"/>
+            <a:endParaRPr/>
           </a:p>
         </p:txBody>
       </p:sp>
@@ -14129,7 +11199,7 @@
           <a:noFill/>
         </p:spPr>
         <p:txBody>
-          <a:bodyPr wrap="square" lIns="36576" rIns="36576" tIns="18288" bIns="18288" anchor="t">
+          <a:bodyPr wrap="square" lIns="36576" tIns="18288" rIns="36576" bIns="18288" anchor="t">
             <a:spAutoFit/>
           </a:bodyPr>
           <a:lstStyle/>
@@ -14164,7 +11234,7 @@
           <a:noFill/>
         </p:spPr>
         <p:txBody>
-          <a:bodyPr wrap="square" lIns="36576" rIns="36576" tIns="18288" bIns="18288" anchor="t">
+          <a:bodyPr wrap="square" lIns="36576" tIns="18288" rIns="36576" bIns="18288" anchor="t">
             <a:spAutoFit/>
           </a:bodyPr>
           <a:lstStyle/>
@@ -14199,7 +11269,7 @@
           <a:noFill/>
         </p:spPr>
         <p:txBody>
-          <a:bodyPr wrap="square" lIns="36576" rIns="36576" tIns="18288" bIns="18288" anchor="t">
+          <a:bodyPr wrap="square" lIns="36576" tIns="18288" rIns="36576" bIns="18288" anchor="t">
             <a:spAutoFit/>
           </a:bodyPr>
           <a:lstStyle/>
@@ -14259,6 +11329,7 @@
           <a:lstStyle/>
           <a:p>
             <a:pPr algn="ctr"/>
+            <a:endParaRPr/>
           </a:p>
         </p:txBody>
       </p:sp>
@@ -14279,7 +11350,7 @@
           <a:noFill/>
         </p:spPr>
         <p:txBody>
-          <a:bodyPr wrap="square" lIns="36576" rIns="36576" tIns="18288" bIns="18288" anchor="t">
+          <a:bodyPr wrap="square" lIns="36576" tIns="18288" rIns="36576" bIns="18288" anchor="t">
             <a:spAutoFit/>
           </a:bodyPr>
           <a:lstStyle/>
@@ -14314,7 +11385,7 @@
           <a:noFill/>
         </p:spPr>
         <p:txBody>
-          <a:bodyPr wrap="square" lIns="36576" rIns="36576" tIns="18288" bIns="18288" anchor="t">
+          <a:bodyPr wrap="square" lIns="36576" tIns="18288" rIns="36576" bIns="18288" anchor="t">
             <a:spAutoFit/>
           </a:bodyPr>
           <a:lstStyle/>
@@ -14349,7 +11420,7 @@
           <a:noFill/>
         </p:spPr>
         <p:txBody>
-          <a:bodyPr wrap="square" lIns="36576" rIns="36576" tIns="18288" bIns="18288" anchor="t">
+          <a:bodyPr wrap="square" lIns="36576" tIns="18288" rIns="36576" bIns="18288" anchor="t">
             <a:spAutoFit/>
           </a:bodyPr>
           <a:lstStyle/>
@@ -14376,7 +11447,7 @@
 </file>
 
 <file path=ppt/slides/slide7.xml><?xml version="1.0" encoding="utf-8"?>
-<p:sld xmlns:a="http://schemas.openxmlformats.org/drawingml/2006/main" xmlns:p="http://schemas.openxmlformats.org/presentationml/2006/main" xmlns:r="http://schemas.openxmlformats.org/officeDocument/2006/relationships">
+<p:sld xmlns:a="http://schemas.openxmlformats.org/drawingml/2006/main" xmlns:r="http://schemas.openxmlformats.org/officeDocument/2006/relationships" xmlns:p="http://schemas.openxmlformats.org/presentationml/2006/main">
   <p:cSld>
     <p:spTree>
       <p:nvGrpSpPr>
@@ -14384,7 +11455,14 @@
         <p:cNvGrpSpPr/>
         <p:nvPr/>
       </p:nvGrpSpPr>
-      <p:grpSpPr/>
+      <p:grpSpPr>
+        <a:xfrm>
+          <a:off x="0" y="0"/>
+          <a:ext cx="0" cy="0"/>
+          <a:chOff x="0" y="0"/>
+          <a:chExt cx="0" cy="0"/>
+        </a:xfrm>
+      </p:grpSpPr>
       <p:pic>
         <p:nvPicPr>
           <p:cNvPr id="2" name="Picture 1" descr="pic1_slide7_crop.png"/>
@@ -14394,7 +11472,7 @@
           <p:nvPr/>
         </p:nvPicPr>
         <p:blipFill>
-          <a:blip r:embed="rId3"/>
+          <a:blip r:embed="rId2"/>
           <a:stretch>
             <a:fillRect/>
           </a:stretch>
@@ -14418,7 +11496,7 @@
 </file>
 
 <file path=ppt/slides/slide8.xml><?xml version="1.0" encoding="utf-8"?>
-<p:sld xmlns:a="http://schemas.openxmlformats.org/drawingml/2006/main" xmlns:p="http://schemas.openxmlformats.org/presentationml/2006/main" xmlns:r="http://schemas.openxmlformats.org/officeDocument/2006/relationships">
+<p:sld xmlns:a="http://schemas.openxmlformats.org/drawingml/2006/main" xmlns:r="http://schemas.openxmlformats.org/officeDocument/2006/relationships" xmlns:p="http://schemas.openxmlformats.org/presentationml/2006/main">
   <p:cSld>
     <p:spTree>
       <p:nvGrpSpPr>
@@ -14426,7 +11504,14 @@
         <p:cNvGrpSpPr/>
         <p:nvPr/>
       </p:nvGrpSpPr>
-      <p:grpSpPr/>
+      <p:grpSpPr>
+        <a:xfrm>
+          <a:off x="0" y="0"/>
+          <a:ext cx="0" cy="0"/>
+          <a:chOff x="0" y="0"/>
+          <a:chExt cx="0" cy="0"/>
+        </a:xfrm>
+      </p:grpSpPr>
       <p:pic>
         <p:nvPicPr>
           <p:cNvPr id="2" name="Picture 1" descr="Slide_08_Background.png"/>
@@ -14493,6 +11578,7 @@
           <a:lstStyle/>
           <a:p>
             <a:pPr algn="ctr"/>
+            <a:endParaRPr/>
           </a:p>
         </p:txBody>
       </p:sp>
@@ -14513,7 +11599,7 @@
           <a:noFill/>
         </p:spPr>
         <p:txBody>
-          <a:bodyPr wrap="square" lIns="36576" rIns="36576" tIns="18288" bIns="18288" anchor="t">
+          <a:bodyPr wrap="square" lIns="36576" tIns="18288" rIns="36576" bIns="18288" anchor="t">
             <a:spAutoFit/>
           </a:bodyPr>
           <a:lstStyle/>
@@ -14548,7 +11634,7 @@
           <a:noFill/>
         </p:spPr>
         <p:txBody>
-          <a:bodyPr wrap="square" lIns="36576" rIns="36576" tIns="18288" bIns="18288" anchor="t">
+          <a:bodyPr wrap="square" lIns="36576" tIns="18288" rIns="36576" bIns="18288" anchor="t">
             <a:spAutoFit/>
           </a:bodyPr>
           <a:lstStyle/>
@@ -14608,6 +11694,7 @@
           <a:lstStyle/>
           <a:p>
             <a:pPr algn="ctr"/>
+            <a:endParaRPr/>
           </a:p>
         </p:txBody>
       </p:sp>
@@ -14651,6 +11738,7 @@
           <a:lstStyle/>
           <a:p>
             <a:pPr algn="ctr"/>
+            <a:endParaRPr/>
           </a:p>
         </p:txBody>
       </p:sp>
@@ -14671,7 +11759,7 @@
           <a:noFill/>
         </p:spPr>
         <p:txBody>
-          <a:bodyPr wrap="square" lIns="36576" rIns="36576" tIns="18288" bIns="18288" anchor="t">
+          <a:bodyPr wrap="square" lIns="36576" tIns="18288" rIns="36576" bIns="18288" anchor="t">
             <a:spAutoFit/>
           </a:bodyPr>
           <a:lstStyle/>
@@ -14706,7 +11794,7 @@
           <a:noFill/>
         </p:spPr>
         <p:txBody>
-          <a:bodyPr wrap="square" lIns="36576" rIns="36576" tIns="18288" bIns="18288" anchor="t">
+          <a:bodyPr wrap="square" lIns="36576" tIns="18288" rIns="36576" bIns="18288" anchor="t">
             <a:spAutoFit/>
           </a:bodyPr>
           <a:lstStyle/>
@@ -14741,7 +11829,7 @@
           <a:noFill/>
         </p:spPr>
         <p:txBody>
-          <a:bodyPr wrap="square" lIns="36576" rIns="36576" tIns="18288" bIns="18288" anchor="t">
+          <a:bodyPr wrap="square" lIns="36576" tIns="18288" rIns="36576" bIns="18288" anchor="t">
             <a:spAutoFit/>
           </a:bodyPr>
           <a:lstStyle/>
@@ -14801,6 +11889,7 @@
           <a:lstStyle/>
           <a:p>
             <a:pPr algn="ctr"/>
+            <a:endParaRPr/>
           </a:p>
         </p:txBody>
       </p:sp>
@@ -14844,6 +11933,7 @@
           <a:lstStyle/>
           <a:p>
             <a:pPr algn="ctr"/>
+            <a:endParaRPr/>
           </a:p>
         </p:txBody>
       </p:sp>
@@ -14864,7 +11954,7 @@
           <a:noFill/>
         </p:spPr>
         <p:txBody>
-          <a:bodyPr wrap="square" lIns="36576" rIns="36576" tIns="18288" bIns="18288" anchor="t">
+          <a:bodyPr wrap="square" lIns="36576" tIns="18288" rIns="36576" bIns="18288" anchor="t">
             <a:spAutoFit/>
           </a:bodyPr>
           <a:lstStyle/>
@@ -14899,7 +11989,7 @@
           <a:noFill/>
         </p:spPr>
         <p:txBody>
-          <a:bodyPr wrap="square" lIns="36576" rIns="36576" tIns="18288" bIns="18288" anchor="t">
+          <a:bodyPr wrap="square" lIns="36576" tIns="18288" rIns="36576" bIns="18288" anchor="t">
             <a:spAutoFit/>
           </a:bodyPr>
           <a:lstStyle/>
@@ -14934,7 +12024,7 @@
           <a:noFill/>
         </p:spPr>
         <p:txBody>
-          <a:bodyPr wrap="square" lIns="36576" rIns="36576" tIns="18288" bIns="18288" anchor="t">
+          <a:bodyPr wrap="square" lIns="36576" tIns="18288" rIns="36576" bIns="18288" anchor="t">
             <a:spAutoFit/>
           </a:bodyPr>
           <a:lstStyle/>
@@ -14994,6 +12084,7 @@
           <a:lstStyle/>
           <a:p>
             <a:pPr algn="ctr"/>
+            <a:endParaRPr/>
           </a:p>
         </p:txBody>
       </p:sp>
@@ -15037,6 +12128,7 @@
           <a:lstStyle/>
           <a:p>
             <a:pPr algn="ctr"/>
+            <a:endParaRPr/>
           </a:p>
         </p:txBody>
       </p:sp>
@@ -15057,7 +12149,7 @@
           <a:noFill/>
         </p:spPr>
         <p:txBody>
-          <a:bodyPr wrap="square" lIns="36576" rIns="36576" tIns="18288" bIns="18288" anchor="t">
+          <a:bodyPr wrap="square" lIns="36576" tIns="18288" rIns="36576" bIns="18288" anchor="t">
             <a:spAutoFit/>
           </a:bodyPr>
           <a:lstStyle/>
@@ -15092,7 +12184,7 @@
           <a:noFill/>
         </p:spPr>
         <p:txBody>
-          <a:bodyPr wrap="square" lIns="36576" rIns="36576" tIns="18288" bIns="18288" anchor="t">
+          <a:bodyPr wrap="square" lIns="36576" tIns="18288" rIns="36576" bIns="18288" anchor="t">
             <a:spAutoFit/>
           </a:bodyPr>
           <a:lstStyle/>
@@ -15127,7 +12219,7 @@
           <a:noFill/>
         </p:spPr>
         <p:txBody>
-          <a:bodyPr wrap="square" lIns="36576" rIns="36576" tIns="18288" bIns="18288" anchor="t">
+          <a:bodyPr wrap="square" lIns="36576" tIns="18288" rIns="36576" bIns="18288" anchor="t">
             <a:spAutoFit/>
           </a:bodyPr>
           <a:lstStyle/>
@@ -15187,6 +12279,7 @@
           <a:lstStyle/>
           <a:p>
             <a:pPr algn="ctr"/>
+            <a:endParaRPr/>
           </a:p>
         </p:txBody>
       </p:sp>
@@ -15230,6 +12323,7 @@
           <a:lstStyle/>
           <a:p>
             <a:pPr algn="ctr"/>
+            <a:endParaRPr/>
           </a:p>
         </p:txBody>
       </p:sp>
@@ -15250,7 +12344,7 @@
           <a:noFill/>
         </p:spPr>
         <p:txBody>
-          <a:bodyPr wrap="square" lIns="36576" rIns="36576" tIns="18288" bIns="18288" anchor="t">
+          <a:bodyPr wrap="square" lIns="36576" tIns="18288" rIns="36576" bIns="18288" anchor="t">
             <a:spAutoFit/>
           </a:bodyPr>
           <a:lstStyle/>
@@ -15285,7 +12379,7 @@
           <a:noFill/>
         </p:spPr>
         <p:txBody>
-          <a:bodyPr wrap="square" lIns="36576" rIns="36576" tIns="18288" bIns="18288" anchor="t">
+          <a:bodyPr wrap="square" lIns="36576" tIns="18288" rIns="36576" bIns="18288" anchor="t">
             <a:spAutoFit/>
           </a:bodyPr>
           <a:lstStyle/>
@@ -15320,7 +12414,7 @@
           <a:noFill/>
         </p:spPr>
         <p:txBody>
-          <a:bodyPr wrap="square" lIns="36576" rIns="36576" tIns="18288" bIns="18288" anchor="t">
+          <a:bodyPr wrap="square" lIns="36576" tIns="18288" rIns="36576" bIns="18288" anchor="t">
             <a:spAutoFit/>
           </a:bodyPr>
           <a:lstStyle/>
@@ -15380,6 +12474,7 @@
           <a:lstStyle/>
           <a:p>
             <a:pPr algn="ctr"/>
+            <a:endParaRPr/>
           </a:p>
         </p:txBody>
       </p:sp>
@@ -15423,6 +12518,7 @@
           <a:lstStyle/>
           <a:p>
             <a:pPr algn="ctr"/>
+            <a:endParaRPr/>
           </a:p>
         </p:txBody>
       </p:sp>
@@ -15443,7 +12539,7 @@
           <a:noFill/>
         </p:spPr>
         <p:txBody>
-          <a:bodyPr wrap="square" lIns="36576" rIns="36576" tIns="18288" bIns="18288" anchor="t">
+          <a:bodyPr wrap="square" lIns="36576" tIns="18288" rIns="36576" bIns="18288" anchor="t">
             <a:spAutoFit/>
           </a:bodyPr>
           <a:lstStyle/>
@@ -15478,7 +12574,7 @@
           <a:noFill/>
         </p:spPr>
         <p:txBody>
-          <a:bodyPr wrap="square" lIns="36576" rIns="36576" tIns="18288" bIns="18288" anchor="t">
+          <a:bodyPr wrap="square" lIns="36576" tIns="18288" rIns="36576" bIns="18288" anchor="t">
             <a:spAutoFit/>
           </a:bodyPr>
           <a:lstStyle/>
@@ -15513,7 +12609,7 @@
           <a:noFill/>
         </p:spPr>
         <p:txBody>
-          <a:bodyPr wrap="square" lIns="36576" rIns="36576" tIns="18288" bIns="18288" anchor="t">
+          <a:bodyPr wrap="square" lIns="36576" tIns="18288" rIns="36576" bIns="18288" anchor="t">
             <a:spAutoFit/>
           </a:bodyPr>
           <a:lstStyle/>
@@ -15573,6 +12669,7 @@
           <a:lstStyle/>
           <a:p>
             <a:pPr algn="ctr"/>
+            <a:endParaRPr/>
           </a:p>
         </p:txBody>
       </p:sp>
@@ -15616,6 +12713,7 @@
           <a:lstStyle/>
           <a:p>
             <a:pPr algn="ctr"/>
+            <a:endParaRPr/>
           </a:p>
         </p:txBody>
       </p:sp>
@@ -15636,7 +12734,7 @@
           <a:noFill/>
         </p:spPr>
         <p:txBody>
-          <a:bodyPr wrap="square" lIns="36576" rIns="36576" tIns="18288" bIns="18288" anchor="t">
+          <a:bodyPr wrap="square" lIns="36576" tIns="18288" rIns="36576" bIns="18288" anchor="t">
             <a:spAutoFit/>
           </a:bodyPr>
           <a:lstStyle/>
@@ -15671,7 +12769,7 @@
           <a:noFill/>
         </p:spPr>
         <p:txBody>
-          <a:bodyPr wrap="square" lIns="36576" rIns="36576" tIns="18288" bIns="18288" anchor="t">
+          <a:bodyPr wrap="square" lIns="36576" tIns="18288" rIns="36576" bIns="18288" anchor="t">
             <a:spAutoFit/>
           </a:bodyPr>
           <a:lstStyle/>
@@ -15706,7 +12804,7 @@
           <a:noFill/>
         </p:spPr>
         <p:txBody>
-          <a:bodyPr wrap="square" lIns="36576" rIns="36576" tIns="18288" bIns="18288" anchor="t">
+          <a:bodyPr wrap="square" lIns="36576" tIns="18288" rIns="36576" bIns="18288" anchor="t">
             <a:spAutoFit/>
           </a:bodyPr>
           <a:lstStyle/>
@@ -15766,6 +12864,7 @@
           <a:lstStyle/>
           <a:p>
             <a:pPr algn="ctr"/>
+            <a:endParaRPr/>
           </a:p>
         </p:txBody>
       </p:sp>
@@ -15786,7 +12885,7 @@
           <a:noFill/>
         </p:spPr>
         <p:txBody>
-          <a:bodyPr wrap="square" lIns="36576" rIns="36576" tIns="18288" bIns="18288" anchor="t">
+          <a:bodyPr wrap="square" lIns="36576" tIns="18288" rIns="36576" bIns="18288" anchor="t">
             <a:spAutoFit/>
           </a:bodyPr>
           <a:lstStyle/>
@@ -15821,7 +12920,7 @@
           <a:noFill/>
         </p:spPr>
         <p:txBody>
-          <a:bodyPr wrap="square" lIns="36576" rIns="36576" tIns="18288" bIns="18288" anchor="t">
+          <a:bodyPr wrap="square" lIns="36576" tIns="18288" rIns="36576" bIns="18288" anchor="t">
             <a:spAutoFit/>
           </a:bodyPr>
           <a:lstStyle/>
@@ -15856,7 +12955,7 @@
           <a:noFill/>
         </p:spPr>
         <p:txBody>
-          <a:bodyPr wrap="square" lIns="36576" rIns="36576" tIns="18288" bIns="18288" anchor="t">
+          <a:bodyPr wrap="square" lIns="36576" tIns="18288" rIns="36576" bIns="18288" anchor="t">
             <a:spAutoFit/>
           </a:bodyPr>
           <a:lstStyle/>
@@ -15883,7 +12982,7 @@
 </file>
 
 <file path=ppt/slides/slide9.xml><?xml version="1.0" encoding="utf-8"?>
-<p:sld xmlns:a="http://schemas.openxmlformats.org/drawingml/2006/main" xmlns:p="http://schemas.openxmlformats.org/presentationml/2006/main" xmlns:r="http://schemas.openxmlformats.org/officeDocument/2006/relationships">
+<p:sld xmlns:a="http://schemas.openxmlformats.org/drawingml/2006/main" xmlns:r="http://schemas.openxmlformats.org/officeDocument/2006/relationships" xmlns:p="http://schemas.openxmlformats.org/presentationml/2006/main">
   <p:cSld>
     <p:spTree>
       <p:nvGrpSpPr>
@@ -15891,10 +12990,17 @@
         <p:cNvGrpSpPr/>
         <p:nvPr/>
       </p:nvGrpSpPr>
-      <p:grpSpPr/>
+      <p:grpSpPr>
+        <a:xfrm>
+          <a:off x="0" y="0"/>
+          <a:ext cx="0" cy="0"/>
+          <a:chOff x="0" y="0"/>
+          <a:chExt cx="0" cy="0"/>
+        </a:xfrm>
+      </p:grpSpPr>
       <p:pic>
         <p:nvPicPr>
-          <p:cNvPr id="2" name="Picture 1" descr="Slide_09_Background.png"/>
+          <p:cNvPr id="2" name="Picture 1" descr="Slide_11_Background.png"/>
           <p:cNvPicPr>
             <a:picLocks noChangeAspect="1"/>
           </p:cNvPicPr>
@@ -15908,7 +13014,7 @@
         </p:blipFill>
         <p:spPr>
           <a:xfrm>
-            <a:off x="0" y="0"/>
+            <a:off x="20664" y="0"/>
             <a:ext cx="12191999" cy="6858000"/>
           </a:xfrm>
           <a:prstGeom prst="rect">
@@ -15958,6 +13064,7 @@
           <a:lstStyle/>
           <a:p>
             <a:pPr algn="ctr"/>
+            <a:endParaRPr/>
           </a:p>
         </p:txBody>
       </p:sp>
@@ -15978,7 +13085,7 @@
           <a:noFill/>
         </p:spPr>
         <p:txBody>
-          <a:bodyPr wrap="square" lIns="36576" rIns="36576" tIns="18288" bIns="18288" anchor="t">
+          <a:bodyPr wrap="square" lIns="36576" tIns="18288" rIns="36576" bIns="18288" anchor="t">
             <a:spAutoFit/>
           </a:bodyPr>
           <a:lstStyle/>
@@ -15991,7 +13098,7 @@
                 </a:solidFill>
                 <a:latin typeface="Aptos"/>
               </a:rPr>
-              <a:t>WHO USES IT</a:t>
+              <a:t>SYSTEM ARCHITECTURE</a:t>
             </a:r>
           </a:p>
         </p:txBody>
@@ -16005,29 +13112,55 @@
         <p:spPr>
           <a:xfrm>
             <a:off x="566928" y="749808"/>
-            <a:ext cx="6217920" cy="228600"/>
-          </a:xfrm>
-          <a:prstGeom prst="rect">
-            <a:avLst/>
-          </a:prstGeom>
-          <a:noFill/>
-        </p:spPr>
-        <p:txBody>
-          <a:bodyPr wrap="square" lIns="36576" rIns="36576" tIns="18288" bIns="18288" anchor="t">
-            <a:spAutoFit/>
-          </a:bodyPr>
-          <a:lstStyle/>
+            <a:ext cx="6217920" cy="452432"/>
+          </a:xfrm>
+          <a:prstGeom prst="rect">
+            <a:avLst/>
+          </a:prstGeom>
+          <a:noFill/>
+        </p:spPr>
+        <p:txBody>
+          <a:bodyPr wrap="square" lIns="36576" tIns="18288" rIns="36576" bIns="18288" anchor="t">
+            <a:spAutoFit/>
+          </a:bodyPr>
+          <a:lstStyle/>
+          <a:p>
+            <a:r>
+              <a:rPr sz="1300" b="0" dirty="0">
+                <a:solidFill>
+                  <a:srgbClr val="082F5D"/>
+                </a:solidFill>
+                <a:latin typeface="Aptos"/>
+              </a:rPr>
+              <a:t>High Level Architecture</a:t>
+            </a:r>
+            <a:r>
+              <a:rPr lang="en-US" sz="1300" b="0" dirty="0">
+                <a:solidFill>
+                  <a:srgbClr val="082F5D"/>
+                </a:solidFill>
+                <a:latin typeface="Aptos"/>
+              </a:rPr>
+              <a:t> &amp; </a:t>
+            </a:r>
+            <a:r>
+              <a:rPr lang="en-US" sz="1400" dirty="0">
+                <a:solidFill>
+                  <a:srgbClr val="082F5D"/>
+                </a:solidFill>
+                <a:latin typeface="Aptos"/>
+              </a:rPr>
+              <a:t>Technology Stack</a:t>
+            </a:r>
+          </a:p>
           <a:p>
             <a:pPr algn="l"/>
-            <a:r>
-              <a:rPr sz="1150" b="0">
-                <a:solidFill>
-                  <a:srgbClr val="082F5D"/>
-                </a:solidFill>
-                <a:latin typeface="Aptos"/>
-              </a:rPr>
-              <a:t>User Roles &amp; Responsibilities</a:t>
-            </a:r>
+            <a:endParaRPr sz="1300" b="0" dirty="0">
+              <a:solidFill>
+                <a:srgbClr val="082F5D"/>
+              </a:solidFill>
+              <a:latin typeface="Aptos"/>
+            </a:endParaRPr>
           </a:p>
         </p:txBody>
       </p:sp>
@@ -16039,8 +13172,8 @@
         </p:nvSpPr>
         <p:spPr>
           <a:xfrm>
-            <a:off x="594360" y="1463040"/>
-            <a:ext cx="5257800" cy="3977639"/>
+            <a:off x="548639" y="1463040"/>
+            <a:ext cx="3638461" cy="2194559"/>
           </a:xfrm>
           <a:prstGeom prst="roundRect">
             <a:avLst/>
@@ -16073,6 +13206,7 @@
           <a:lstStyle/>
           <a:p>
             <a:pPr algn="ctr"/>
+            <a:endParaRPr/>
           </a:p>
         </p:txBody>
       </p:sp>
@@ -16084,8 +13218,8 @@
         </p:nvSpPr>
         <p:spPr>
           <a:xfrm>
-            <a:off x="594360" y="1463040"/>
-            <a:ext cx="64008" cy="3977639"/>
+            <a:off x="502920" y="1463040"/>
+            <a:ext cx="94488" cy="2194559"/>
           </a:xfrm>
           <a:prstGeom prst="rect">
             <a:avLst/>
@@ -16116,6 +13250,7 @@
           <a:lstStyle/>
           <a:p>
             <a:pPr algn="ctr"/>
+            <a:endParaRPr/>
           </a:p>
         </p:txBody>
       </p:sp>
@@ -16127,29 +13262,29 @@
         </p:nvSpPr>
         <p:spPr>
           <a:xfrm>
-            <a:off x="777240" y="1572768"/>
-            <a:ext cx="4965192" cy="347472"/>
-          </a:xfrm>
-          <a:prstGeom prst="rect">
-            <a:avLst/>
-          </a:prstGeom>
-          <a:noFill/>
-        </p:spPr>
-        <p:txBody>
-          <a:bodyPr wrap="square" lIns="36576" rIns="36576" tIns="18288" bIns="18288" anchor="t">
+            <a:off x="685800" y="1572768"/>
+            <a:ext cx="2953512" cy="347472"/>
+          </a:xfrm>
+          <a:prstGeom prst="rect">
+            <a:avLst/>
+          </a:prstGeom>
+          <a:noFill/>
+        </p:spPr>
+        <p:txBody>
+          <a:bodyPr wrap="square" lIns="36576" tIns="18288" rIns="36576" bIns="18288" anchor="t">
             <a:spAutoFit/>
           </a:bodyPr>
           <a:lstStyle/>
           <a:p>
             <a:pPr algn="l"/>
             <a:r>
-              <a:rPr sz="1700" b="1">
+              <a:rPr sz="1500" b="1">
                 <a:solidFill>
                   <a:srgbClr val="1569B4"/>
                 </a:solidFill>
                 <a:latin typeface="Aptos"/>
               </a:rPr>
-              <a:t>ADMIN</a:t>
+              <a:t>FRONTEND</a:t>
             </a:r>
           </a:p>
         </p:txBody>
@@ -16162,33 +13297,53 @@
         </p:nvSpPr>
         <p:spPr>
           <a:xfrm>
-            <a:off x="777240" y="2150000"/>
-            <a:ext cx="4965192" cy="3355847"/>
-          </a:xfrm>
-          <a:prstGeom prst="rect">
-            <a:avLst/>
-          </a:prstGeom>
-          <a:noFill/>
-        </p:spPr>
-        <p:txBody>
-          <a:bodyPr wrap="square" lIns="36576" rIns="36576" tIns="18288" bIns="18288" anchor="t">
-            <a:spAutoFit/>
-          </a:bodyPr>
-          <a:lstStyle/>
+            <a:off x="685800" y="1993392"/>
+            <a:ext cx="3501300" cy="1329595"/>
+          </a:xfrm>
+          <a:prstGeom prst="rect">
+            <a:avLst/>
+          </a:prstGeom>
+          <a:noFill/>
+        </p:spPr>
+        <p:txBody>
+          <a:bodyPr wrap="square" lIns="36576" tIns="18288" rIns="36576" bIns="18288" anchor="t">
+            <a:spAutoFit/>
+          </a:bodyPr>
+          <a:lstStyle/>
+          <a:p>
+            <a:r>
+              <a:rPr sz="1400" b="0" dirty="0">
+                <a:solidFill>
+                  <a:srgbClr val="1C2B39"/>
+                </a:solidFill>
+                <a:latin typeface="Aptos"/>
+              </a:rPr>
+              <a:t>React.js SPA</a:t>
+            </a:r>
+            <a:r>
+              <a:rPr lang="en-US" sz="1400" dirty="0">
+                <a:solidFill>
+                  <a:srgbClr val="1C2B39"/>
+                </a:solidFill>
+                <a:latin typeface="Aptos"/>
+              </a:rPr>
+              <a:t>
+Axios
+React Router
+Bootstrap / CSS</a:t>
+            </a:r>
+          </a:p>
           <a:p>
             <a:pPr algn="l"/>
             <a:r>
-              <a:rPr sz="1700" b="0">
+              <a:rPr sz="1400" b="0" dirty="0">
                 <a:solidFill>
                   <a:srgbClr val="1C2B39"/>
                 </a:solidFill>
                 <a:latin typeface="Aptos"/>
               </a:rPr>
-              <a:t>• Manages the platform
-• Reviews and approves/rejects customer requests
-• Manages customer/account information
-• Processes loan applications
-• Monitors transaction activity</a:t>
+              <a:t>
+What customers and admins see and click</a:t>
             </a:r>
           </a:p>
         </p:txBody>
@@ -16201,8 +13356,8 @@
         </p:nvSpPr>
         <p:spPr>
           <a:xfrm>
-            <a:off x="6291072" y="1463040"/>
-            <a:ext cx="5257800" cy="3977639"/>
+            <a:off x="4480560" y="1463040"/>
+            <a:ext cx="3725408" cy="2286000"/>
           </a:xfrm>
           <a:prstGeom prst="roundRect">
             <a:avLst/>
@@ -16235,6 +13390,7 @@
           <a:lstStyle/>
           <a:p>
             <a:pPr algn="ctr"/>
+            <a:endParaRPr/>
           </a:p>
         </p:txBody>
       </p:sp>
@@ -16246,8 +13402,8 @@
         </p:nvSpPr>
         <p:spPr>
           <a:xfrm>
-            <a:off x="6291072" y="1463040"/>
-            <a:ext cx="64008" cy="3977639"/>
+            <a:off x="4480560" y="1463040"/>
+            <a:ext cx="64008" cy="2286000"/>
           </a:xfrm>
           <a:prstGeom prst="rect">
             <a:avLst/>
@@ -16278,6 +13434,7 @@
           <a:lstStyle/>
           <a:p>
             <a:pPr algn="ctr"/>
+            <a:endParaRPr/>
           </a:p>
         </p:txBody>
       </p:sp>
@@ -16289,75 +13446,974 @@
         </p:nvSpPr>
         <p:spPr>
           <a:xfrm>
-            <a:off x="6473952" y="1572768"/>
-            <a:ext cx="4965192" cy="347472"/>
-          </a:xfrm>
-          <a:prstGeom prst="rect">
-            <a:avLst/>
-          </a:prstGeom>
-          <a:noFill/>
-        </p:spPr>
-        <p:txBody>
-          <a:bodyPr wrap="square" lIns="36576" rIns="36576" tIns="18288" bIns="18288" anchor="t">
+            <a:off x="4695444" y="1591373"/>
+            <a:ext cx="2953512" cy="283154"/>
+          </a:xfrm>
+          <a:prstGeom prst="rect">
+            <a:avLst/>
+          </a:prstGeom>
+          <a:noFill/>
+        </p:spPr>
+        <p:txBody>
+          <a:bodyPr wrap="square" lIns="36576" tIns="18288" rIns="36576" bIns="18288" anchor="t">
+            <a:spAutoFit/>
+          </a:bodyPr>
+          <a:lstStyle/>
+          <a:p>
+            <a:r>
+              <a:rPr lang="en-US" sz="1600" b="1" dirty="0">
+                <a:solidFill>
+                  <a:srgbClr val="139197"/>
+                </a:solidFill>
+                <a:latin typeface="Aptos"/>
+              </a:rPr>
+              <a:t>BACKEND  </a:t>
+            </a:r>
+            <a:r>
+              <a:rPr sz="1500" b="1" dirty="0">
+                <a:solidFill>
+                  <a:srgbClr val="139197"/>
+                </a:solidFill>
+                <a:latin typeface="Aptos"/>
+              </a:rPr>
+              <a:t>APPLICATION</a:t>
+            </a:r>
+          </a:p>
+        </p:txBody>
+      </p:sp>
+      <p:sp>
+        <p:nvSpPr>
+          <p:cNvPr id="13" name="TextBox 12"/>
+          <p:cNvSpPr txBox="1"/>
+          <p:nvPr/>
+        </p:nvSpPr>
+        <p:spPr>
+          <a:xfrm>
+            <a:off x="4663440" y="1993392"/>
+            <a:ext cx="3406812" cy="898708"/>
+          </a:xfrm>
+          <a:prstGeom prst="rect">
+            <a:avLst/>
+          </a:prstGeom>
+          <a:noFill/>
+        </p:spPr>
+        <p:txBody>
+          <a:bodyPr wrap="square" lIns="36576" tIns="18288" rIns="36576" bIns="18288" anchor="t">
+            <a:spAutoFit/>
+          </a:bodyPr>
+          <a:lstStyle/>
+          <a:p>
+            <a:r>
+              <a:rPr lang="en-US" sz="1400" dirty="0">
+                <a:solidFill>
+                  <a:srgbClr val="1C2B39"/>
+                </a:solidFill>
+                <a:latin typeface="Aptos"/>
+              </a:rPr>
+              <a:t>Java</a:t>
+            </a:r>
+          </a:p>
+          <a:p>
+            <a:r>
+              <a:rPr sz="1400" b="0" dirty="0">
+                <a:solidFill>
+                  <a:srgbClr val="1C2B39"/>
+                </a:solidFill>
+                <a:latin typeface="Aptos"/>
+              </a:rPr>
+              <a:t>Spring Boot REST API + Spring Security
+Auth &amp; Roles</a:t>
+            </a:r>
+          </a:p>
+        </p:txBody>
+      </p:sp>
+      <p:sp>
+        <p:nvSpPr>
+          <p:cNvPr id="14" name="Rounded Rectangle 13"/>
+          <p:cNvSpPr/>
+          <p:nvPr/>
+        </p:nvSpPr>
+        <p:spPr>
+          <a:xfrm>
+            <a:off x="8458200" y="1463040"/>
+            <a:ext cx="3571504" cy="2286000"/>
+          </a:xfrm>
+          <a:prstGeom prst="roundRect">
+            <a:avLst/>
+          </a:prstGeom>
+          <a:solidFill>
+            <a:srgbClr val="FFFFFF"/>
+          </a:solidFill>
+          <a:ln w="11430">
+            <a:solidFill>
+              <a:srgbClr val="BED3E4"/>
+            </a:solidFill>
+          </a:ln>
+        </p:spPr>
+        <p:style>
+          <a:lnRef idx="1">
+            <a:schemeClr val="accent1"/>
+          </a:lnRef>
+          <a:fillRef idx="3">
+            <a:schemeClr val="accent1"/>
+          </a:fillRef>
+          <a:effectRef idx="2">
+            <a:schemeClr val="accent1"/>
+          </a:effectRef>
+          <a:fontRef idx="minor">
+            <a:schemeClr val="lt1"/>
+          </a:fontRef>
+        </p:style>
+        <p:txBody>
+          <a:bodyPr rtlCol="0" anchor="ctr"/>
+          <a:lstStyle/>
+          <a:p>
+            <a:pPr algn="ctr"/>
+            <a:endParaRPr/>
+          </a:p>
+        </p:txBody>
+      </p:sp>
+      <p:sp>
+        <p:nvSpPr>
+          <p:cNvPr id="15" name="Rectangle 14"/>
+          <p:cNvSpPr/>
+          <p:nvPr/>
+        </p:nvSpPr>
+        <p:spPr>
+          <a:xfrm>
+            <a:off x="8458200" y="1463040"/>
+            <a:ext cx="64008" cy="2286000"/>
+          </a:xfrm>
+          <a:prstGeom prst="rect">
+            <a:avLst/>
+          </a:prstGeom>
+          <a:solidFill>
+            <a:srgbClr val="489757"/>
+          </a:solidFill>
+          <a:ln>
+            <a:noFill/>
+          </a:ln>
+        </p:spPr>
+        <p:style>
+          <a:lnRef idx="1">
+            <a:schemeClr val="accent1"/>
+          </a:lnRef>
+          <a:fillRef idx="3">
+            <a:schemeClr val="accent1"/>
+          </a:fillRef>
+          <a:effectRef idx="2">
+            <a:schemeClr val="accent1"/>
+          </a:effectRef>
+          <a:fontRef idx="minor">
+            <a:schemeClr val="lt1"/>
+          </a:fontRef>
+        </p:style>
+        <p:txBody>
+          <a:bodyPr rtlCol="0" anchor="ctr"/>
+          <a:lstStyle/>
+          <a:p>
+            <a:pPr algn="ctr"/>
+            <a:endParaRPr/>
+          </a:p>
+        </p:txBody>
+      </p:sp>
+      <p:sp>
+        <p:nvSpPr>
+          <p:cNvPr id="16" name="TextBox 15"/>
+          <p:cNvSpPr txBox="1"/>
+          <p:nvPr/>
+        </p:nvSpPr>
+        <p:spPr>
+          <a:xfrm>
+            <a:off x="8641080" y="1572768"/>
+            <a:ext cx="2953512" cy="347472"/>
+          </a:xfrm>
+          <a:prstGeom prst="rect">
+            <a:avLst/>
+          </a:prstGeom>
+          <a:noFill/>
+        </p:spPr>
+        <p:txBody>
+          <a:bodyPr wrap="square" lIns="36576" tIns="18288" rIns="36576" bIns="18288" anchor="t">
             <a:spAutoFit/>
           </a:bodyPr>
           <a:lstStyle/>
           <a:p>
             <a:pPr algn="l"/>
             <a:r>
-              <a:rPr sz="1700" b="1">
+              <a:rPr sz="1500" b="1">
+                <a:solidFill>
+                  <a:srgbClr val="489757"/>
+                </a:solidFill>
+                <a:latin typeface="Aptos"/>
+              </a:rPr>
+              <a:t>DATA LAYER</a:t>
+            </a:r>
+          </a:p>
+        </p:txBody>
+      </p:sp>
+      <p:sp>
+        <p:nvSpPr>
+          <p:cNvPr id="17" name="TextBox 16"/>
+          <p:cNvSpPr txBox="1"/>
+          <p:nvPr/>
+        </p:nvSpPr>
+        <p:spPr>
+          <a:xfrm>
+            <a:off x="8641079" y="1993392"/>
+            <a:ext cx="3269871" cy="683264"/>
+          </a:xfrm>
+          <a:prstGeom prst="rect">
+            <a:avLst/>
+          </a:prstGeom>
+          <a:noFill/>
+        </p:spPr>
+        <p:txBody>
+          <a:bodyPr wrap="square" lIns="36576" tIns="18288" rIns="36576" bIns="18288" anchor="t">
+            <a:spAutoFit/>
+          </a:bodyPr>
+          <a:lstStyle/>
+          <a:p>
+            <a:pPr algn="l"/>
+            <a:r>
+              <a:rPr sz="1400" b="0" dirty="0">
+                <a:solidFill>
+                  <a:srgbClr val="1C2B39"/>
+                </a:solidFill>
+                <a:latin typeface="Aptos"/>
+              </a:rPr>
+              <a:t>MySQL + Spring Data JPA
+Accounts, loans and transactions</a:t>
+            </a:r>
+          </a:p>
+        </p:txBody>
+      </p:sp>
+      <p:sp>
+        <p:nvSpPr>
+          <p:cNvPr id="21" name="Rounded Rectangle Backdrop"/>
+          <p:cNvSpPr/>
+          <p:nvPr/>
+        </p:nvSpPr>
+        <p:spPr>
+          <a:xfrm>
+            <a:off x="2600000" y="4010000"/>
+            <a:ext cx="6980000" cy="480000"/>
+          </a:xfrm>
+          <a:prstGeom prst="roundRect">
+            <a:avLst>
+              <a:gd name="adj" fmla="val 30000"/>
+            </a:avLst>
+          </a:prstGeom>
+          <a:solidFill>
+            <a:srgbClr val="FFFFFF"/>
+          </a:solidFill>
+          <a:ln w="11430">
+            <a:solidFill>
+              <a:srgbClr val="BED3E4"/>
+            </a:solidFill>
+          </a:ln>
+        </p:spPr>
+        <p:style>
+          <a:lnRef idx="1">
+            <a:schemeClr val="accent1"/>
+          </a:lnRef>
+          <a:fillRef idx="3">
+            <a:schemeClr val="accent1"/>
+          </a:fillRef>
+          <a:effectRef idx="2">
+            <a:schemeClr val="accent1"/>
+          </a:effectRef>
+          <a:fontRef idx="minor">
+            <a:schemeClr val="lt1"/>
+          </a:fontRef>
+        </p:style>
+        <p:txBody>
+          <a:bodyPr rtlCol="0" anchor="ctr"/>
+          <a:lstStyle/>
+          <a:p>
+            <a:pPr algn="ctr"/>
+            <a:endParaRPr/>
+          </a:p>
+        </p:txBody>
+      </p:sp>
+      <p:sp>
+        <p:nvSpPr>
+          <p:cNvPr id="18" name="TextBox 17"/>
+          <p:cNvSpPr txBox="1"/>
+          <p:nvPr/>
+        </p:nvSpPr>
+        <p:spPr>
+          <a:xfrm>
+            <a:off x="960120" y="4126512"/>
+            <a:ext cx="10149840" cy="320040"/>
+          </a:xfrm>
+          <a:prstGeom prst="rect">
+            <a:avLst/>
+          </a:prstGeom>
+          <a:noFill/>
+        </p:spPr>
+        <p:txBody>
+          <a:bodyPr wrap="square" lIns="36576" tIns="18288" rIns="36576" bIns="18288" anchor="t">
+            <a:spAutoFit/>
+          </a:bodyPr>
+          <a:lstStyle/>
+          <a:p>
+            <a:pPr algn="ctr"/>
+            <a:r>
+              <a:rPr sz="1250" b="1">
+                <a:solidFill>
+                  <a:srgbClr val="082F5D"/>
+                </a:solidFill>
+                <a:latin typeface="Aptos"/>
+              </a:rPr>
+              <a:t>CLIENT  →  API  →  SECURITY / BUSINESS LOGIC  →  DATABASE  →  RESPONSE</a:t>
+            </a:r>
+          </a:p>
+        </p:txBody>
+      </p:sp>
+      <p:sp>
+        <p:nvSpPr>
+          <p:cNvPr id="19" name="Rounded Rectangle 18"/>
+          <p:cNvSpPr/>
+          <p:nvPr/>
+        </p:nvSpPr>
+        <p:spPr>
+          <a:xfrm>
+            <a:off x="685800" y="4617720"/>
+            <a:ext cx="2514600" cy="960120"/>
+          </a:xfrm>
+          <a:prstGeom prst="roundRect">
+            <a:avLst/>
+          </a:prstGeom>
+          <a:solidFill>
+            <a:srgbClr val="FFFFFF"/>
+          </a:solidFill>
+          <a:ln w="11430">
+            <a:solidFill>
+              <a:srgbClr val="BED3E4"/>
+            </a:solidFill>
+          </a:ln>
+        </p:spPr>
+        <p:style>
+          <a:lnRef idx="1">
+            <a:schemeClr val="accent1"/>
+          </a:lnRef>
+          <a:fillRef idx="3">
+            <a:schemeClr val="accent1"/>
+          </a:fillRef>
+          <a:effectRef idx="2">
+            <a:schemeClr val="accent1"/>
+          </a:effectRef>
+          <a:fontRef idx="minor">
+            <a:schemeClr val="lt1"/>
+          </a:fontRef>
+        </p:style>
+        <p:txBody>
+          <a:bodyPr rtlCol="0" anchor="ctr"/>
+          <a:lstStyle/>
+          <a:p>
+            <a:pPr algn="ctr"/>
+            <a:endParaRPr/>
+          </a:p>
+        </p:txBody>
+      </p:sp>
+      <p:sp>
+        <p:nvSpPr>
+          <p:cNvPr id="20" name="Rectangle 19"/>
+          <p:cNvSpPr/>
+          <p:nvPr/>
+        </p:nvSpPr>
+        <p:spPr>
+          <a:xfrm>
+            <a:off x="685800" y="4617720"/>
+            <a:ext cx="64008" cy="960120"/>
+          </a:xfrm>
+          <a:prstGeom prst="rect">
+            <a:avLst/>
+          </a:prstGeom>
+          <a:solidFill>
+            <a:srgbClr val="1569B4"/>
+          </a:solidFill>
+          <a:ln>
+            <a:noFill/>
+          </a:ln>
+        </p:spPr>
+        <p:style>
+          <a:lnRef idx="1">
+            <a:schemeClr val="accent1"/>
+          </a:lnRef>
+          <a:fillRef idx="3">
+            <a:schemeClr val="accent1"/>
+          </a:fillRef>
+          <a:effectRef idx="2">
+            <a:schemeClr val="accent1"/>
+          </a:effectRef>
+          <a:fontRef idx="minor">
+            <a:schemeClr val="lt1"/>
+          </a:fontRef>
+        </p:style>
+        <p:txBody>
+          <a:bodyPr rtlCol="0" anchor="ctr"/>
+          <a:lstStyle/>
+          <a:p>
+            <a:pPr algn="ctr"/>
+            <a:endParaRPr/>
+          </a:p>
+        </p:txBody>
+      </p:sp>
+      <p:sp>
+        <p:nvSpPr>
+          <p:cNvPr id="37" name="TextBox 20"/>
+          <p:cNvSpPr txBox="1"/>
+          <p:nvPr/>
+        </p:nvSpPr>
+        <p:spPr>
+          <a:xfrm>
+            <a:off x="868680" y="4727448"/>
+            <a:ext cx="2221992" cy="347472"/>
+          </a:xfrm>
+          <a:prstGeom prst="rect">
+            <a:avLst/>
+          </a:prstGeom>
+          <a:noFill/>
+        </p:spPr>
+        <p:txBody>
+          <a:bodyPr wrap="square" lIns="36576" tIns="18288" rIns="36576" bIns="18288" anchor="t">
+            <a:spAutoFit/>
+          </a:bodyPr>
+          <a:lstStyle/>
+          <a:p>
+            <a:pPr algn="l"/>
+            <a:r>
+              <a:rPr sz="1300" b="1">
+                <a:solidFill>
+                  <a:srgbClr val="1569B4"/>
+                </a:solidFill>
+                <a:latin typeface="Aptos"/>
+              </a:rPr>
+              <a:t>Authentication</a:t>
+            </a:r>
+          </a:p>
+        </p:txBody>
+      </p:sp>
+      <p:sp>
+        <p:nvSpPr>
+          <p:cNvPr id="22" name="TextBox 21"/>
+          <p:cNvSpPr txBox="1"/>
+          <p:nvPr/>
+        </p:nvSpPr>
+        <p:spPr>
+          <a:xfrm>
+            <a:off x="868680" y="5148072"/>
+            <a:ext cx="2221992" cy="338328"/>
+          </a:xfrm>
+          <a:prstGeom prst="rect">
+            <a:avLst/>
+          </a:prstGeom>
+          <a:noFill/>
+        </p:spPr>
+        <p:txBody>
+          <a:bodyPr wrap="square" lIns="36576" tIns="18288" rIns="36576" bIns="18288" anchor="t">
+            <a:spAutoFit/>
+          </a:bodyPr>
+          <a:lstStyle/>
+          <a:p>
+            <a:pPr algn="l"/>
+            <a:r>
+              <a:rPr sz="1150" b="0">
+                <a:solidFill>
+                  <a:srgbClr val="1C2B39"/>
+                </a:solidFill>
+                <a:latin typeface="Aptos"/>
+              </a:rPr>
+              <a:t>Authorization</a:t>
+            </a:r>
+          </a:p>
+        </p:txBody>
+      </p:sp>
+      <p:sp>
+        <p:nvSpPr>
+          <p:cNvPr id="23" name="Rounded Rectangle 22"/>
+          <p:cNvSpPr/>
+          <p:nvPr/>
+        </p:nvSpPr>
+        <p:spPr>
+          <a:xfrm>
+            <a:off x="3337560" y="4617720"/>
+            <a:ext cx="2514600" cy="960120"/>
+          </a:xfrm>
+          <a:prstGeom prst="roundRect">
+            <a:avLst/>
+          </a:prstGeom>
+          <a:solidFill>
+            <a:srgbClr val="FFFFFF"/>
+          </a:solidFill>
+          <a:ln w="11430">
+            <a:solidFill>
+              <a:srgbClr val="BED3E4"/>
+            </a:solidFill>
+          </a:ln>
+        </p:spPr>
+        <p:style>
+          <a:lnRef idx="1">
+            <a:schemeClr val="accent1"/>
+          </a:lnRef>
+          <a:fillRef idx="3">
+            <a:schemeClr val="accent1"/>
+          </a:fillRef>
+          <a:effectRef idx="2">
+            <a:schemeClr val="accent1"/>
+          </a:effectRef>
+          <a:fontRef idx="minor">
+            <a:schemeClr val="lt1"/>
+          </a:fontRef>
+        </p:style>
+        <p:txBody>
+          <a:bodyPr rtlCol="0" anchor="ctr"/>
+          <a:lstStyle/>
+          <a:p>
+            <a:pPr algn="ctr"/>
+            <a:endParaRPr/>
+          </a:p>
+        </p:txBody>
+      </p:sp>
+      <p:sp>
+        <p:nvSpPr>
+          <p:cNvPr id="24" name="Rectangle 23"/>
+          <p:cNvSpPr/>
+          <p:nvPr/>
+        </p:nvSpPr>
+        <p:spPr>
+          <a:xfrm>
+            <a:off x="3337560" y="4617720"/>
+            <a:ext cx="64008" cy="960120"/>
+          </a:xfrm>
+          <a:prstGeom prst="rect">
+            <a:avLst/>
+          </a:prstGeom>
+          <a:solidFill>
+            <a:srgbClr val="139197"/>
+          </a:solidFill>
+          <a:ln>
+            <a:noFill/>
+          </a:ln>
+        </p:spPr>
+        <p:style>
+          <a:lnRef idx="1">
+            <a:schemeClr val="accent1"/>
+          </a:lnRef>
+          <a:fillRef idx="3">
+            <a:schemeClr val="accent1"/>
+          </a:fillRef>
+          <a:effectRef idx="2">
+            <a:schemeClr val="accent1"/>
+          </a:effectRef>
+          <a:fontRef idx="minor">
+            <a:schemeClr val="lt1"/>
+          </a:fontRef>
+        </p:style>
+        <p:txBody>
+          <a:bodyPr rtlCol="0" anchor="ctr"/>
+          <a:lstStyle/>
+          <a:p>
+            <a:pPr algn="ctr"/>
+            <a:endParaRPr/>
+          </a:p>
+        </p:txBody>
+      </p:sp>
+      <p:sp>
+        <p:nvSpPr>
+          <p:cNvPr id="25" name="TextBox 24"/>
+          <p:cNvSpPr txBox="1"/>
+          <p:nvPr/>
+        </p:nvSpPr>
+        <p:spPr>
+          <a:xfrm>
+            <a:off x="3520440" y="4727448"/>
+            <a:ext cx="2221992" cy="347472"/>
+          </a:xfrm>
+          <a:prstGeom prst="rect">
+            <a:avLst/>
+          </a:prstGeom>
+          <a:noFill/>
+        </p:spPr>
+        <p:txBody>
+          <a:bodyPr wrap="square" lIns="36576" tIns="18288" rIns="36576" bIns="18288" anchor="t">
+            <a:spAutoFit/>
+          </a:bodyPr>
+          <a:lstStyle/>
+          <a:p>
+            <a:pPr algn="l"/>
+            <a:r>
+              <a:rPr sz="1300" b="1">
                 <a:solidFill>
                   <a:srgbClr val="139197"/>
                 </a:solidFill>
                 <a:latin typeface="Aptos"/>
               </a:rPr>
-              <a:t>CUSTOMER</a:t>
-            </a:r>
-          </a:p>
-        </p:txBody>
-      </p:sp>
-      <p:sp>
-        <p:nvSpPr>
-          <p:cNvPr id="13" name="TextBox 12"/>
-          <p:cNvSpPr txBox="1"/>
-          <p:nvPr/>
-        </p:nvSpPr>
-        <p:spPr>
-          <a:xfrm>
-            <a:off x="6473952" y="2150000"/>
-            <a:ext cx="4965192" cy="3355847"/>
-          </a:xfrm>
-          <a:prstGeom prst="rect">
-            <a:avLst/>
-          </a:prstGeom>
-          <a:noFill/>
-        </p:spPr>
-        <p:txBody>
-          <a:bodyPr wrap="square" lIns="36576" rIns="36576" tIns="18288" bIns="18288" anchor="t">
+              <a:t>Role-Based</a:t>
+            </a:r>
+          </a:p>
+        </p:txBody>
+      </p:sp>
+      <p:sp>
+        <p:nvSpPr>
+          <p:cNvPr id="26" name="TextBox 25"/>
+          <p:cNvSpPr txBox="1"/>
+          <p:nvPr/>
+        </p:nvSpPr>
+        <p:spPr>
+          <a:xfrm>
+            <a:off x="3520440" y="5148072"/>
+            <a:ext cx="2221992" cy="338328"/>
+          </a:xfrm>
+          <a:prstGeom prst="rect">
+            <a:avLst/>
+          </a:prstGeom>
+          <a:noFill/>
+        </p:spPr>
+        <p:txBody>
+          <a:bodyPr wrap="square" lIns="36576" tIns="18288" rIns="36576" bIns="18288" anchor="t">
             <a:spAutoFit/>
           </a:bodyPr>
           <a:lstStyle/>
           <a:p>
             <a:pPr algn="l"/>
             <a:r>
-              <a:rPr sz="1700" b="0">
+              <a:rPr sz="1150" b="0">
                 <a:solidFill>
                   <a:srgbClr val="1C2B39"/>
                 </a:solidFill>
                 <a:latin typeface="Aptos"/>
               </a:rPr>
-              <a:t>• Registers and logs in
-• Accesses approved account
-• Performs transactions
-• Applies for loans
-• Views loan and transaction status</a:t>
-            </a:r>
-          </a:p>
-        </p:txBody>
-      </p:sp>
-      <p:sp>
-        <p:nvSpPr>
-          <p:cNvPr id="14" name="TextBox 13"/>
+              <a:t>Access Control</a:t>
+            </a:r>
+          </a:p>
+        </p:txBody>
+      </p:sp>
+      <p:sp>
+        <p:nvSpPr>
+          <p:cNvPr id="27" name="Rounded Rectangle 26"/>
+          <p:cNvSpPr/>
+          <p:nvPr/>
+        </p:nvSpPr>
+        <p:spPr>
+          <a:xfrm>
+            <a:off x="5989320" y="4617720"/>
+            <a:ext cx="2514600" cy="960120"/>
+          </a:xfrm>
+          <a:prstGeom prst="roundRect">
+            <a:avLst/>
+          </a:prstGeom>
+          <a:solidFill>
+            <a:srgbClr val="FFFFFF"/>
+          </a:solidFill>
+          <a:ln w="11430">
+            <a:solidFill>
+              <a:srgbClr val="BED3E4"/>
+            </a:solidFill>
+          </a:ln>
+        </p:spPr>
+        <p:style>
+          <a:lnRef idx="1">
+            <a:schemeClr val="accent1"/>
+          </a:lnRef>
+          <a:fillRef idx="3">
+            <a:schemeClr val="accent1"/>
+          </a:fillRef>
+          <a:effectRef idx="2">
+            <a:schemeClr val="accent1"/>
+          </a:effectRef>
+          <a:fontRef idx="minor">
+            <a:schemeClr val="lt1"/>
+          </a:fontRef>
+        </p:style>
+        <p:txBody>
+          <a:bodyPr rtlCol="0" anchor="ctr"/>
+          <a:lstStyle/>
+          <a:p>
+            <a:pPr algn="ctr"/>
+            <a:endParaRPr/>
+          </a:p>
+        </p:txBody>
+      </p:sp>
+      <p:sp>
+        <p:nvSpPr>
+          <p:cNvPr id="28" name="Rectangle 27"/>
+          <p:cNvSpPr/>
+          <p:nvPr/>
+        </p:nvSpPr>
+        <p:spPr>
+          <a:xfrm>
+            <a:off x="5989320" y="4617720"/>
+            <a:ext cx="64008" cy="960120"/>
+          </a:xfrm>
+          <a:prstGeom prst="rect">
+            <a:avLst/>
+          </a:prstGeom>
+          <a:solidFill>
+            <a:srgbClr val="489757"/>
+          </a:solidFill>
+          <a:ln>
+            <a:noFill/>
+          </a:ln>
+        </p:spPr>
+        <p:style>
+          <a:lnRef idx="1">
+            <a:schemeClr val="accent1"/>
+          </a:lnRef>
+          <a:fillRef idx="3">
+            <a:schemeClr val="accent1"/>
+          </a:fillRef>
+          <a:effectRef idx="2">
+            <a:schemeClr val="accent1"/>
+          </a:effectRef>
+          <a:fontRef idx="minor">
+            <a:schemeClr val="lt1"/>
+          </a:fontRef>
+        </p:style>
+        <p:txBody>
+          <a:bodyPr rtlCol="0" anchor="ctr"/>
+          <a:lstStyle/>
+          <a:p>
+            <a:pPr algn="ctr"/>
+            <a:endParaRPr/>
+          </a:p>
+        </p:txBody>
+      </p:sp>
+      <p:sp>
+        <p:nvSpPr>
+          <p:cNvPr id="29" name="TextBox 28"/>
+          <p:cNvSpPr txBox="1"/>
+          <p:nvPr/>
+        </p:nvSpPr>
+        <p:spPr>
+          <a:xfrm>
+            <a:off x="6172200" y="4727448"/>
+            <a:ext cx="2221992" cy="347472"/>
+          </a:xfrm>
+          <a:prstGeom prst="rect">
+            <a:avLst/>
+          </a:prstGeom>
+          <a:noFill/>
+        </p:spPr>
+        <p:txBody>
+          <a:bodyPr wrap="square" lIns="36576" tIns="18288" rIns="36576" bIns="18288" anchor="t">
+            <a:spAutoFit/>
+          </a:bodyPr>
+          <a:lstStyle/>
+          <a:p>
+            <a:pPr algn="l"/>
+            <a:r>
+              <a:rPr sz="1300" b="1">
+                <a:solidFill>
+                  <a:srgbClr val="489757"/>
+                </a:solidFill>
+                <a:latin typeface="Aptos"/>
+              </a:rPr>
+              <a:t>Business Logic</a:t>
+            </a:r>
+          </a:p>
+        </p:txBody>
+      </p:sp>
+      <p:sp>
+        <p:nvSpPr>
+          <p:cNvPr id="30" name="TextBox 29"/>
+          <p:cNvSpPr txBox="1"/>
+          <p:nvPr/>
+        </p:nvSpPr>
+        <p:spPr>
+          <a:xfrm>
+            <a:off x="6172200" y="5148072"/>
+            <a:ext cx="2221992" cy="338328"/>
+          </a:xfrm>
+          <a:prstGeom prst="rect">
+            <a:avLst/>
+          </a:prstGeom>
+          <a:noFill/>
+        </p:spPr>
+        <p:txBody>
+          <a:bodyPr wrap="square" lIns="36576" tIns="18288" rIns="36576" bIns="18288" anchor="t">
+            <a:spAutoFit/>
+          </a:bodyPr>
+          <a:lstStyle/>
+          <a:p>
+            <a:pPr algn="l"/>
+            <a:r>
+              <a:rPr sz="1150" b="0">
+                <a:solidFill>
+                  <a:srgbClr val="1C2B39"/>
+                </a:solidFill>
+                <a:latin typeface="Aptos"/>
+              </a:rPr>
+              <a:t>&amp; Validations</a:t>
+            </a:r>
+          </a:p>
+        </p:txBody>
+      </p:sp>
+      <p:sp>
+        <p:nvSpPr>
+          <p:cNvPr id="31" name="Rounded Rectangle 30"/>
+          <p:cNvSpPr/>
+          <p:nvPr/>
+        </p:nvSpPr>
+        <p:spPr>
+          <a:xfrm>
+            <a:off x="8641080" y="4617720"/>
+            <a:ext cx="2514600" cy="960120"/>
+          </a:xfrm>
+          <a:prstGeom prst="roundRect">
+            <a:avLst/>
+          </a:prstGeom>
+          <a:solidFill>
+            <a:srgbClr val="FFFFFF"/>
+          </a:solidFill>
+          <a:ln w="11430">
+            <a:solidFill>
+              <a:srgbClr val="BED3E4"/>
+            </a:solidFill>
+          </a:ln>
+        </p:spPr>
+        <p:style>
+          <a:lnRef idx="1">
+            <a:schemeClr val="accent1"/>
+          </a:lnRef>
+          <a:fillRef idx="3">
+            <a:schemeClr val="accent1"/>
+          </a:fillRef>
+          <a:effectRef idx="2">
+            <a:schemeClr val="accent1"/>
+          </a:effectRef>
+          <a:fontRef idx="minor">
+            <a:schemeClr val="lt1"/>
+          </a:fontRef>
+        </p:style>
+        <p:txBody>
+          <a:bodyPr rtlCol="0" anchor="ctr"/>
+          <a:lstStyle/>
+          <a:p>
+            <a:pPr algn="ctr"/>
+            <a:endParaRPr/>
+          </a:p>
+        </p:txBody>
+      </p:sp>
+      <p:sp>
+        <p:nvSpPr>
+          <p:cNvPr id="32" name="Rectangle 31"/>
+          <p:cNvSpPr/>
+          <p:nvPr/>
+        </p:nvSpPr>
+        <p:spPr>
+          <a:xfrm>
+            <a:off x="8641080" y="4617720"/>
+            <a:ext cx="64008" cy="960120"/>
+          </a:xfrm>
+          <a:prstGeom prst="rect">
+            <a:avLst/>
+          </a:prstGeom>
+          <a:solidFill>
+            <a:srgbClr val="584896"/>
+          </a:solidFill>
+          <a:ln>
+            <a:noFill/>
+          </a:ln>
+        </p:spPr>
+        <p:style>
+          <a:lnRef idx="1">
+            <a:schemeClr val="accent1"/>
+          </a:lnRef>
+          <a:fillRef idx="3">
+            <a:schemeClr val="accent1"/>
+          </a:fillRef>
+          <a:effectRef idx="2">
+            <a:schemeClr val="accent1"/>
+          </a:effectRef>
+          <a:fontRef idx="minor">
+            <a:schemeClr val="lt1"/>
+          </a:fontRef>
+        </p:style>
+        <p:txBody>
+          <a:bodyPr rtlCol="0" anchor="ctr"/>
+          <a:lstStyle/>
+          <a:p>
+            <a:pPr algn="ctr"/>
+            <a:endParaRPr/>
+          </a:p>
+        </p:txBody>
+      </p:sp>
+      <p:sp>
+        <p:nvSpPr>
+          <p:cNvPr id="33" name="TextBox 32"/>
+          <p:cNvSpPr txBox="1"/>
+          <p:nvPr/>
+        </p:nvSpPr>
+        <p:spPr>
+          <a:xfrm>
+            <a:off x="8823959" y="4727448"/>
+            <a:ext cx="2221992" cy="347472"/>
+          </a:xfrm>
+          <a:prstGeom prst="rect">
+            <a:avLst/>
+          </a:prstGeom>
+          <a:noFill/>
+        </p:spPr>
+        <p:txBody>
+          <a:bodyPr wrap="square" lIns="36576" tIns="18288" rIns="36576" bIns="18288" anchor="t">
+            <a:spAutoFit/>
+          </a:bodyPr>
+          <a:lstStyle/>
+          <a:p>
+            <a:pPr algn="l"/>
+            <a:r>
+              <a:rPr sz="1300" b="1">
+                <a:solidFill>
+                  <a:srgbClr val="584896"/>
+                </a:solidFill>
+                <a:latin typeface="Aptos"/>
+              </a:rPr>
+              <a:t>Data Persistence</a:t>
+            </a:r>
+          </a:p>
+        </p:txBody>
+      </p:sp>
+      <p:sp>
+        <p:nvSpPr>
+          <p:cNvPr id="34" name="TextBox 33"/>
+          <p:cNvSpPr txBox="1"/>
+          <p:nvPr/>
+        </p:nvSpPr>
+        <p:spPr>
+          <a:xfrm>
+            <a:off x="8823959" y="5148072"/>
+            <a:ext cx="2221992" cy="338328"/>
+          </a:xfrm>
+          <a:prstGeom prst="rect">
+            <a:avLst/>
+          </a:prstGeom>
+          <a:noFill/>
+        </p:spPr>
+        <p:txBody>
+          <a:bodyPr wrap="square" lIns="36576" tIns="18288" rIns="36576" bIns="18288" anchor="t">
+            <a:spAutoFit/>
+          </a:bodyPr>
+          <a:lstStyle/>
+          <a:p>
+            <a:pPr algn="l"/>
+            <a:r>
+              <a:rPr sz="1150" b="0">
+                <a:solidFill>
+                  <a:srgbClr val="1C2B39"/>
+                </a:solidFill>
+                <a:latin typeface="Aptos"/>
+              </a:rPr>
+              <a:t>&amp; Management</a:t>
+            </a:r>
+          </a:p>
+        </p:txBody>
+      </p:sp>
+      <p:sp>
+        <p:nvSpPr>
+          <p:cNvPr id="35" name="TextBox 34"/>
           <p:cNvSpPr txBox="1"/>
           <p:nvPr/>
         </p:nvSpPr>
@@ -16372,7 +14428,7 @@
           <a:noFill/>
         </p:spPr>
         <p:txBody>
-          <a:bodyPr wrap="square" lIns="36576" rIns="36576" tIns="18288" bIns="18288" anchor="t">
+          <a:bodyPr wrap="square" lIns="36576" tIns="18288" rIns="36576" bIns="18288" anchor="t">
             <a:spAutoFit/>
           </a:bodyPr>
           <a:lstStyle/>
@@ -16392,7 +14448,7 @@
       </p:sp>
       <p:sp>
         <p:nvSpPr>
-          <p:cNvPr id="15" name="TextBox 14"/>
+          <p:cNvPr id="36" name="TextBox 35"/>
           <p:cNvSpPr txBox="1"/>
           <p:nvPr/>
         </p:nvSpPr>
@@ -16407,7 +14463,7 @@
           <a:noFill/>
         </p:spPr>
         <p:txBody>
-          <a:bodyPr wrap="square" lIns="36576" rIns="36576" tIns="18288" bIns="18288" anchor="t">
+          <a:bodyPr wrap="square" lIns="36576" tIns="18288" rIns="36576" bIns="18288" anchor="t">
             <a:spAutoFit/>
           </a:bodyPr>
           <a:lstStyle/>
@@ -16420,7 +14476,7 @@
                 </a:solidFill>
                 <a:latin typeface="Aptos"/>
               </a:rPr>
-              <a:t>09</a:t>
+              <a:t>11</a:t>
             </a:r>
           </a:p>
         </p:txBody>
